--- a/OS 4 Správa pamäti I.pptx
+++ b/OS 4 Správa pamäti I.pptx
@@ -6,7 +6,7 @@
     <p:sldMasterId id="2147483660" r:id="rId2"/>
   </p:sldMasterIdLst>
   <p:notesMasterIdLst>
-    <p:notesMasterId r:id="rId74"/>
+    <p:notesMasterId r:id="rId75"/>
   </p:notesMasterIdLst>
   <p:sldIdLst>
     <p:sldId id="256" r:id="rId3"/>
@@ -32,54 +32,55 @@
     <p:sldId id="357" r:id="rId23"/>
     <p:sldId id="359" r:id="rId24"/>
     <p:sldId id="360" r:id="rId25"/>
-    <p:sldId id="361" r:id="rId26"/>
+    <p:sldId id="470" r:id="rId26"/>
     <p:sldId id="346" r:id="rId27"/>
     <p:sldId id="279" r:id="rId28"/>
     <p:sldId id="285" r:id="rId29"/>
-    <p:sldId id="281" r:id="rId30"/>
-    <p:sldId id="289" r:id="rId31"/>
-    <p:sldId id="349" r:id="rId32"/>
-    <p:sldId id="451" r:id="rId33"/>
-    <p:sldId id="385" r:id="rId34"/>
-    <p:sldId id="315" r:id="rId35"/>
-    <p:sldId id="452" r:id="rId36"/>
-    <p:sldId id="453" r:id="rId37"/>
-    <p:sldId id="414" r:id="rId38"/>
-    <p:sldId id="371" r:id="rId39"/>
-    <p:sldId id="350" r:id="rId40"/>
-    <p:sldId id="298" r:id="rId41"/>
-    <p:sldId id="299" r:id="rId42"/>
-    <p:sldId id="439" r:id="rId43"/>
-    <p:sldId id="454" r:id="rId44"/>
-    <p:sldId id="455" r:id="rId45"/>
-    <p:sldId id="456" r:id="rId46"/>
-    <p:sldId id="457" r:id="rId47"/>
-    <p:sldId id="302" r:id="rId48"/>
-    <p:sldId id="303" r:id="rId49"/>
-    <p:sldId id="458" r:id="rId50"/>
-    <p:sldId id="304" r:id="rId51"/>
-    <p:sldId id="305" r:id="rId52"/>
-    <p:sldId id="459" r:id="rId53"/>
-    <p:sldId id="417" r:id="rId54"/>
-    <p:sldId id="440" r:id="rId55"/>
-    <p:sldId id="460" r:id="rId56"/>
-    <p:sldId id="380" r:id="rId57"/>
-    <p:sldId id="416" r:id="rId58"/>
-    <p:sldId id="381" r:id="rId59"/>
-    <p:sldId id="461" r:id="rId60"/>
-    <p:sldId id="384" r:id="rId61"/>
-    <p:sldId id="310" r:id="rId62"/>
-    <p:sldId id="311" r:id="rId63"/>
-    <p:sldId id="469" r:id="rId64"/>
-    <p:sldId id="463" r:id="rId65"/>
-    <p:sldId id="464" r:id="rId66"/>
-    <p:sldId id="422" r:id="rId67"/>
-    <p:sldId id="423" r:id="rId68"/>
-    <p:sldId id="424" r:id="rId69"/>
-    <p:sldId id="465" r:id="rId70"/>
-    <p:sldId id="466" r:id="rId71"/>
-    <p:sldId id="467" r:id="rId72"/>
-    <p:sldId id="333" r:id="rId73"/>
+    <p:sldId id="471" r:id="rId30"/>
+    <p:sldId id="281" r:id="rId31"/>
+    <p:sldId id="289" r:id="rId32"/>
+    <p:sldId id="349" r:id="rId33"/>
+    <p:sldId id="451" r:id="rId34"/>
+    <p:sldId id="385" r:id="rId35"/>
+    <p:sldId id="315" r:id="rId36"/>
+    <p:sldId id="452" r:id="rId37"/>
+    <p:sldId id="453" r:id="rId38"/>
+    <p:sldId id="414" r:id="rId39"/>
+    <p:sldId id="371" r:id="rId40"/>
+    <p:sldId id="350" r:id="rId41"/>
+    <p:sldId id="298" r:id="rId42"/>
+    <p:sldId id="299" r:id="rId43"/>
+    <p:sldId id="439" r:id="rId44"/>
+    <p:sldId id="454" r:id="rId45"/>
+    <p:sldId id="455" r:id="rId46"/>
+    <p:sldId id="456" r:id="rId47"/>
+    <p:sldId id="457" r:id="rId48"/>
+    <p:sldId id="302" r:id="rId49"/>
+    <p:sldId id="303" r:id="rId50"/>
+    <p:sldId id="458" r:id="rId51"/>
+    <p:sldId id="304" r:id="rId52"/>
+    <p:sldId id="305" r:id="rId53"/>
+    <p:sldId id="459" r:id="rId54"/>
+    <p:sldId id="417" r:id="rId55"/>
+    <p:sldId id="440" r:id="rId56"/>
+    <p:sldId id="460" r:id="rId57"/>
+    <p:sldId id="380" r:id="rId58"/>
+    <p:sldId id="416" r:id="rId59"/>
+    <p:sldId id="381" r:id="rId60"/>
+    <p:sldId id="461" r:id="rId61"/>
+    <p:sldId id="384" r:id="rId62"/>
+    <p:sldId id="310" r:id="rId63"/>
+    <p:sldId id="311" r:id="rId64"/>
+    <p:sldId id="469" r:id="rId65"/>
+    <p:sldId id="463" r:id="rId66"/>
+    <p:sldId id="464" r:id="rId67"/>
+    <p:sldId id="422" r:id="rId68"/>
+    <p:sldId id="423" r:id="rId69"/>
+    <p:sldId id="424" r:id="rId70"/>
+    <p:sldId id="465" r:id="rId71"/>
+    <p:sldId id="466" r:id="rId72"/>
+    <p:sldId id="467" r:id="rId73"/>
+    <p:sldId id="333" r:id="rId74"/>
   </p:sldIdLst>
   <p:sldSz cx="12192000" cy="6858000"/>
   <p:notesSz cx="6858000" cy="9144000"/>
@@ -206,7 +207,7 @@
 <file path=ppt/revisionInfo.xml><?xml version="1.0" encoding="utf-8"?>
 <p1510:revInfo xmlns:a="http://schemas.openxmlformats.org/drawingml/2006/main" xmlns:r="http://schemas.openxmlformats.org/officeDocument/2006/relationships" xmlns:p1510="http://schemas.microsoft.com/office/powerpoint/2015/10/main">
   <p1510:revLst>
-    <p1510:client id="{948B29B3-A0E7-9F41-88DC-40F7529E299D}" v="13" dt="2025-02-24T13:33:11.776"/>
+    <p1510:client id="{F64C621D-DF1C-D64C-ACF6-730CD44362CB}" v="20" dt="2026-07-13T06:03:26.827"/>
   </p1510:revLst>
 </p1510:revInfo>
 </file>
@@ -214,476 +215,171 @@
 <file path=ppt/changesInfos/changesInfo1.xml><?xml version="1.0" encoding="utf-8"?>
 <pc:chgInfo xmlns:a="http://schemas.openxmlformats.org/drawingml/2006/main" xmlns:r="http://schemas.openxmlformats.org/officeDocument/2006/relationships" xmlns:ac="http://schemas.microsoft.com/office/drawing/2013/main/command" xmlns:pc="http://schemas.microsoft.com/office/powerpoint/2013/main/command">
   <pc:docChgLst>
-    <pc:chgData name="Baráth, Július" userId="S::julius.barath@aos.sk::aebde9b9-dccc-4475-a9ac-c05e78323d7a" providerId="AD" clId="Web-{AB0C9A49-01C1-218C-3224-4279FE84DDDF}"/>
-    <pc:docChg chg="modSld">
-      <pc:chgData name="Baráth, Július" userId="S::julius.barath@aos.sk::aebde9b9-dccc-4475-a9ac-c05e78323d7a" providerId="AD" clId="Web-{AB0C9A49-01C1-218C-3224-4279FE84DDDF}" dt="2023-03-01T10:04:27.916" v="3" actId="20577"/>
+    <pc:chgData name="Baráth, Július" userId="aebde9b9-dccc-4475-a9ac-c05e78323d7a" providerId="ADAL" clId="{4A0811C8-ED2F-505E-B787-C8270CED5046}"/>
+    <pc:docChg chg="undo custSel addSld delSld modSld">
+      <pc:chgData name="Baráth, Július" userId="aebde9b9-dccc-4475-a9ac-c05e78323d7a" providerId="ADAL" clId="{4A0811C8-ED2F-505E-B787-C8270CED5046}" dt="2026-07-13T06:03:26.827" v="222" actId="1076"/>
       <pc:docMkLst>
         <pc:docMk/>
       </pc:docMkLst>
-      <pc:sldChg chg="modSp">
-        <pc:chgData name="Baráth, Július" userId="S::julius.barath@aos.sk::aebde9b9-dccc-4475-a9ac-c05e78323d7a" providerId="AD" clId="Web-{AB0C9A49-01C1-218C-3224-4279FE84DDDF}" dt="2023-03-01T10:03:07.131" v="2" actId="20577"/>
+      <pc:sldChg chg="addSp modSp mod">
+        <pc:chgData name="Baráth, Július" userId="aebde9b9-dccc-4475-a9ac-c05e78323d7a" providerId="ADAL" clId="{4A0811C8-ED2F-505E-B787-C8270CED5046}" dt="2026-07-13T06:00:40.897" v="205" actId="14100"/>
         <pc:sldMkLst>
           <pc:docMk/>
-          <pc:sldMk cId="1468456781" sldId="289"/>
-        </pc:sldMkLst>
-      </pc:sldChg>
-      <pc:sldChg chg="modSp">
-        <pc:chgData name="Baráth, Július" userId="S::julius.barath@aos.sk::aebde9b9-dccc-4475-a9ac-c05e78323d7a" providerId="AD" clId="Web-{AB0C9A49-01C1-218C-3224-4279FE84DDDF}" dt="2023-03-01T10:04:27.916" v="3" actId="20577"/>
-        <pc:sldMkLst>
-          <pc:docMk/>
-          <pc:sldMk cId="3073104993" sldId="453"/>
-        </pc:sldMkLst>
-      </pc:sldChg>
-    </pc:docChg>
-  </pc:docChgLst>
-  <pc:docChgLst>
-    <pc:chgData name="Baráth, Július" userId="aebde9b9-dccc-4475-a9ac-c05e78323d7a" providerId="ADAL" clId="{72FBC24B-2D9E-D44F-82A3-032CAADAD09F}"/>
-    <pc:docChg chg="undo custSel modSld">
-      <pc:chgData name="Baráth, Július" userId="aebde9b9-dccc-4475-a9ac-c05e78323d7a" providerId="ADAL" clId="{72FBC24B-2D9E-D44F-82A3-032CAADAD09F}" dt="2024-02-22T08:19:06.935" v="117" actId="20577"/>
-      <pc:docMkLst>
-        <pc:docMk/>
-      </pc:docMkLst>
-      <pc:sldChg chg="modSp mod">
-        <pc:chgData name="Baráth, Július" userId="aebde9b9-dccc-4475-a9ac-c05e78323d7a" providerId="ADAL" clId="{72FBC24B-2D9E-D44F-82A3-032CAADAD09F}" dt="2024-02-22T07:03:56.519" v="76" actId="20577"/>
-        <pc:sldMkLst>
-          <pc:docMk/>
-          <pc:sldMk cId="2350242147" sldId="279"/>
-        </pc:sldMkLst>
-      </pc:sldChg>
-      <pc:sldChg chg="modSp mod">
-        <pc:chgData name="Baráth, Július" userId="aebde9b9-dccc-4475-a9ac-c05e78323d7a" providerId="ADAL" clId="{72FBC24B-2D9E-D44F-82A3-032CAADAD09F}" dt="2024-02-22T07:04:55.888" v="78" actId="20577"/>
-        <pc:sldMkLst>
-          <pc:docMk/>
-          <pc:sldMk cId="2888860324" sldId="281"/>
-        </pc:sldMkLst>
-      </pc:sldChg>
-      <pc:sldChg chg="modSp mod">
-        <pc:chgData name="Baráth, Július" userId="aebde9b9-dccc-4475-a9ac-c05e78323d7a" providerId="ADAL" clId="{72FBC24B-2D9E-D44F-82A3-032CAADAD09F}" dt="2024-02-22T07:05:41.581" v="90" actId="20577"/>
-        <pc:sldMkLst>
-          <pc:docMk/>
-          <pc:sldMk cId="1468456781" sldId="289"/>
-        </pc:sldMkLst>
-      </pc:sldChg>
-      <pc:sldChg chg="modSp mod">
-        <pc:chgData name="Baráth, Július" userId="aebde9b9-dccc-4475-a9ac-c05e78323d7a" providerId="ADAL" clId="{72FBC24B-2D9E-D44F-82A3-032CAADAD09F}" dt="2024-02-22T07:24:00.853" v="93" actId="113"/>
-        <pc:sldMkLst>
-          <pc:docMk/>
-          <pc:sldMk cId="2903130704" sldId="305"/>
-        </pc:sldMkLst>
-      </pc:sldChg>
-      <pc:sldChg chg="modSp mod">
-        <pc:chgData name="Baráth, Július" userId="aebde9b9-dccc-4475-a9ac-c05e78323d7a" providerId="ADAL" clId="{72FBC24B-2D9E-D44F-82A3-032CAADAD09F}" dt="2024-02-16T11:42:34.301" v="7" actId="20577"/>
-        <pc:sldMkLst>
-          <pc:docMk/>
-          <pc:sldMk cId="3861218752" sldId="354"/>
-        </pc:sldMkLst>
-      </pc:sldChg>
-      <pc:sldChg chg="modSp mod">
-        <pc:chgData name="Baráth, Július" userId="aebde9b9-dccc-4475-a9ac-c05e78323d7a" providerId="ADAL" clId="{72FBC24B-2D9E-D44F-82A3-032CAADAD09F}" dt="2024-02-16T11:46:41.276" v="23" actId="20577"/>
-        <pc:sldMkLst>
-          <pc:docMk/>
-          <pc:sldMk cId="3945961256" sldId="355"/>
-        </pc:sldMkLst>
-      </pc:sldChg>
-      <pc:sldChg chg="modSp mod">
-        <pc:chgData name="Baráth, Július" userId="aebde9b9-dccc-4475-a9ac-c05e78323d7a" providerId="ADAL" clId="{72FBC24B-2D9E-D44F-82A3-032CAADAD09F}" dt="2024-02-22T07:00:55.252" v="30" actId="20577"/>
-        <pc:sldMkLst>
-          <pc:docMk/>
-          <pc:sldMk cId="1892307816" sldId="357"/>
-        </pc:sldMkLst>
-      </pc:sldChg>
-      <pc:sldChg chg="modSp mod">
-        <pc:chgData name="Baráth, Július" userId="aebde9b9-dccc-4475-a9ac-c05e78323d7a" providerId="ADAL" clId="{72FBC24B-2D9E-D44F-82A3-032CAADAD09F}" dt="2024-02-22T07:01:57.711" v="47" actId="6549"/>
-        <pc:sldMkLst>
-          <pc:docMk/>
-          <pc:sldMk cId="2109023687" sldId="359"/>
-        </pc:sldMkLst>
-      </pc:sldChg>
-      <pc:sldChg chg="modSp mod">
-        <pc:chgData name="Baráth, Július" userId="aebde9b9-dccc-4475-a9ac-c05e78323d7a" providerId="ADAL" clId="{72FBC24B-2D9E-D44F-82A3-032CAADAD09F}" dt="2024-02-16T11:33:50.667" v="1" actId="5793"/>
-        <pc:sldMkLst>
-          <pc:docMk/>
-          <pc:sldMk cId="3039716921" sldId="419"/>
-        </pc:sldMkLst>
-      </pc:sldChg>
-      <pc:sldChg chg="modSp mod">
-        <pc:chgData name="Baráth, Július" userId="aebde9b9-dccc-4475-a9ac-c05e78323d7a" providerId="ADAL" clId="{72FBC24B-2D9E-D44F-82A3-032CAADAD09F}" dt="2024-02-16T11:36:51.604" v="5" actId="20577"/>
-        <pc:sldMkLst>
-          <pc:docMk/>
-          <pc:sldMk cId="2353504456" sldId="442"/>
-        </pc:sldMkLst>
-      </pc:sldChg>
-      <pc:sldChg chg="modSp mod">
-        <pc:chgData name="Baráth, Július" userId="aebde9b9-dccc-4475-a9ac-c05e78323d7a" providerId="ADAL" clId="{72FBC24B-2D9E-D44F-82A3-032CAADAD09F}" dt="2024-02-16T11:35:01.866" v="2" actId="115"/>
-        <pc:sldMkLst>
-          <pc:docMk/>
-          <pc:sldMk cId="2967805831" sldId="445"/>
-        </pc:sldMkLst>
-      </pc:sldChg>
-      <pc:sldChg chg="modSp mod">
-        <pc:chgData name="Baráth, Július" userId="aebde9b9-dccc-4475-a9ac-c05e78323d7a" providerId="ADAL" clId="{72FBC24B-2D9E-D44F-82A3-032CAADAD09F}" dt="2024-02-22T07:00:24.117" v="24" actId="113"/>
-        <pc:sldMkLst>
-          <pc:docMk/>
-          <pc:sldMk cId="902208961" sldId="450"/>
-        </pc:sldMkLst>
-      </pc:sldChg>
-      <pc:sldChg chg="modSp mod">
-        <pc:chgData name="Baráth, Július" userId="aebde9b9-dccc-4475-a9ac-c05e78323d7a" providerId="ADAL" clId="{72FBC24B-2D9E-D44F-82A3-032CAADAD09F}" dt="2024-02-22T07:15:32.659" v="92" actId="15"/>
-        <pc:sldMkLst>
-          <pc:docMk/>
-          <pc:sldMk cId="2788878870" sldId="456"/>
-        </pc:sldMkLst>
-      </pc:sldChg>
-      <pc:sldChg chg="addSp delSp modSp mod">
-        <pc:chgData name="Baráth, Július" userId="aebde9b9-dccc-4475-a9ac-c05e78323d7a" providerId="ADAL" clId="{72FBC24B-2D9E-D44F-82A3-032CAADAD09F}" dt="2024-02-22T07:57:11.625" v="113" actId="21"/>
-        <pc:sldMkLst>
-          <pc:docMk/>
-          <pc:sldMk cId="1540982134" sldId="460"/>
-        </pc:sldMkLst>
-      </pc:sldChg>
-      <pc:sldChg chg="addSp modSp mod">
-        <pc:chgData name="Baráth, Július" userId="aebde9b9-dccc-4475-a9ac-c05e78323d7a" providerId="ADAL" clId="{72FBC24B-2D9E-D44F-82A3-032CAADAD09F}" dt="2024-02-22T08:19:06.935" v="117" actId="20577"/>
-        <pc:sldMkLst>
-          <pc:docMk/>
-          <pc:sldMk cId="1716954247" sldId="466"/>
-        </pc:sldMkLst>
-      </pc:sldChg>
-    </pc:docChg>
-  </pc:docChgLst>
-  <pc:docChgLst>
-    <pc:chgData name="Július Baráth" userId="e650c4ab-697e-4750-bd58-c1531aabce95" providerId="ADAL" clId="{987578AF-DA03-6F42-A826-F2D80B4F5D5C}"/>
-    <pc:docChg chg="custSel modSld">
-      <pc:chgData name="Július Baráth" userId="e650c4ab-697e-4750-bd58-c1531aabce95" providerId="ADAL" clId="{987578AF-DA03-6F42-A826-F2D80B4F5D5C}" dt="2019-02-25T07:24:32.866" v="253" actId="20577"/>
-      <pc:docMkLst>
-        <pc:docMk/>
-      </pc:docMkLst>
-      <pc:sldChg chg="modSp">
-        <pc:chgData name="Július Baráth" userId="e650c4ab-697e-4750-bd58-c1531aabce95" providerId="ADAL" clId="{987578AF-DA03-6F42-A826-F2D80B4F5D5C}" dt="2019-02-25T06:57:25.725" v="100" actId="20577"/>
-        <pc:sldMkLst>
-          <pc:docMk/>
-          <pc:sldMk cId="1543713500" sldId="260"/>
-        </pc:sldMkLst>
-      </pc:sldChg>
-      <pc:sldChg chg="modSp">
-        <pc:chgData name="Július Baráth" userId="e650c4ab-697e-4750-bd58-c1531aabce95" providerId="ADAL" clId="{987578AF-DA03-6F42-A826-F2D80B4F5D5C}" dt="2019-02-25T07:21:35.936" v="218" actId="20577"/>
-        <pc:sldMkLst>
-          <pc:docMk/>
-          <pc:sldMk cId="1997398123" sldId="321"/>
-        </pc:sldMkLst>
-      </pc:sldChg>
-      <pc:sldChg chg="modSp">
-        <pc:chgData name="Július Baráth" userId="e650c4ab-697e-4750-bd58-c1531aabce95" providerId="ADAL" clId="{987578AF-DA03-6F42-A826-F2D80B4F5D5C}" dt="2019-02-25T06:54:28.890" v="0" actId="207"/>
-        <pc:sldMkLst>
-          <pc:docMk/>
-          <pc:sldMk cId="1892307816" sldId="357"/>
-        </pc:sldMkLst>
-      </pc:sldChg>
-      <pc:sldChg chg="modSp">
-        <pc:chgData name="Július Baráth" userId="e650c4ab-697e-4750-bd58-c1531aabce95" providerId="ADAL" clId="{987578AF-DA03-6F42-A826-F2D80B4F5D5C}" dt="2019-02-25T07:24:32.866" v="253" actId="20577"/>
-        <pc:sldMkLst>
-          <pc:docMk/>
-          <pc:sldMk cId="1766555368" sldId="376"/>
-        </pc:sldMkLst>
-      </pc:sldChg>
-    </pc:docChg>
-  </pc:docChgLst>
-  <pc:docChgLst>
-    <pc:chgData clId="Web-{B62288BF-9547-9818-4759-AF0E68675F0E}"/>
-    <pc:docChg chg="modSld">
-      <pc:chgData name="" userId="" providerId="" clId="Web-{B62288BF-9547-9818-4759-AF0E68675F0E}" dt="2022-02-11T09:06:54.516" v="1" actId="20577"/>
-      <pc:docMkLst>
-        <pc:docMk/>
-      </pc:docMkLst>
-      <pc:sldChg chg="modSp">
-        <pc:chgData name="" userId="" providerId="" clId="Web-{B62288BF-9547-9818-4759-AF0E68675F0E}" dt="2022-02-11T09:06:54.516" v="1" actId="20577"/>
-        <pc:sldMkLst>
-          <pc:docMk/>
-          <pc:sldMk cId="1331417989" sldId="256"/>
-        </pc:sldMkLst>
-      </pc:sldChg>
-    </pc:docChg>
-  </pc:docChgLst>
-  <pc:docChgLst>
-    <pc:chgData name="Július Baráth" userId="e650c4ab-697e-4750-bd58-c1531aabce95" providerId="ADAL" clId="{2A337F4B-E2B1-2041-BEF2-A9E56E5A3F7C}"/>
-    <pc:docChg chg="undo custSel modSld sldOrd">
-      <pc:chgData name="Július Baráth" userId="e650c4ab-697e-4750-bd58-c1531aabce95" providerId="ADAL" clId="{2A337F4B-E2B1-2041-BEF2-A9E56E5A3F7C}" dt="2022-03-07T07:22:55.194" v="20" actId="6549"/>
-      <pc:docMkLst>
-        <pc:docMk/>
-      </pc:docMkLst>
-      <pc:sldChg chg="modSp mod">
-        <pc:chgData name="Július Baráth" userId="e650c4ab-697e-4750-bd58-c1531aabce95" providerId="ADAL" clId="{2A337F4B-E2B1-2041-BEF2-A9E56E5A3F7C}" dt="2022-02-28T08:07:55.424" v="4" actId="6549"/>
-        <pc:sldMkLst>
-          <pc:docMk/>
-          <pc:sldMk cId="4240063183" sldId="285"/>
-        </pc:sldMkLst>
-      </pc:sldChg>
-      <pc:sldChg chg="modSp mod">
-        <pc:chgData name="Július Baráth" userId="e650c4ab-697e-4750-bd58-c1531aabce95" providerId="ADAL" clId="{2A337F4B-E2B1-2041-BEF2-A9E56E5A3F7C}" dt="2022-02-28T08:54:46.225" v="15" actId="115"/>
-        <pc:sldMkLst>
-          <pc:docMk/>
-          <pc:sldMk cId="2903130704" sldId="305"/>
-        </pc:sldMkLst>
-      </pc:sldChg>
-      <pc:sldChg chg="modSp mod">
-        <pc:chgData name="Július Baráth" userId="e650c4ab-697e-4750-bd58-c1531aabce95" providerId="ADAL" clId="{2A337F4B-E2B1-2041-BEF2-A9E56E5A3F7C}" dt="2022-02-28T07:22:38.301" v="1" actId="113"/>
-        <pc:sldMkLst>
-          <pc:docMk/>
-          <pc:sldMk cId="1715521528" sldId="351"/>
-        </pc:sldMkLst>
-      </pc:sldChg>
-      <pc:sldChg chg="modSp mod">
-        <pc:chgData name="Július Baráth" userId="e650c4ab-697e-4750-bd58-c1531aabce95" providerId="ADAL" clId="{2A337F4B-E2B1-2041-BEF2-A9E56E5A3F7C}" dt="2022-02-28T09:11:03.514" v="16" actId="12"/>
-        <pc:sldMkLst>
-          <pc:docMk/>
-          <pc:sldMk cId="3284902929" sldId="380"/>
-        </pc:sldMkLst>
-      </pc:sldChg>
-      <pc:sldChg chg="modSp mod">
-        <pc:chgData name="Július Baráth" userId="e650c4ab-697e-4750-bd58-c1531aabce95" providerId="ADAL" clId="{2A337F4B-E2B1-2041-BEF2-A9E56E5A3F7C}" dt="2022-03-07T07:22:55.194" v="20" actId="6549"/>
-        <pc:sldMkLst>
-          <pc:docMk/>
-          <pc:sldMk cId="2802694068" sldId="381"/>
-        </pc:sldMkLst>
-      </pc:sldChg>
-      <pc:sldChg chg="delSp ord">
-        <pc:chgData name="Július Baráth" userId="e650c4ab-697e-4750-bd58-c1531aabce95" providerId="ADAL" clId="{2A337F4B-E2B1-2041-BEF2-A9E56E5A3F7C}" dt="2022-02-28T07:24:35.734" v="3" actId="20578"/>
-        <pc:sldMkLst>
-          <pc:docMk/>
-          <pc:sldMk cId="3416576981" sldId="446"/>
-        </pc:sldMkLst>
-      </pc:sldChg>
-      <pc:sldChg chg="modSp mod">
-        <pc:chgData name="Július Baráth" userId="e650c4ab-697e-4750-bd58-c1531aabce95" providerId="ADAL" clId="{2A337F4B-E2B1-2041-BEF2-A9E56E5A3F7C}" dt="2022-02-28T08:53:39.518" v="14" actId="404"/>
-        <pc:sldMkLst>
-          <pc:docMk/>
-          <pc:sldMk cId="477686888" sldId="458"/>
-        </pc:sldMkLst>
-      </pc:sldChg>
-    </pc:docChg>
-  </pc:docChgLst>
-  <pc:docChgLst>
-    <pc:chgData name="Baráth, Július" userId="aebde9b9-dccc-4475-a9ac-c05e78323d7a" providerId="ADAL" clId="{368D1A73-74D9-6242-B43C-BBD2CF55FB71}"/>
-    <pc:docChg chg="custSel addSld delSld modSld">
-      <pc:chgData name="Baráth, Július" userId="aebde9b9-dccc-4475-a9ac-c05e78323d7a" providerId="ADAL" clId="{368D1A73-74D9-6242-B43C-BBD2CF55FB71}" dt="2023-03-06T13:21:02.454" v="159" actId="20577"/>
-      <pc:docMkLst>
-        <pc:docMk/>
-      </pc:docMkLst>
-      <pc:sldChg chg="modSp mod">
-        <pc:chgData name="Baráth, Július" userId="aebde9b9-dccc-4475-a9ac-c05e78323d7a" providerId="ADAL" clId="{368D1A73-74D9-6242-B43C-BBD2CF55FB71}" dt="2023-03-01T11:56:06.547" v="17" actId="20577"/>
-        <pc:sldMkLst>
-          <pc:docMk/>
-          <pc:sldMk cId="1468456781" sldId="289"/>
-        </pc:sldMkLst>
-      </pc:sldChg>
-      <pc:sldChg chg="addSp modSp mod">
-        <pc:chgData name="Baráth, Július" userId="aebde9b9-dccc-4475-a9ac-c05e78323d7a" providerId="ADAL" clId="{368D1A73-74D9-6242-B43C-BBD2CF55FB71}" dt="2023-03-06T13:18:55.689" v="151" actId="1076"/>
-        <pc:sldMkLst>
-          <pc:docMk/>
-          <pc:sldMk cId="2067182005" sldId="298"/>
-        </pc:sldMkLst>
-      </pc:sldChg>
-      <pc:sldChg chg="modSp mod">
-        <pc:chgData name="Baráth, Július" userId="aebde9b9-dccc-4475-a9ac-c05e78323d7a" providerId="ADAL" clId="{368D1A73-74D9-6242-B43C-BBD2CF55FB71}" dt="2023-03-01T13:11:49.373" v="38" actId="113"/>
-        <pc:sldMkLst>
-          <pc:docMk/>
-          <pc:sldMk cId="1219818006" sldId="302"/>
-        </pc:sldMkLst>
-      </pc:sldChg>
-      <pc:sldChg chg="modSp mod">
-        <pc:chgData name="Baráth, Július" userId="aebde9b9-dccc-4475-a9ac-c05e78323d7a" providerId="ADAL" clId="{368D1A73-74D9-6242-B43C-BBD2CF55FB71}" dt="2023-03-01T13:13:47.138" v="42" actId="207"/>
-        <pc:sldMkLst>
-          <pc:docMk/>
-          <pc:sldMk cId="333524277" sldId="304"/>
-        </pc:sldMkLst>
-      </pc:sldChg>
-      <pc:sldChg chg="addSp modSp mod">
-        <pc:chgData name="Baráth, Július" userId="aebde9b9-dccc-4475-a9ac-c05e78323d7a" providerId="ADAL" clId="{368D1A73-74D9-6242-B43C-BBD2CF55FB71}" dt="2023-03-01T13:45:15.411" v="102" actId="20577"/>
-        <pc:sldMkLst>
-          <pc:docMk/>
-          <pc:sldMk cId="2858539739" sldId="311"/>
-        </pc:sldMkLst>
-      </pc:sldChg>
-      <pc:sldChg chg="addSp modSp mod">
-        <pc:chgData name="Baráth, Július" userId="aebde9b9-dccc-4475-a9ac-c05e78323d7a" providerId="ADAL" clId="{368D1A73-74D9-6242-B43C-BBD2CF55FB71}" dt="2023-03-01T13:28:49.962" v="81" actId="1076"/>
-        <pc:sldMkLst>
-          <pc:docMk/>
-          <pc:sldMk cId="2214043005" sldId="440"/>
-        </pc:sldMkLst>
-      </pc:sldChg>
-      <pc:sldChg chg="addSp modSp mod">
-        <pc:chgData name="Baráth, Július" userId="aebde9b9-dccc-4475-a9ac-c05e78323d7a" providerId="ADAL" clId="{368D1A73-74D9-6242-B43C-BBD2CF55FB71}" dt="2023-03-06T13:21:02.454" v="159" actId="20577"/>
-        <pc:sldMkLst>
-          <pc:docMk/>
-          <pc:sldMk cId="180398145" sldId="454"/>
-        </pc:sldMkLst>
-      </pc:sldChg>
-      <pc:sldChg chg="modSp mod">
-        <pc:chgData name="Baráth, Július" userId="aebde9b9-dccc-4475-a9ac-c05e78323d7a" providerId="ADAL" clId="{368D1A73-74D9-6242-B43C-BBD2CF55FB71}" dt="2023-03-01T13:06:31.839" v="29" actId="1582"/>
-        <pc:sldMkLst>
-          <pc:docMk/>
-          <pc:sldMk cId="1890575026" sldId="455"/>
-        </pc:sldMkLst>
-      </pc:sldChg>
-      <pc:sldChg chg="addSp delSp modSp mod">
-        <pc:chgData name="Baráth, Július" userId="aebde9b9-dccc-4475-a9ac-c05e78323d7a" providerId="ADAL" clId="{368D1A73-74D9-6242-B43C-BBD2CF55FB71}" dt="2023-03-01T13:10:44.372" v="37" actId="478"/>
-        <pc:sldMkLst>
-          <pc:docMk/>
-          <pc:sldMk cId="3790823752" sldId="457"/>
-        </pc:sldMkLst>
-      </pc:sldChg>
-      <pc:sldChg chg="new del">
-        <pc:chgData name="Baráth, Július" userId="aebde9b9-dccc-4475-a9ac-c05e78323d7a" providerId="ADAL" clId="{368D1A73-74D9-6242-B43C-BBD2CF55FB71}" dt="2023-03-01T13:46:06.424" v="108" actId="2696"/>
-        <pc:sldMkLst>
-          <pc:docMk/>
-          <pc:sldMk cId="1927222922" sldId="468"/>
-        </pc:sldMkLst>
-      </pc:sldChg>
-      <pc:sldChg chg="addSp modSp new mod">
-        <pc:chgData name="Baráth, Július" userId="aebde9b9-dccc-4475-a9ac-c05e78323d7a" providerId="ADAL" clId="{368D1A73-74D9-6242-B43C-BBD2CF55FB71}" dt="2023-03-01T13:47:16.514" v="116" actId="404"/>
-        <pc:sldMkLst>
-          <pc:docMk/>
-          <pc:sldMk cId="3427117849" sldId="469"/>
-        </pc:sldMkLst>
-      </pc:sldChg>
-    </pc:docChg>
-  </pc:docChgLst>
-  <pc:docChgLst>
-    <pc:chgData name="Baráth, Július" userId="aebde9b9-dccc-4475-a9ac-c05e78323d7a" providerId="ADAL" clId="{948B29B3-A0E7-9F41-88DC-40F7529E299D}"/>
-    <pc:docChg chg="undo custSel modSld">
-      <pc:chgData name="Baráth, Július" userId="aebde9b9-dccc-4475-a9ac-c05e78323d7a" providerId="ADAL" clId="{948B29B3-A0E7-9F41-88DC-40F7529E299D}" dt="2025-03-04T12:17:58.255" v="461" actId="115"/>
-      <pc:docMkLst>
-        <pc:docMk/>
-      </pc:docMkLst>
-      <pc:sldChg chg="modSp mod">
-        <pc:chgData name="Baráth, Július" userId="aebde9b9-dccc-4475-a9ac-c05e78323d7a" providerId="ADAL" clId="{948B29B3-A0E7-9F41-88DC-40F7529E299D}" dt="2025-02-24T12:18:58.685" v="26" actId="20577"/>
-        <pc:sldMkLst>
-          <pc:docMk/>
-          <pc:sldMk cId="1543713500" sldId="260"/>
+          <pc:sldMk cId="678975148" sldId="315"/>
         </pc:sldMkLst>
         <pc:spChg chg="mod">
-          <ac:chgData name="Baráth, Július" userId="aebde9b9-dccc-4475-a9ac-c05e78323d7a" providerId="ADAL" clId="{948B29B3-A0E7-9F41-88DC-40F7529E299D}" dt="2025-02-24T12:18:33.497" v="24" actId="404"/>
+          <ac:chgData name="Baráth, Július" userId="aebde9b9-dccc-4475-a9ac-c05e78323d7a" providerId="ADAL" clId="{4A0811C8-ED2F-505E-B787-C8270CED5046}" dt="2026-07-13T06:00:30.546" v="202" actId="1076"/>
           <ac:spMkLst>
             <pc:docMk/>
-            <pc:sldMk cId="1543713500" sldId="260"/>
-            <ac:spMk id="14339" creationId="{00000000-0000-0000-0000-000000000000}"/>
+            <pc:sldMk cId="678975148" sldId="315"/>
+            <ac:spMk id="51202" creationId="{2694CA7F-C8AD-A043-8DFA-3A157C732CBF}"/>
           </ac:spMkLst>
         </pc:spChg>
         <pc:spChg chg="mod">
-          <ac:chgData name="Baráth, Július" userId="aebde9b9-dccc-4475-a9ac-c05e78323d7a" providerId="ADAL" clId="{948B29B3-A0E7-9F41-88DC-40F7529E299D}" dt="2025-02-24T12:18:58.685" v="26" actId="20577"/>
+          <ac:chgData name="Baráth, Július" userId="aebde9b9-dccc-4475-a9ac-c05e78323d7a" providerId="ADAL" clId="{4A0811C8-ED2F-505E-B787-C8270CED5046}" dt="2026-07-13T06:00:30.546" v="202" actId="1076"/>
           <ac:spMkLst>
             <pc:docMk/>
-            <pc:sldMk cId="1543713500" sldId="260"/>
-            <ac:spMk id="14340" creationId="{00000000-0000-0000-0000-000000000000}"/>
+            <pc:sldMk cId="678975148" sldId="315"/>
+            <ac:spMk id="51203" creationId="{D2C2210F-8CB0-3245-95A0-1402754C15E1}"/>
           </ac:spMkLst>
         </pc:spChg>
-      </pc:sldChg>
-      <pc:sldChg chg="addSp modSp mod">
-        <pc:chgData name="Baráth, Július" userId="aebde9b9-dccc-4475-a9ac-c05e78323d7a" providerId="ADAL" clId="{948B29B3-A0E7-9F41-88DC-40F7529E299D}" dt="2025-02-24T12:48:15.362" v="63" actId="1076"/>
-        <pc:sldMkLst>
-          <pc:docMk/>
-          <pc:sldMk cId="2888860324" sldId="281"/>
-        </pc:sldMkLst>
+        <pc:spChg chg="mod">
+          <ac:chgData name="Baráth, Július" userId="aebde9b9-dccc-4475-a9ac-c05e78323d7a" providerId="ADAL" clId="{4A0811C8-ED2F-505E-B787-C8270CED5046}" dt="2026-07-13T06:00:30.546" v="202" actId="1076"/>
+          <ac:spMkLst>
+            <pc:docMk/>
+            <pc:sldMk cId="678975148" sldId="315"/>
+            <ac:spMk id="51204" creationId="{00979F69-88F9-7143-B174-7ECA08CB2064}"/>
+          </ac:spMkLst>
+        </pc:spChg>
+        <pc:spChg chg="mod">
+          <ac:chgData name="Baráth, Július" userId="aebde9b9-dccc-4475-a9ac-c05e78323d7a" providerId="ADAL" clId="{4A0811C8-ED2F-505E-B787-C8270CED5046}" dt="2026-07-13T06:00:30.546" v="202" actId="1076"/>
+          <ac:spMkLst>
+            <pc:docMk/>
+            <pc:sldMk cId="678975148" sldId="315"/>
+            <ac:spMk id="51205" creationId="{094E2F9D-834E-8A4F-B403-1E97CDEB55E7}"/>
+          </ac:spMkLst>
+        </pc:spChg>
+        <pc:spChg chg="mod">
+          <ac:chgData name="Baráth, Július" userId="aebde9b9-dccc-4475-a9ac-c05e78323d7a" providerId="ADAL" clId="{4A0811C8-ED2F-505E-B787-C8270CED5046}" dt="2026-07-13T06:00:30.546" v="202" actId="1076"/>
+          <ac:spMkLst>
+            <pc:docMk/>
+            <pc:sldMk cId="678975148" sldId="315"/>
+            <ac:spMk id="51206" creationId="{A05F1B67-78E2-DD46-AA6E-9C5C0E368093}"/>
+          </ac:spMkLst>
+        </pc:spChg>
+        <pc:spChg chg="mod">
+          <ac:chgData name="Baráth, Július" userId="aebde9b9-dccc-4475-a9ac-c05e78323d7a" providerId="ADAL" clId="{4A0811C8-ED2F-505E-B787-C8270CED5046}" dt="2026-07-13T06:00:30.546" v="202" actId="1076"/>
+          <ac:spMkLst>
+            <pc:docMk/>
+            <pc:sldMk cId="678975148" sldId="315"/>
+            <ac:spMk id="51208" creationId="{B225D1B2-934A-E141-AD68-C485DB90E8F1}"/>
+          </ac:spMkLst>
+        </pc:spChg>
+        <pc:spChg chg="mod">
+          <ac:chgData name="Baráth, Július" userId="aebde9b9-dccc-4475-a9ac-c05e78323d7a" providerId="ADAL" clId="{4A0811C8-ED2F-505E-B787-C8270CED5046}" dt="2026-07-13T06:00:35.852" v="203" actId="1076"/>
+          <ac:spMkLst>
+            <pc:docMk/>
+            <pc:sldMk cId="678975148" sldId="315"/>
+            <ac:spMk id="51209" creationId="{0A79BA56-7048-FA41-86EB-B0EC0598CC27}"/>
+          </ac:spMkLst>
+        </pc:spChg>
+        <pc:spChg chg="mod">
+          <ac:chgData name="Baráth, Július" userId="aebde9b9-dccc-4475-a9ac-c05e78323d7a" providerId="ADAL" clId="{4A0811C8-ED2F-505E-B787-C8270CED5046}" dt="2026-07-13T06:00:35.852" v="203" actId="1076"/>
+          <ac:spMkLst>
+            <pc:docMk/>
+            <pc:sldMk cId="678975148" sldId="315"/>
+            <ac:spMk id="51212" creationId="{2DBE1860-81A8-2949-A80D-717DA2E628B9}"/>
+          </ac:spMkLst>
+        </pc:spChg>
+        <pc:spChg chg="mod">
+          <ac:chgData name="Baráth, Július" userId="aebde9b9-dccc-4475-a9ac-c05e78323d7a" providerId="ADAL" clId="{4A0811C8-ED2F-505E-B787-C8270CED5046}" dt="2026-07-13T06:00:35.852" v="203" actId="1076"/>
+          <ac:spMkLst>
+            <pc:docMk/>
+            <pc:sldMk cId="678975148" sldId="315"/>
+            <ac:spMk id="51213" creationId="{05CC80F9-2F24-6C49-9872-15C5F6019D19}"/>
+          </ac:spMkLst>
+        </pc:spChg>
+        <pc:spChg chg="mod">
+          <ac:chgData name="Baráth, Július" userId="aebde9b9-dccc-4475-a9ac-c05e78323d7a" providerId="ADAL" clId="{4A0811C8-ED2F-505E-B787-C8270CED5046}" dt="2026-07-13T06:00:35.852" v="203" actId="1076"/>
+          <ac:spMkLst>
+            <pc:docMk/>
+            <pc:sldMk cId="678975148" sldId="315"/>
+            <ac:spMk id="51214" creationId="{6A135100-E92B-1D48-B40B-616576F0B50E}"/>
+          </ac:spMkLst>
+        </pc:spChg>
+        <pc:spChg chg="mod">
+          <ac:chgData name="Baráth, Július" userId="aebde9b9-dccc-4475-a9ac-c05e78323d7a" providerId="ADAL" clId="{4A0811C8-ED2F-505E-B787-C8270CED5046}" dt="2026-07-13T06:00:35.852" v="203" actId="1076"/>
+          <ac:spMkLst>
+            <pc:docMk/>
+            <pc:sldMk cId="678975148" sldId="315"/>
+            <ac:spMk id="51215" creationId="{6AB8ECBB-AFFA-8247-9DD8-84AD54EC9DC1}"/>
+          </ac:spMkLst>
+        </pc:spChg>
+        <pc:spChg chg="mod">
+          <ac:chgData name="Baráth, Július" userId="aebde9b9-dccc-4475-a9ac-c05e78323d7a" providerId="ADAL" clId="{4A0811C8-ED2F-505E-B787-C8270CED5046}" dt="2026-07-13T06:00:35.852" v="203" actId="1076"/>
+          <ac:spMkLst>
+            <pc:docMk/>
+            <pc:sldMk cId="678975148" sldId="315"/>
+            <ac:spMk id="51216" creationId="{1EF1C28F-C93F-C648-B2B5-4A6C7FD35B2F}"/>
+          </ac:spMkLst>
+        </pc:spChg>
+        <pc:spChg chg="mod">
+          <ac:chgData name="Baráth, Július" userId="aebde9b9-dccc-4475-a9ac-c05e78323d7a" providerId="ADAL" clId="{4A0811C8-ED2F-505E-B787-C8270CED5046}" dt="2026-07-13T06:00:35.852" v="203" actId="1076"/>
+          <ac:spMkLst>
+            <pc:docMk/>
+            <pc:sldMk cId="678975148" sldId="315"/>
+            <ac:spMk id="51217" creationId="{175A4479-0820-1F48-A728-D2149E08E668}"/>
+          </ac:spMkLst>
+        </pc:spChg>
+        <pc:spChg chg="mod">
+          <ac:chgData name="Baráth, Július" userId="aebde9b9-dccc-4475-a9ac-c05e78323d7a" providerId="ADAL" clId="{4A0811C8-ED2F-505E-B787-C8270CED5046}" dt="2026-07-13T06:00:35.852" v="203" actId="1076"/>
+          <ac:spMkLst>
+            <pc:docMk/>
+            <pc:sldMk cId="678975148" sldId="315"/>
+            <ac:spMk id="51218" creationId="{99EC5C14-F471-F94F-B4C8-BEE52FCF05EC}"/>
+          </ac:spMkLst>
+        </pc:spChg>
+        <pc:spChg chg="mod">
+          <ac:chgData name="Baráth, Július" userId="aebde9b9-dccc-4475-a9ac-c05e78323d7a" providerId="ADAL" clId="{4A0811C8-ED2F-505E-B787-C8270CED5046}" dt="2026-07-13T06:00:35.852" v="203" actId="1076"/>
+          <ac:spMkLst>
+            <pc:docMk/>
+            <pc:sldMk cId="678975148" sldId="315"/>
+            <ac:spMk id="51219" creationId="{700B8BC5-4F95-1A44-9CB6-356E8C3B6967}"/>
+          </ac:spMkLst>
+        </pc:spChg>
+        <pc:spChg chg="mod">
+          <ac:chgData name="Baráth, Július" userId="aebde9b9-dccc-4475-a9ac-c05e78323d7a" providerId="ADAL" clId="{4A0811C8-ED2F-505E-B787-C8270CED5046}" dt="2026-07-13T06:00:35.852" v="203" actId="1076"/>
+          <ac:spMkLst>
+            <pc:docMk/>
+            <pc:sldMk cId="678975148" sldId="315"/>
+            <ac:spMk id="51220" creationId="{6BF25659-4B82-5248-A8CA-501F68FBAB2B}"/>
+          </ac:spMkLst>
+        </pc:spChg>
         <pc:picChg chg="add mod">
-          <ac:chgData name="Baráth, Július" userId="aebde9b9-dccc-4475-a9ac-c05e78323d7a" providerId="ADAL" clId="{948B29B3-A0E7-9F41-88DC-40F7529E299D}" dt="2025-02-24T12:48:15.362" v="63" actId="1076"/>
+          <ac:chgData name="Baráth, Július" userId="aebde9b9-dccc-4475-a9ac-c05e78323d7a" providerId="ADAL" clId="{4A0811C8-ED2F-505E-B787-C8270CED5046}" dt="2026-07-13T06:00:40.897" v="205" actId="14100"/>
           <ac:picMkLst>
             <pc:docMk/>
-            <pc:sldMk cId="2888860324" sldId="281"/>
-            <ac:picMk id="3" creationId="{437A38CB-FB2E-C76D-8F94-AA0D240CFB42}"/>
+            <pc:sldMk cId="678975148" sldId="315"/>
+            <ac:picMk id="3" creationId="{96887CC6-4779-7979-91BF-779B91F0CC91}"/>
           </ac:picMkLst>
         </pc:picChg>
       </pc:sldChg>
-      <pc:sldChg chg="modSp mod">
-        <pc:chgData name="Baráth, Július" userId="aebde9b9-dccc-4475-a9ac-c05e78323d7a" providerId="ADAL" clId="{948B29B3-A0E7-9F41-88DC-40F7529E299D}" dt="2025-03-04T12:16:24.005" v="460" actId="113"/>
-        <pc:sldMkLst>
-          <pc:docMk/>
-          <pc:sldMk cId="333524277" sldId="304"/>
-        </pc:sldMkLst>
-        <pc:spChg chg="mod">
-          <ac:chgData name="Baráth, Július" userId="aebde9b9-dccc-4475-a9ac-c05e78323d7a" providerId="ADAL" clId="{948B29B3-A0E7-9F41-88DC-40F7529E299D}" dt="2025-03-04T12:12:52.381" v="453" actId="20577"/>
-          <ac:spMkLst>
-            <pc:docMk/>
-            <pc:sldMk cId="333524277" sldId="304"/>
-            <ac:spMk id="78849" creationId="{773F6BB0-444A-754E-88F3-528CC320C9EF}"/>
-          </ac:spMkLst>
-        </pc:spChg>
-        <pc:spChg chg="mod">
-          <ac:chgData name="Baráth, Július" userId="aebde9b9-dccc-4475-a9ac-c05e78323d7a" providerId="ADAL" clId="{948B29B3-A0E7-9F41-88DC-40F7529E299D}" dt="2025-03-04T12:16:24.005" v="460" actId="113"/>
-          <ac:spMkLst>
-            <pc:docMk/>
-            <pc:sldMk cId="333524277" sldId="304"/>
-            <ac:spMk id="78850" creationId="{E450E446-F97B-7746-8C99-B7DA5BAAC109}"/>
-          </ac:spMkLst>
-        </pc:spChg>
-      </pc:sldChg>
-      <pc:sldChg chg="modSp mod">
-        <pc:chgData name="Baráth, Július" userId="aebde9b9-dccc-4475-a9ac-c05e78323d7a" providerId="ADAL" clId="{948B29B3-A0E7-9F41-88DC-40F7529E299D}" dt="2025-03-04T12:17:58.255" v="461" actId="115"/>
-        <pc:sldMkLst>
-          <pc:docMk/>
-          <pc:sldMk cId="2903130704" sldId="305"/>
-        </pc:sldMkLst>
-        <pc:spChg chg="mod">
-          <ac:chgData name="Baráth, Július" userId="aebde9b9-dccc-4475-a9ac-c05e78323d7a" providerId="ADAL" clId="{948B29B3-A0E7-9F41-88DC-40F7529E299D}" dt="2025-03-04T12:17:58.255" v="461" actId="115"/>
-          <ac:spMkLst>
-            <pc:docMk/>
-            <pc:sldMk cId="2903130704" sldId="305"/>
-            <ac:spMk id="80898" creationId="{1BE96996-6975-4244-A35D-EA7C9DCBACB0}"/>
-          </ac:spMkLst>
-        </pc:spChg>
-      </pc:sldChg>
       <pc:sldChg chg="addSp modSp mod">
-        <pc:chgData name="Baráth, Július" userId="aebde9b9-dccc-4475-a9ac-c05e78323d7a" providerId="ADAL" clId="{948B29B3-A0E7-9F41-88DC-40F7529E299D}" dt="2025-02-24T13:33:11.775" v="116" actId="164"/>
-        <pc:sldMkLst>
-          <pc:docMk/>
-          <pc:sldMk cId="2858539739" sldId="311"/>
-        </pc:sldMkLst>
-        <pc:spChg chg="add mod">
-          <ac:chgData name="Baráth, Július" userId="aebde9b9-dccc-4475-a9ac-c05e78323d7a" providerId="ADAL" clId="{948B29B3-A0E7-9F41-88DC-40F7529E299D}" dt="2025-02-24T13:33:11.775" v="116" actId="164"/>
-          <ac:spMkLst>
-            <pc:docMk/>
-            <pc:sldMk cId="2858539739" sldId="311"/>
-            <ac:spMk id="2" creationId="{7FFCF743-8FA1-D660-254E-E1DE434CD17D}"/>
-          </ac:spMkLst>
-        </pc:spChg>
-        <pc:grpChg chg="add mod">
-          <ac:chgData name="Baráth, Július" userId="aebde9b9-dccc-4475-a9ac-c05e78323d7a" providerId="ADAL" clId="{948B29B3-A0E7-9F41-88DC-40F7529E299D}" dt="2025-02-24T13:33:11.775" v="116" actId="164"/>
-          <ac:grpSpMkLst>
-            <pc:docMk/>
-            <pc:sldMk cId="2858539739" sldId="311"/>
-            <ac:grpSpMk id="4" creationId="{B83FA4AF-FBD5-438D-B62B-B21534F3A61A}"/>
-          </ac:grpSpMkLst>
-        </pc:grpChg>
-        <pc:picChg chg="mod">
-          <ac:chgData name="Baráth, Július" userId="aebde9b9-dccc-4475-a9ac-c05e78323d7a" providerId="ADAL" clId="{948B29B3-A0E7-9F41-88DC-40F7529E299D}" dt="2025-02-24T13:33:11.775" v="116" actId="164"/>
-          <ac:picMkLst>
-            <pc:docMk/>
-            <pc:sldMk cId="2858539739" sldId="311"/>
-            <ac:picMk id="108546" creationId="{30F74D2C-4BD3-204E-A85A-12027A51105B}"/>
-          </ac:picMkLst>
-        </pc:picChg>
-      </pc:sldChg>
-      <pc:sldChg chg="modSp mod">
-        <pc:chgData name="Baráth, Július" userId="aebde9b9-dccc-4475-a9ac-c05e78323d7a" providerId="ADAL" clId="{948B29B3-A0E7-9F41-88DC-40F7529E299D}" dt="2025-02-24T12:20:24.470" v="34" actId="5793"/>
-        <pc:sldMkLst>
-          <pc:docMk/>
-          <pc:sldMk cId="1715521528" sldId="351"/>
-        </pc:sldMkLst>
-        <pc:spChg chg="mod">
-          <ac:chgData name="Baráth, Július" userId="aebde9b9-dccc-4475-a9ac-c05e78323d7a" providerId="ADAL" clId="{948B29B3-A0E7-9F41-88DC-40F7529E299D}" dt="2025-02-24T12:20:24.470" v="34" actId="5793"/>
-          <ac:spMkLst>
-            <pc:docMk/>
-            <pc:sldMk cId="1715521528" sldId="351"/>
-            <ac:spMk id="21508" creationId="{00000000-0000-0000-0000-000000000000}"/>
-          </ac:spMkLst>
-        </pc:spChg>
-      </pc:sldChg>
-      <pc:sldChg chg="addSp delSp modSp mod">
-        <pc:chgData name="Baráth, Július" userId="aebde9b9-dccc-4475-a9ac-c05e78323d7a" providerId="ADAL" clId="{948B29B3-A0E7-9F41-88DC-40F7529E299D}" dt="2025-02-24T12:28:22.707" v="43" actId="1076"/>
+        <pc:chgData name="Baráth, Július" userId="aebde9b9-dccc-4475-a9ac-c05e78323d7a" providerId="ADAL" clId="{4A0811C8-ED2F-505E-B787-C8270CED5046}" dt="2026-07-13T05:26:48.450" v="9" actId="1076"/>
         <pc:sldMkLst>
           <pc:docMk/>
           <pc:sldMk cId="3999365730" sldId="352"/>
         </pc:sldMkLst>
-        <pc:picChg chg="add mod">
-          <ac:chgData name="Baráth, Július" userId="aebde9b9-dccc-4475-a9ac-c05e78323d7a" providerId="ADAL" clId="{948B29B3-A0E7-9F41-88DC-40F7529E299D}" dt="2025-02-24T12:28:22.707" v="43" actId="1076"/>
+        <pc:picChg chg="add mod modCrop">
+          <ac:chgData name="Baráth, Július" userId="aebde9b9-dccc-4475-a9ac-c05e78323d7a" providerId="ADAL" clId="{4A0811C8-ED2F-505E-B787-C8270CED5046}" dt="2026-07-13T05:26:48.450" v="9" actId="1076"/>
+          <ac:picMkLst>
+            <pc:docMk/>
+            <pc:sldMk cId="3999365730" sldId="352"/>
+            <ac:picMk id="2" creationId="{6235608E-51D7-A40F-9070-CCCB3893292E}"/>
+          </ac:picMkLst>
+        </pc:picChg>
+        <pc:picChg chg="mod">
+          <ac:chgData name="Baráth, Július" userId="aebde9b9-dccc-4475-a9ac-c05e78323d7a" providerId="ADAL" clId="{4A0811C8-ED2F-505E-B787-C8270CED5046}" dt="2026-07-13T05:26:43.303" v="8" actId="14100"/>
           <ac:picMkLst>
             <pc:docMk/>
             <pc:sldMk cId="3999365730" sldId="352"/>
@@ -691,531 +387,311 @@
           </ac:picMkLst>
         </pc:picChg>
       </pc:sldChg>
-      <pc:sldChg chg="addSp modSp mod">
-        <pc:chgData name="Baráth, Július" userId="aebde9b9-dccc-4475-a9ac-c05e78323d7a" providerId="ADAL" clId="{948B29B3-A0E7-9F41-88DC-40F7529E299D}" dt="2025-02-24T12:37:18.635" v="53" actId="164"/>
+      <pc:sldChg chg="addSp delSp modSp mod">
+        <pc:chgData name="Baráth, Július" userId="aebde9b9-dccc-4475-a9ac-c05e78323d7a" providerId="ADAL" clId="{4A0811C8-ED2F-505E-B787-C8270CED5046}" dt="2026-07-13T05:33:23.994" v="20" actId="14100"/>
+        <pc:sldMkLst>
+          <pc:docMk/>
+          <pc:sldMk cId="2784228473" sldId="356"/>
+        </pc:sldMkLst>
+        <pc:spChg chg="del">
+          <ac:chgData name="Baráth, Július" userId="aebde9b9-dccc-4475-a9ac-c05e78323d7a" providerId="ADAL" clId="{4A0811C8-ED2F-505E-B787-C8270CED5046}" dt="2026-07-13T05:29:58.343" v="11" actId="478"/>
+          <ac:spMkLst>
+            <pc:docMk/>
+            <pc:sldMk cId="2784228473" sldId="356"/>
+            <ac:spMk id="2" creationId="{00000000-0000-0000-0000-000000000000}"/>
+          </ac:spMkLst>
+        </pc:spChg>
+        <pc:spChg chg="del">
+          <ac:chgData name="Baráth, Július" userId="aebde9b9-dccc-4475-a9ac-c05e78323d7a" providerId="ADAL" clId="{4A0811C8-ED2F-505E-B787-C8270CED5046}" dt="2026-07-13T05:29:59.891" v="13" actId="478"/>
+          <ac:spMkLst>
+            <pc:docMk/>
+            <pc:sldMk cId="2784228473" sldId="356"/>
+            <ac:spMk id="3" creationId="{00000000-0000-0000-0000-000000000000}"/>
+          </ac:spMkLst>
+        </pc:spChg>
+        <pc:spChg chg="del">
+          <ac:chgData name="Baráth, Július" userId="aebde9b9-dccc-4475-a9ac-c05e78323d7a" providerId="ADAL" clId="{4A0811C8-ED2F-505E-B787-C8270CED5046}" dt="2026-07-13T05:29:59.114" v="12" actId="478"/>
+          <ac:spMkLst>
+            <pc:docMk/>
+            <pc:sldMk cId="2784228473" sldId="356"/>
+            <ac:spMk id="4" creationId="{00000000-0000-0000-0000-000000000000}"/>
+          </ac:spMkLst>
+        </pc:spChg>
+        <pc:spChg chg="del">
+          <ac:chgData name="Baráth, Július" userId="aebde9b9-dccc-4475-a9ac-c05e78323d7a" providerId="ADAL" clId="{4A0811C8-ED2F-505E-B787-C8270CED5046}" dt="2026-07-13T05:30:00.842" v="14" actId="478"/>
+          <ac:spMkLst>
+            <pc:docMk/>
+            <pc:sldMk cId="2784228473" sldId="356"/>
+            <ac:spMk id="7" creationId="{00000000-0000-0000-0000-000000000000}"/>
+          </ac:spMkLst>
+        </pc:spChg>
+        <pc:picChg chg="add del mod modCrop">
+          <ac:chgData name="Baráth, Július" userId="aebde9b9-dccc-4475-a9ac-c05e78323d7a" providerId="ADAL" clId="{4A0811C8-ED2F-505E-B787-C8270CED5046}" dt="2026-07-13T05:31:07.765" v="18" actId="478"/>
+          <ac:picMkLst>
+            <pc:docMk/>
+            <pc:sldMk cId="2784228473" sldId="356"/>
+            <ac:picMk id="5" creationId="{B204A1CA-66A6-F382-1AB1-0B193F6F89D1}"/>
+          </ac:picMkLst>
+        </pc:picChg>
+        <pc:picChg chg="add mod">
+          <ac:chgData name="Baráth, Július" userId="aebde9b9-dccc-4475-a9ac-c05e78323d7a" providerId="ADAL" clId="{4A0811C8-ED2F-505E-B787-C8270CED5046}" dt="2026-07-13T05:33:23.994" v="20" actId="14100"/>
+          <ac:picMkLst>
+            <pc:docMk/>
+            <pc:sldMk cId="2784228473" sldId="356"/>
+            <ac:picMk id="8" creationId="{99740C17-ECF9-8692-A78A-84BD24638FAC}"/>
+          </ac:picMkLst>
+        </pc:picChg>
+        <pc:picChg chg="del">
+          <ac:chgData name="Baráth, Július" userId="aebde9b9-dccc-4475-a9ac-c05e78323d7a" providerId="ADAL" clId="{4A0811C8-ED2F-505E-B787-C8270CED5046}" dt="2026-07-13T05:29:57.139" v="10" actId="478"/>
+          <ac:picMkLst>
+            <pc:docMk/>
+            <pc:sldMk cId="2784228473" sldId="356"/>
+            <ac:picMk id="26628" creationId="{00000000-0000-0000-0000-000000000000}"/>
+          </ac:picMkLst>
+        </pc:picChg>
+      </pc:sldChg>
+      <pc:sldChg chg="addSp delSp modSp mod chgLayout">
+        <pc:chgData name="Baráth, Július" userId="aebde9b9-dccc-4475-a9ac-c05e78323d7a" providerId="ADAL" clId="{4A0811C8-ED2F-505E-B787-C8270CED5046}" dt="2026-07-13T05:52:24.349" v="133" actId="1076"/>
         <pc:sldMkLst>
           <pc:docMk/>
           <pc:sldMk cId="4256072226" sldId="360"/>
         </pc:sldMkLst>
-        <pc:spChg chg="add mod">
-          <ac:chgData name="Baráth, Július" userId="aebde9b9-dccc-4475-a9ac-c05e78323d7a" providerId="ADAL" clId="{948B29B3-A0E7-9F41-88DC-40F7529E299D}" dt="2025-02-24T12:36:13.072" v="49" actId="164"/>
+        <pc:spChg chg="del">
+          <ac:chgData name="Baráth, Július" userId="aebde9b9-dccc-4475-a9ac-c05e78323d7a" providerId="ADAL" clId="{4A0811C8-ED2F-505E-B787-C8270CED5046}" dt="2026-07-13T05:43:55.157" v="22" actId="478"/>
           <ac:spMkLst>
             <pc:docMk/>
             <pc:sldMk cId="4256072226" sldId="360"/>
-            <ac:spMk id="4" creationId="{69426FE0-6C5B-9076-01C9-79AE31763926}"/>
+            <ac:spMk id="2" creationId="{00000000-0000-0000-0000-000000000000}"/>
           </ac:spMkLst>
         </pc:spChg>
-        <pc:spChg chg="add mod">
-          <ac:chgData name="Baráth, Július" userId="aebde9b9-dccc-4475-a9ac-c05e78323d7a" providerId="ADAL" clId="{948B29B3-A0E7-9F41-88DC-40F7529E299D}" dt="2025-02-24T12:36:13.072" v="49" actId="164"/>
+        <pc:spChg chg="del">
+          <ac:chgData name="Baráth, Július" userId="aebde9b9-dccc-4475-a9ac-c05e78323d7a" providerId="ADAL" clId="{4A0811C8-ED2F-505E-B787-C8270CED5046}" dt="2026-07-13T05:43:56.979" v="23" actId="478"/>
           <ac:spMkLst>
             <pc:docMk/>
             <pc:sldMk cId="4256072226" sldId="360"/>
-            <ac:spMk id="5" creationId="{059D1881-0E26-71C7-FE8C-C630E732F40C}"/>
+            <ac:spMk id="3" creationId="{00000000-0000-0000-0000-000000000000}"/>
           </ac:spMkLst>
         </pc:spChg>
-        <pc:spChg chg="add mod">
-          <ac:chgData name="Baráth, Július" userId="aebde9b9-dccc-4475-a9ac-c05e78323d7a" providerId="ADAL" clId="{948B29B3-A0E7-9F41-88DC-40F7529E299D}" dt="2025-02-24T12:37:18.635" v="53" actId="164"/>
+        <pc:spChg chg="add del mod">
+          <ac:chgData name="Baráth, Július" userId="aebde9b9-dccc-4475-a9ac-c05e78323d7a" providerId="ADAL" clId="{4A0811C8-ED2F-505E-B787-C8270CED5046}" dt="2026-07-13T05:49:08.814" v="67" actId="478"/>
           <ac:spMkLst>
             <pc:docMk/>
             <pc:sldMk cId="4256072226" sldId="360"/>
-            <ac:spMk id="7" creationId="{4958B642-3787-DE69-B7C4-259DB1BBE021}"/>
+            <ac:spMk id="11" creationId="{FB30A2AE-7EE2-E3E1-FEDC-3194823FC26E}"/>
           </ac:spMkLst>
         </pc:spChg>
-        <pc:grpChg chg="add mod">
-          <ac:chgData name="Baráth, Július" userId="aebde9b9-dccc-4475-a9ac-c05e78323d7a" providerId="ADAL" clId="{948B29B3-A0E7-9F41-88DC-40F7529E299D}" dt="2025-02-24T12:37:18.635" v="53" actId="164"/>
-          <ac:grpSpMkLst>
+        <pc:spChg chg="add del mod">
+          <ac:chgData name="Baráth, Július" userId="aebde9b9-dccc-4475-a9ac-c05e78323d7a" providerId="ADAL" clId="{4A0811C8-ED2F-505E-B787-C8270CED5046}" dt="2026-07-13T05:49:45.968" v="70" actId="478"/>
+          <ac:spMkLst>
             <pc:docMk/>
             <pc:sldMk cId="4256072226" sldId="360"/>
-            <ac:grpSpMk id="6" creationId="{43315C03-972A-FD70-D300-3BFDB1906918}"/>
-          </ac:grpSpMkLst>
-        </pc:grpChg>
-        <pc:grpChg chg="add mod">
-          <ac:chgData name="Baráth, Július" userId="aebde9b9-dccc-4475-a9ac-c05e78323d7a" providerId="ADAL" clId="{948B29B3-A0E7-9F41-88DC-40F7529E299D}" dt="2025-02-24T12:37:18.635" v="53" actId="164"/>
+            <ac:spMk id="13" creationId="{F5B1EDB0-46A9-0F83-2532-B9D07BAF8560}"/>
+          </ac:spMkLst>
+        </pc:spChg>
+        <pc:spChg chg="add del mod">
+          <ac:chgData name="Baráth, Július" userId="aebde9b9-dccc-4475-a9ac-c05e78323d7a" providerId="ADAL" clId="{4A0811C8-ED2F-505E-B787-C8270CED5046}" dt="2026-07-13T05:50:07.743" v="73" actId="478"/>
+          <ac:spMkLst>
+            <pc:docMk/>
+            <pc:sldMk cId="4256072226" sldId="360"/>
+            <ac:spMk id="17" creationId="{E2D17ED2-0F46-3EF3-F4C2-7425A39377DB}"/>
+          </ac:spMkLst>
+        </pc:spChg>
+        <pc:spChg chg="add del mod">
+          <ac:chgData name="Baráth, Július" userId="aebde9b9-dccc-4475-a9ac-c05e78323d7a" providerId="ADAL" clId="{4A0811C8-ED2F-505E-B787-C8270CED5046}" dt="2026-07-13T05:50:33.113" v="79"/>
+          <ac:spMkLst>
+            <pc:docMk/>
+            <pc:sldMk cId="4256072226" sldId="360"/>
+            <ac:spMk id="18" creationId="{DBE698DE-8C2D-00DB-3237-841C9DBD19EC}"/>
+          </ac:spMkLst>
+        </pc:spChg>
+        <pc:spChg chg="add mod ord">
+          <ac:chgData name="Baráth, Július" userId="aebde9b9-dccc-4475-a9ac-c05e78323d7a" providerId="ADAL" clId="{4A0811C8-ED2F-505E-B787-C8270CED5046}" dt="2026-07-13T05:52:15.666" v="130"/>
+          <ac:spMkLst>
+            <pc:docMk/>
+            <pc:sldMk cId="4256072226" sldId="360"/>
+            <ac:spMk id="19" creationId="{625777FF-E442-FFB6-7F7A-A093EFCE7F60}"/>
+          </ac:spMkLst>
+        </pc:spChg>
+        <pc:spChg chg="add del">
+          <ac:chgData name="Baráth, Július" userId="aebde9b9-dccc-4475-a9ac-c05e78323d7a" providerId="ADAL" clId="{4A0811C8-ED2F-505E-B787-C8270CED5046}" dt="2026-07-13T05:52:21.483" v="132" actId="478"/>
+          <ac:spMkLst>
+            <pc:docMk/>
+            <pc:sldMk cId="4256072226" sldId="360"/>
+            <ac:spMk id="21" creationId="{F588A999-E8E5-9E2B-C112-ECC7C2439821}"/>
+          </ac:spMkLst>
+        </pc:spChg>
+        <pc:spChg chg="mod ord">
+          <ac:chgData name="Baráth, Július" userId="aebde9b9-dccc-4475-a9ac-c05e78323d7a" providerId="ADAL" clId="{4A0811C8-ED2F-505E-B787-C8270CED5046}" dt="2026-07-13T05:52:07.060" v="128" actId="700"/>
+          <ac:spMkLst>
+            <pc:docMk/>
+            <pc:sldMk cId="4256072226" sldId="360"/>
+            <ac:spMk id="30722" creationId="{00000000-0000-0000-0000-000000000000}"/>
+          </ac:spMkLst>
+        </pc:spChg>
+        <pc:spChg chg="add del">
+          <ac:chgData name="Baráth, Július" userId="aebde9b9-dccc-4475-a9ac-c05e78323d7a" providerId="ADAL" clId="{4A0811C8-ED2F-505E-B787-C8270CED5046}" dt="2026-07-13T05:50:05.480" v="72" actId="478"/>
+          <ac:spMkLst>
+            <pc:docMk/>
+            <pc:sldMk cId="4256072226" sldId="360"/>
+            <ac:spMk id="30723" creationId="{00000000-0000-0000-0000-000000000000}"/>
+          </ac:spMkLst>
+        </pc:spChg>
+        <pc:grpChg chg="del">
+          <ac:chgData name="Baráth, Július" userId="aebde9b9-dccc-4475-a9ac-c05e78323d7a" providerId="ADAL" clId="{4A0811C8-ED2F-505E-B787-C8270CED5046}" dt="2026-07-13T05:43:53.776" v="21" actId="478"/>
           <ac:grpSpMkLst>
             <pc:docMk/>
             <pc:sldMk cId="4256072226" sldId="360"/>
             <ac:grpSpMk id="8" creationId="{95E98811-D566-E88C-70CB-5CBB583D0C39}"/>
           </ac:grpSpMkLst>
         </pc:grpChg>
-        <pc:picChg chg="mod">
-          <ac:chgData name="Baráth, Július" userId="aebde9b9-dccc-4475-a9ac-c05e78323d7a" providerId="ADAL" clId="{948B29B3-A0E7-9F41-88DC-40F7529E299D}" dt="2025-02-24T12:36:13.072" v="49" actId="164"/>
+        <pc:picChg chg="add del mod modCrop">
+          <ac:chgData name="Baráth, Július" userId="aebde9b9-dccc-4475-a9ac-c05e78323d7a" providerId="ADAL" clId="{4A0811C8-ED2F-505E-B787-C8270CED5046}" dt="2026-07-13T05:49:05.699" v="66" actId="478"/>
           <ac:picMkLst>
             <pc:docMk/>
             <pc:sldMk cId="4256072226" sldId="360"/>
-            <ac:picMk id="30724" creationId="{00000000-0000-0000-0000-000000000000}"/>
+            <ac:picMk id="10" creationId="{7934E77C-E096-8A6C-C2ED-317329F799B2}"/>
+          </ac:picMkLst>
+        </pc:picChg>
+        <pc:picChg chg="add mod">
+          <ac:chgData name="Baráth, Július" userId="aebde9b9-dccc-4475-a9ac-c05e78323d7a" providerId="ADAL" clId="{4A0811C8-ED2F-505E-B787-C8270CED5046}" dt="2026-07-13T05:52:24.349" v="133" actId="1076"/>
+          <ac:picMkLst>
+            <pc:docMk/>
+            <pc:sldMk cId="4256072226" sldId="360"/>
+            <ac:picMk id="15" creationId="{66C1EEE2-035C-D9CC-C03A-5F3FD2F9FA2E}"/>
           </ac:picMkLst>
         </pc:picChg>
       </pc:sldChg>
-      <pc:sldChg chg="addSp modSp mod">
-        <pc:chgData name="Baráth, Július" userId="aebde9b9-dccc-4475-a9ac-c05e78323d7a" providerId="ADAL" clId="{948B29B3-A0E7-9F41-88DC-40F7529E299D}" dt="2025-02-24T12:38:02.151" v="58" actId="164"/>
+      <pc:sldChg chg="del">
+        <pc:chgData name="Baráth, Július" userId="aebde9b9-dccc-4475-a9ac-c05e78323d7a" providerId="ADAL" clId="{4A0811C8-ED2F-505E-B787-C8270CED5046}" dt="2026-07-13T05:49:28.773" v="68" actId="2696"/>
         <pc:sldMkLst>
           <pc:docMk/>
           <pc:sldMk cId="3434232039" sldId="361"/>
         </pc:sldMkLst>
-        <pc:spChg chg="add mod">
-          <ac:chgData name="Baráth, Július" userId="aebde9b9-dccc-4475-a9ac-c05e78323d7a" providerId="ADAL" clId="{948B29B3-A0E7-9F41-88DC-40F7529E299D}" dt="2025-02-24T12:38:02.151" v="58" actId="164"/>
+      </pc:sldChg>
+      <pc:sldChg chg="addSp delSp modSp mod">
+        <pc:chgData name="Baráth, Július" userId="aebde9b9-dccc-4475-a9ac-c05e78323d7a" providerId="ADAL" clId="{4A0811C8-ED2F-505E-B787-C8270CED5046}" dt="2026-07-13T06:03:26.827" v="222" actId="1076"/>
+        <pc:sldMkLst>
+          <pc:docMk/>
+          <pc:sldMk cId="180398145" sldId="454"/>
+        </pc:sldMkLst>
+        <pc:spChg chg="mod">
+          <ac:chgData name="Baráth, Július" userId="aebde9b9-dccc-4475-a9ac-c05e78323d7a" providerId="ADAL" clId="{4A0811C8-ED2F-505E-B787-C8270CED5046}" dt="2026-07-13T06:03:26.827" v="222" actId="1076"/>
           <ac:spMkLst>
             <pc:docMk/>
-            <pc:sldMk cId="3434232039" sldId="361"/>
-            <ac:spMk id="2" creationId="{A8BCAD3F-6C8D-A4A0-A360-09860816B6BA}"/>
+            <pc:sldMk cId="180398145" sldId="454"/>
+            <ac:spMk id="2" creationId="{6CC45D99-2D18-74B5-A05C-C8F56A1811D1}"/>
           </ac:spMkLst>
         </pc:spChg>
-        <pc:grpChg chg="add mod">
-          <ac:chgData name="Baráth, Július" userId="aebde9b9-dccc-4475-a9ac-c05e78323d7a" providerId="ADAL" clId="{948B29B3-A0E7-9F41-88DC-40F7529E299D}" dt="2025-02-24T12:38:02.151" v="58" actId="164"/>
-          <ac:grpSpMkLst>
-            <pc:docMk/>
-            <pc:sldMk cId="3434232039" sldId="361"/>
-            <ac:grpSpMk id="3" creationId="{82C67734-E197-76F9-9111-BA31436D49EB}"/>
-          </ac:grpSpMkLst>
-        </pc:grpChg>
-        <pc:picChg chg="mod">
-          <ac:chgData name="Baráth, Július" userId="aebde9b9-dccc-4475-a9ac-c05e78323d7a" providerId="ADAL" clId="{948B29B3-A0E7-9F41-88DC-40F7529E299D}" dt="2025-02-24T12:38:02.151" v="58" actId="164"/>
+        <pc:picChg chg="add del mod">
+          <ac:chgData name="Baráth, Július" userId="aebde9b9-dccc-4475-a9ac-c05e78323d7a" providerId="ADAL" clId="{4A0811C8-ED2F-505E-B787-C8270CED5046}" dt="2026-07-13T06:03:25.359" v="221" actId="1076"/>
           <ac:picMkLst>
             <pc:docMk/>
-            <pc:sldMk cId="3434232039" sldId="361"/>
-            <ac:picMk id="31748" creationId="{00000000-0000-0000-0000-000000000000}"/>
+            <pc:sldMk cId="180398145" sldId="454"/>
+            <ac:picMk id="6" creationId="{588839BC-54F2-2B86-1F1B-EC814D585130}"/>
           </ac:picMkLst>
         </pc:picChg>
-      </pc:sldChg>
-      <pc:sldChg chg="addSp delSp modSp mod">
-        <pc:chgData name="Baráth, Július" userId="aebde9b9-dccc-4475-a9ac-c05e78323d7a" providerId="ADAL" clId="{948B29B3-A0E7-9F41-88DC-40F7529E299D}" dt="2025-02-24T13:26:20.977" v="96" actId="14100"/>
-        <pc:sldMkLst>
-          <pc:docMk/>
-          <pc:sldMk cId="1478989820" sldId="384"/>
-        </pc:sldMkLst>
-        <pc:spChg chg="add mod">
-          <ac:chgData name="Baráth, Július" userId="aebde9b9-dccc-4475-a9ac-c05e78323d7a" providerId="ADAL" clId="{948B29B3-A0E7-9F41-88DC-40F7529E299D}" dt="2025-02-24T13:21:11.886" v="89" actId="207"/>
-          <ac:spMkLst>
-            <pc:docMk/>
-            <pc:sldMk cId="1478989820" sldId="384"/>
-            <ac:spMk id="2" creationId="{06AEF78F-FD4F-AE26-825E-BAB863E7AC6A}"/>
-          </ac:spMkLst>
-        </pc:spChg>
-        <pc:spChg chg="add mod">
-          <ac:chgData name="Baráth, Július" userId="aebde9b9-dccc-4475-a9ac-c05e78323d7a" providerId="ADAL" clId="{948B29B3-A0E7-9F41-88DC-40F7529E299D}" dt="2025-02-24T13:21:23.713" v="91" actId="1076"/>
-          <ac:spMkLst>
-            <pc:docMk/>
-            <pc:sldMk cId="1478989820" sldId="384"/>
-            <ac:spMk id="6" creationId="{8EF00255-3540-35AD-8A75-05CE6E65C7B7}"/>
-          </ac:spMkLst>
-        </pc:spChg>
-        <pc:spChg chg="mod">
-          <ac:chgData name="Baráth, Július" userId="aebde9b9-dccc-4475-a9ac-c05e78323d7a" providerId="ADAL" clId="{948B29B3-A0E7-9F41-88DC-40F7529E299D}" dt="2025-02-24T13:13:54.877" v="78"/>
-          <ac:spMkLst>
-            <pc:docMk/>
-            <pc:sldMk cId="1478989820" sldId="384"/>
-            <ac:spMk id="102402" creationId="{14FE79C5-D2E3-E848-AC98-CE161D09768F}"/>
-          </ac:spMkLst>
-        </pc:spChg>
         <pc:picChg chg="mod">
-          <ac:chgData name="Baráth, Július" userId="aebde9b9-dccc-4475-a9ac-c05e78323d7a" providerId="ADAL" clId="{948B29B3-A0E7-9F41-88DC-40F7529E299D}" dt="2025-02-24T13:20:36.505" v="84" actId="1076"/>
+          <ac:chgData name="Baráth, Július" userId="aebde9b9-dccc-4475-a9ac-c05e78323d7a" providerId="ADAL" clId="{4A0811C8-ED2F-505E-B787-C8270CED5046}" dt="2026-07-13T06:03:26.827" v="222" actId="1076"/>
           <ac:picMkLst>
             <pc:docMk/>
-            <pc:sldMk cId="1478989820" sldId="384"/>
-            <ac:picMk id="4" creationId="{696AC8A9-7BEA-48F7-8C4C-BD0193BCACB1}"/>
+            <pc:sldMk cId="180398145" sldId="454"/>
+            <ac:picMk id="65538" creationId="{EDF25CEB-AEEA-C943-8987-E1058A0254B0}"/>
           </ac:picMkLst>
         </pc:picChg>
-        <pc:cxnChg chg="add mod">
-          <ac:chgData name="Baráth, Július" userId="aebde9b9-dccc-4475-a9ac-c05e78323d7a" providerId="ADAL" clId="{948B29B3-A0E7-9F41-88DC-40F7529E299D}" dt="2025-02-24T13:26:20.977" v="96" actId="14100"/>
+        <pc:cxnChg chg="mod">
+          <ac:chgData name="Baráth, Július" userId="aebde9b9-dccc-4475-a9ac-c05e78323d7a" providerId="ADAL" clId="{4A0811C8-ED2F-505E-B787-C8270CED5046}" dt="2026-07-13T06:03:26.827" v="222" actId="1076"/>
           <ac:cxnSpMkLst>
             <pc:docMk/>
-            <pc:sldMk cId="1478989820" sldId="384"/>
-            <ac:cxnSpMk id="8" creationId="{CBD3890F-385E-9C44-482F-D1B895B8B3DF}"/>
+            <pc:sldMk cId="180398145" sldId="454"/>
+            <ac:cxnSpMk id="3" creationId="{782F78ED-CBB0-2B62-3ED9-44653EE02AAD}"/>
           </ac:cxnSpMkLst>
         </pc:cxnChg>
-        <pc:cxnChg chg="add mod">
-          <ac:chgData name="Baráth, Július" userId="aebde9b9-dccc-4475-a9ac-c05e78323d7a" providerId="ADAL" clId="{948B29B3-A0E7-9F41-88DC-40F7529E299D}" dt="2025-02-24T13:26:20.977" v="96" actId="14100"/>
+        <pc:cxnChg chg="mod">
+          <ac:chgData name="Baráth, Július" userId="aebde9b9-dccc-4475-a9ac-c05e78323d7a" providerId="ADAL" clId="{4A0811C8-ED2F-505E-B787-C8270CED5046}" dt="2026-07-13T06:03:26.827" v="222" actId="1076"/>
           <ac:cxnSpMkLst>
             <pc:docMk/>
-            <pc:sldMk cId="1478989820" sldId="384"/>
-            <ac:cxnSpMk id="10" creationId="{05B81D1D-1833-7690-E9F3-9F08D90D9E01}"/>
+            <pc:sldMk cId="180398145" sldId="454"/>
+            <ac:cxnSpMk id="5" creationId="{80C588EA-C4B4-D5D1-A53C-197FC66B7C3B}"/>
+          </ac:cxnSpMkLst>
+        </pc:cxnChg>
+        <pc:cxnChg chg="mod">
+          <ac:chgData name="Baráth, Július" userId="aebde9b9-dccc-4475-a9ac-c05e78323d7a" providerId="ADAL" clId="{4A0811C8-ED2F-505E-B787-C8270CED5046}" dt="2026-07-13T06:03:26.827" v="222" actId="1076"/>
+          <ac:cxnSpMkLst>
+            <pc:docMk/>
+            <pc:sldMk cId="180398145" sldId="454"/>
+            <ac:cxnSpMk id="7" creationId="{39A29CBB-27EF-40FA-E413-F094DD595F7E}"/>
+          </ac:cxnSpMkLst>
+        </pc:cxnChg>
+        <pc:cxnChg chg="mod">
+          <ac:chgData name="Baráth, Július" userId="aebde9b9-dccc-4475-a9ac-c05e78323d7a" providerId="ADAL" clId="{4A0811C8-ED2F-505E-B787-C8270CED5046}" dt="2026-07-13T06:03:26.827" v="222" actId="1076"/>
+          <ac:cxnSpMkLst>
+            <pc:docMk/>
+            <pc:sldMk cId="180398145" sldId="454"/>
+            <ac:cxnSpMk id="9" creationId="{A8494CE8-AD89-3E10-4127-21020DD1C662}"/>
           </ac:cxnSpMkLst>
         </pc:cxnChg>
       </pc:sldChg>
-      <pc:sldChg chg="modSp mod">
-        <pc:chgData name="Baráth, Július" userId="aebde9b9-dccc-4475-a9ac-c05e78323d7a" providerId="ADAL" clId="{948B29B3-A0E7-9F41-88DC-40F7529E299D}" dt="2025-02-24T13:02:57.237" v="67" actId="20577"/>
+      <pc:sldChg chg="addSp delSp modSp new mod modClrScheme chgLayout">
+        <pc:chgData name="Baráth, Július" userId="aebde9b9-dccc-4475-a9ac-c05e78323d7a" providerId="ADAL" clId="{4A0811C8-ED2F-505E-B787-C8270CED5046}" dt="2026-07-13T05:51:58.656" v="127"/>
         <pc:sldMkLst>
           <pc:docMk/>
-          <pc:sldMk cId="2573049395" sldId="461"/>
+          <pc:sldMk cId="1117345495" sldId="470"/>
         </pc:sldMkLst>
-        <pc:spChg chg="mod">
-          <ac:chgData name="Baráth, Július" userId="aebde9b9-dccc-4475-a9ac-c05e78323d7a" providerId="ADAL" clId="{948B29B3-A0E7-9F41-88DC-40F7529E299D}" dt="2025-02-24T13:02:57.237" v="67" actId="20577"/>
+        <pc:spChg chg="del mod ord">
+          <ac:chgData name="Baráth, Július" userId="aebde9b9-dccc-4475-a9ac-c05e78323d7a" providerId="ADAL" clId="{4A0811C8-ED2F-505E-B787-C8270CED5046}" dt="2026-07-13T05:50:56.368" v="85" actId="700"/>
           <ac:spMkLst>
             <pc:docMk/>
-            <pc:sldMk cId="2573049395" sldId="461"/>
-            <ac:spMk id="99330" creationId="{EDC61A6D-448B-C843-9C5C-3DC907A92A62}"/>
+            <pc:sldMk cId="1117345495" sldId="470"/>
+            <ac:spMk id="2" creationId="{02C96B2E-C7FC-B7C2-1588-840234D407EE}"/>
+          </ac:spMkLst>
+        </pc:spChg>
+        <pc:spChg chg="add del mod">
+          <ac:chgData name="Baráth, Július" userId="aebde9b9-dccc-4475-a9ac-c05e78323d7a" providerId="ADAL" clId="{4A0811C8-ED2F-505E-B787-C8270CED5046}" dt="2026-07-13T05:51:58.656" v="127"/>
+          <ac:spMkLst>
+            <pc:docMk/>
+            <pc:sldMk cId="1117345495" sldId="470"/>
+            <ac:spMk id="3" creationId="{92E19FBA-D6AC-80AE-4266-A13BA3BA1415}"/>
+          </ac:spMkLst>
+        </pc:spChg>
+        <pc:spChg chg="add mod ord">
+          <ac:chgData name="Baráth, Július" userId="aebde9b9-dccc-4475-a9ac-c05e78323d7a" providerId="ADAL" clId="{4A0811C8-ED2F-505E-B787-C8270CED5046}" dt="2026-07-13T05:51:28.936" v="125" actId="20577"/>
+          <ac:spMkLst>
+            <pc:docMk/>
+            <pc:sldMk cId="1117345495" sldId="470"/>
+            <ac:spMk id="4" creationId="{C73A33F2-8C5F-0159-EA54-F147A714F85F}"/>
+          </ac:spMkLst>
+        </pc:spChg>
+        <pc:spChg chg="add mod ord">
+          <ac:chgData name="Baráth, Július" userId="aebde9b9-dccc-4475-a9ac-c05e78323d7a" providerId="ADAL" clId="{4A0811C8-ED2F-505E-B787-C8270CED5046}" dt="2026-07-13T05:51:15.990" v="91" actId="20577"/>
+          <ac:spMkLst>
+            <pc:docMk/>
+            <pc:sldMk cId="1117345495" sldId="470"/>
+            <ac:spMk id="5" creationId="{D663A0C5-C5FD-5904-7895-457068B1A889}"/>
           </ac:spMkLst>
         </pc:spChg>
       </pc:sldChg>
-    </pc:docChg>
-  </pc:docChgLst>
-  <pc:docChgLst>
-    <pc:chgData name="Július Baráth" userId="e650c4ab-697e-4750-bd58-c1531aabce95" providerId="ADAL" clId="{1BA7D146-39D7-46A2-94CE-8B9AC94CA62B}"/>
-    <pc:docChg chg="undo custSel delSld modSld">
-      <pc:chgData name="Július Baráth" userId="e650c4ab-697e-4750-bd58-c1531aabce95" providerId="ADAL" clId="{1BA7D146-39D7-46A2-94CE-8B9AC94CA62B}" dt="2021-03-04T16:54:38.478" v="377" actId="14100"/>
-      <pc:docMkLst>
-        <pc:docMk/>
-      </pc:docMkLst>
-      <pc:sldChg chg="delSp mod">
-        <pc:chgData name="Július Baráth" userId="e650c4ab-697e-4750-bd58-c1531aabce95" providerId="ADAL" clId="{1BA7D146-39D7-46A2-94CE-8B9AC94CA62B}" dt="2021-03-01T17:27:05.787" v="235" actId="478"/>
+      <pc:sldChg chg="addSp modSp new mod">
+        <pc:chgData name="Baráth, Július" userId="aebde9b9-dccc-4475-a9ac-c05e78323d7a" providerId="ADAL" clId="{4A0811C8-ED2F-505E-B787-C8270CED5046}" dt="2026-07-13T05:58:10.088" v="197" actId="1076"/>
         <pc:sldMkLst>
           <pc:docMk/>
-          <pc:sldMk cId="1543713500" sldId="260"/>
+          <pc:sldMk cId="792097991" sldId="471"/>
         </pc:sldMkLst>
-      </pc:sldChg>
-      <pc:sldChg chg="modSp mod">
-        <pc:chgData name="Július Baráth" userId="e650c4ab-697e-4750-bd58-c1531aabce95" providerId="ADAL" clId="{1BA7D146-39D7-46A2-94CE-8B9AC94CA62B}" dt="2021-03-02T09:59:43.345" v="261" actId="113"/>
-        <pc:sldMkLst>
-          <pc:docMk/>
-          <pc:sldMk cId="2067182005" sldId="298"/>
-        </pc:sldMkLst>
-      </pc:sldChg>
-      <pc:sldChg chg="delSp del">
-        <pc:chgData name="Július Baráth" userId="e650c4ab-697e-4750-bd58-c1531aabce95" providerId="ADAL" clId="{1BA7D146-39D7-46A2-94CE-8B9AC94CA62B}" dt="2021-03-04T16:25:53.295" v="279" actId="2696"/>
-        <pc:sldMkLst>
-          <pc:docMk/>
-          <pc:sldMk cId="406793510" sldId="308"/>
-        </pc:sldMkLst>
-      </pc:sldChg>
-      <pc:sldChg chg="modSp mod">
-        <pc:chgData name="Július Baráth" userId="e650c4ab-697e-4750-bd58-c1531aabce95" providerId="ADAL" clId="{1BA7D146-39D7-46A2-94CE-8B9AC94CA62B}" dt="2021-03-01T17:20:12.474" v="234" actId="115"/>
-        <pc:sldMkLst>
-          <pc:docMk/>
-          <pc:sldMk cId="89272124" sldId="310"/>
-        </pc:sldMkLst>
-      </pc:sldChg>
-      <pc:sldChg chg="modSp mod">
-        <pc:chgData name="Július Baráth" userId="e650c4ab-697e-4750-bd58-c1531aabce95" providerId="ADAL" clId="{1BA7D146-39D7-46A2-94CE-8B9AC94CA62B}" dt="2021-03-01T17:35:31.781" v="241" actId="6549"/>
-        <pc:sldMkLst>
-          <pc:docMk/>
-          <pc:sldMk cId="1892307816" sldId="357"/>
-        </pc:sldMkLst>
-      </pc:sldChg>
-      <pc:sldChg chg="modSp mod">
-        <pc:chgData name="Július Baráth" userId="e650c4ab-697e-4750-bd58-c1531aabce95" providerId="ADAL" clId="{1BA7D146-39D7-46A2-94CE-8B9AC94CA62B}" dt="2021-03-01T17:37:49.119" v="253" actId="20577"/>
-        <pc:sldMkLst>
-          <pc:docMk/>
-          <pc:sldMk cId="565634681" sldId="371"/>
-        </pc:sldMkLst>
-      </pc:sldChg>
-      <pc:sldChg chg="addSp modSp mod">
-        <pc:chgData name="Július Baráth" userId="e650c4ab-697e-4750-bd58-c1531aabce95" providerId="ADAL" clId="{1BA7D146-39D7-46A2-94CE-8B9AC94CA62B}" dt="2021-03-04T16:30:06.831" v="337" actId="6549"/>
-        <pc:sldMkLst>
-          <pc:docMk/>
-          <pc:sldMk cId="2802694068" sldId="381"/>
-        </pc:sldMkLst>
-      </pc:sldChg>
-      <pc:sldChg chg="delSp del">
-        <pc:chgData name="Július Baráth" userId="e650c4ab-697e-4750-bd58-c1531aabce95" providerId="ADAL" clId="{1BA7D146-39D7-46A2-94CE-8B9AC94CA62B}" dt="2021-03-01T17:12:23.181" v="224" actId="2696"/>
-        <pc:sldMkLst>
-          <pc:docMk/>
-          <pc:sldMk cId="4000123059" sldId="382"/>
-        </pc:sldMkLst>
-      </pc:sldChg>
-      <pc:sldChg chg="addSp modSp mod">
-        <pc:chgData name="Július Baráth" userId="e650c4ab-697e-4750-bd58-c1531aabce95" providerId="ADAL" clId="{1BA7D146-39D7-46A2-94CE-8B9AC94CA62B}" dt="2021-03-04T16:32:43.624" v="344" actId="14100"/>
-        <pc:sldMkLst>
-          <pc:docMk/>
-          <pc:sldMk cId="1478989820" sldId="384"/>
-        </pc:sldMkLst>
-      </pc:sldChg>
-      <pc:sldChg chg="del">
-        <pc:chgData name="Július Baráth" userId="e650c4ab-697e-4750-bd58-c1531aabce95" providerId="ADAL" clId="{1BA7D146-39D7-46A2-94CE-8B9AC94CA62B}" dt="2021-03-01T17:03:18.869" v="220" actId="2696"/>
-        <pc:sldMkLst>
-          <pc:docMk/>
-          <pc:sldMk cId="3550951984" sldId="436"/>
-        </pc:sldMkLst>
-      </pc:sldChg>
-      <pc:sldChg chg="del">
-        <pc:chgData name="Július Baráth" userId="e650c4ab-697e-4750-bd58-c1531aabce95" providerId="ADAL" clId="{1BA7D146-39D7-46A2-94CE-8B9AC94CA62B}" dt="2021-03-01T15:53:44.061" v="0" actId="2696"/>
-        <pc:sldMkLst>
-          <pc:docMk/>
-          <pc:sldMk cId="1323188060" sldId="438"/>
-        </pc:sldMkLst>
-      </pc:sldChg>
-      <pc:sldChg chg="addSp modSp mod">
-        <pc:chgData name="Július Baráth" userId="e650c4ab-697e-4750-bd58-c1531aabce95" providerId="ADAL" clId="{1BA7D146-39D7-46A2-94CE-8B9AC94CA62B}" dt="2021-03-01T17:41:10.542" v="259" actId="1076"/>
-        <pc:sldMkLst>
-          <pc:docMk/>
-          <pc:sldMk cId="2214043005" sldId="440"/>
-        </pc:sldMkLst>
-      </pc:sldChg>
-      <pc:sldChg chg="del">
-        <pc:chgData name="Július Baráth" userId="e650c4ab-697e-4750-bd58-c1531aabce95" providerId="ADAL" clId="{1BA7D146-39D7-46A2-94CE-8B9AC94CA62B}" dt="2021-03-01T15:53:48.242" v="1" actId="2696"/>
-        <pc:sldMkLst>
-          <pc:docMk/>
-          <pc:sldMk cId="4254975807" sldId="441"/>
-        </pc:sldMkLst>
-      </pc:sldChg>
-      <pc:sldChg chg="modSp mod">
-        <pc:chgData name="Július Baráth" userId="e650c4ab-697e-4750-bd58-c1531aabce95" providerId="ADAL" clId="{1BA7D146-39D7-46A2-94CE-8B9AC94CA62B}" dt="2021-03-01T15:56:54.673" v="5" actId="14100"/>
-        <pc:sldMkLst>
-          <pc:docMk/>
-          <pc:sldMk cId="3452155191" sldId="447"/>
-        </pc:sldMkLst>
-      </pc:sldChg>
-      <pc:sldChg chg="modSp mod">
-        <pc:chgData name="Július Baráth" userId="e650c4ab-697e-4750-bd58-c1531aabce95" providerId="ADAL" clId="{1BA7D146-39D7-46A2-94CE-8B9AC94CA62B}" dt="2021-03-01T17:30:57.886" v="238" actId="1076"/>
-        <pc:sldMkLst>
-          <pc:docMk/>
-          <pc:sldMk cId="360018116" sldId="449"/>
-        </pc:sldMkLst>
-      </pc:sldChg>
-      <pc:sldChg chg="addSp delSp modSp mod">
-        <pc:chgData name="Július Baráth" userId="e650c4ab-697e-4750-bd58-c1531aabce95" providerId="ADAL" clId="{1BA7D146-39D7-46A2-94CE-8B9AC94CA62B}" dt="2021-03-02T10:11:01.100" v="268" actId="478"/>
-        <pc:sldMkLst>
-          <pc:docMk/>
-          <pc:sldMk cId="3790823752" sldId="457"/>
-        </pc:sldMkLst>
-      </pc:sldChg>
-      <pc:sldChg chg="addSp delSp modSp mod">
-        <pc:chgData name="Július Baráth" userId="e650c4ab-697e-4750-bd58-c1531aabce95" providerId="ADAL" clId="{1BA7D146-39D7-46A2-94CE-8B9AC94CA62B}" dt="2021-03-01T17:11:10.641" v="223" actId="1076"/>
-        <pc:sldMkLst>
-          <pc:docMk/>
-          <pc:sldMk cId="2573049395" sldId="461"/>
-        </pc:sldMkLst>
-      </pc:sldChg>
-      <pc:sldChg chg="modSp mod">
-        <pc:chgData name="Július Baráth" userId="e650c4ab-697e-4750-bd58-c1531aabce95" providerId="ADAL" clId="{1BA7D146-39D7-46A2-94CE-8B9AC94CA62B}" dt="2021-03-04T16:38:33.203" v="345" actId="113"/>
-        <pc:sldMkLst>
-          <pc:docMk/>
-          <pc:sldMk cId="4258474438" sldId="464"/>
-        </pc:sldMkLst>
-      </pc:sldChg>
-      <pc:sldChg chg="addSp modSp mod">
-        <pc:chgData name="Július Baráth" userId="e650c4ab-697e-4750-bd58-c1531aabce95" providerId="ADAL" clId="{1BA7D146-39D7-46A2-94CE-8B9AC94CA62B}" dt="2021-03-04T16:42:26.261" v="375" actId="207"/>
-        <pc:sldMkLst>
-          <pc:docMk/>
-          <pc:sldMk cId="104680853" sldId="465"/>
-        </pc:sldMkLst>
-      </pc:sldChg>
-      <pc:sldChg chg="modSp">
-        <pc:chgData name="Július Baráth" userId="e650c4ab-697e-4750-bd58-c1531aabce95" providerId="ADAL" clId="{1BA7D146-39D7-46A2-94CE-8B9AC94CA62B}" dt="2021-03-04T16:54:38.478" v="377" actId="14100"/>
-        <pc:sldMkLst>
-          <pc:docMk/>
-          <pc:sldMk cId="2099624863" sldId="467"/>
-        </pc:sldMkLst>
-      </pc:sldChg>
-    </pc:docChg>
-  </pc:docChgLst>
-  <pc:docChgLst>
-    <pc:chgData name="Július Baráth" userId="e650c4ab-697e-4750-bd58-c1531aabce95" providerId="ADAL" clId="{1CE0762B-C29E-2C4D-A25A-398E6F204CBD}"/>
-    <pc:docChg chg="custSel delSld modSld sldOrd">
-      <pc:chgData name="Július Baráth" userId="e650c4ab-697e-4750-bd58-c1531aabce95" providerId="ADAL" clId="{1CE0762B-C29E-2C4D-A25A-398E6F204CBD}" dt="2020-02-27T08:47:38.069" v="265" actId="15"/>
-      <pc:docMkLst>
-        <pc:docMk/>
-      </pc:docMkLst>
-      <pc:sldChg chg="del">
-        <pc:chgData name="Július Baráth" userId="e650c4ab-697e-4750-bd58-c1531aabce95" providerId="ADAL" clId="{1CE0762B-C29E-2C4D-A25A-398E6F204CBD}" dt="2020-02-27T08:43:32.476" v="185" actId="2696"/>
-        <pc:sldMkLst>
-          <pc:docMk/>
-          <pc:sldMk cId="4264555396" sldId="280"/>
-        </pc:sldMkLst>
-      </pc:sldChg>
-      <pc:sldChg chg="modSp">
-        <pc:chgData name="Július Baráth" userId="e650c4ab-697e-4750-bd58-c1531aabce95" providerId="ADAL" clId="{1CE0762B-C29E-2C4D-A25A-398E6F204CBD}" dt="2020-02-27T08:47:38.069" v="265" actId="15"/>
-        <pc:sldMkLst>
-          <pc:docMk/>
-          <pc:sldMk cId="2888860324" sldId="281"/>
-        </pc:sldMkLst>
-      </pc:sldChg>
-      <pc:sldChg chg="del">
-        <pc:chgData name="Július Baráth" userId="e650c4ab-697e-4750-bd58-c1531aabce95" providerId="ADAL" clId="{1CE0762B-C29E-2C4D-A25A-398E6F204CBD}" dt="2020-02-27T08:45:30.881" v="231" actId="2696"/>
-        <pc:sldMkLst>
-          <pc:docMk/>
-          <pc:sldMk cId="3618971895" sldId="282"/>
-        </pc:sldMkLst>
-      </pc:sldChg>
-      <pc:sldChg chg="ord">
-        <pc:chgData name="Július Baráth" userId="e650c4ab-697e-4750-bd58-c1531aabce95" providerId="ADAL" clId="{1CE0762B-C29E-2C4D-A25A-398E6F204CBD}" dt="2020-02-27T08:45:18.352" v="230"/>
-        <pc:sldMkLst>
-          <pc:docMk/>
-          <pc:sldMk cId="4240063183" sldId="285"/>
-        </pc:sldMkLst>
-      </pc:sldChg>
-      <pc:sldChg chg="del">
-        <pc:chgData name="Július Baráth" userId="e650c4ab-697e-4750-bd58-c1531aabce95" providerId="ADAL" clId="{1CE0762B-C29E-2C4D-A25A-398E6F204CBD}" dt="2020-02-27T08:45:30.933" v="233" actId="2696"/>
-        <pc:sldMkLst>
-          <pc:docMk/>
-          <pc:sldMk cId="3236849991" sldId="286"/>
-        </pc:sldMkLst>
-      </pc:sldChg>
-      <pc:sldChg chg="del">
-        <pc:chgData name="Július Baráth" userId="e650c4ab-697e-4750-bd58-c1531aabce95" providerId="ADAL" clId="{1CE0762B-C29E-2C4D-A25A-398E6F204CBD}" dt="2020-02-27T08:45:30.961" v="234" actId="2696"/>
-        <pc:sldMkLst>
-          <pc:docMk/>
-          <pc:sldMk cId="1718079880" sldId="287"/>
-        </pc:sldMkLst>
-      </pc:sldChg>
-      <pc:sldChg chg="del">
-        <pc:chgData name="Július Baráth" userId="e650c4ab-697e-4750-bd58-c1531aabce95" providerId="ADAL" clId="{1CE0762B-C29E-2C4D-A25A-398E6F204CBD}" dt="2020-02-27T08:45:30.985" v="235" actId="2696"/>
-        <pc:sldMkLst>
-          <pc:docMk/>
-          <pc:sldMk cId="3951885092" sldId="288"/>
-        </pc:sldMkLst>
-      </pc:sldChg>
-      <pc:sldChg chg="ord">
-        <pc:chgData name="Július Baráth" userId="e650c4ab-697e-4750-bd58-c1531aabce95" providerId="ADAL" clId="{1CE0762B-C29E-2C4D-A25A-398E6F204CBD}" dt="2020-02-27T08:45:00.174" v="229"/>
-        <pc:sldMkLst>
-          <pc:docMk/>
-          <pc:sldMk cId="1468456781" sldId="289"/>
-        </pc:sldMkLst>
-      </pc:sldChg>
-      <pc:sldChg chg="del">
-        <pc:chgData name="Július Baráth" userId="e650c4ab-697e-4750-bd58-c1531aabce95" providerId="ADAL" clId="{1CE0762B-C29E-2C4D-A25A-398E6F204CBD}" dt="2020-02-27T08:45:31.066" v="236" actId="2696"/>
-        <pc:sldMkLst>
-          <pc:docMk/>
-          <pc:sldMk cId="474503270" sldId="290"/>
-        </pc:sldMkLst>
-      </pc:sldChg>
-      <pc:sldChg chg="del">
-        <pc:chgData name="Július Baráth" userId="e650c4ab-697e-4750-bd58-c1531aabce95" providerId="ADAL" clId="{1CE0762B-C29E-2C4D-A25A-398E6F204CBD}" dt="2020-02-27T08:45:31.098" v="237" actId="2696"/>
-        <pc:sldMkLst>
-          <pc:docMk/>
-          <pc:sldMk cId="121722699" sldId="291"/>
-        </pc:sldMkLst>
-      </pc:sldChg>
-      <pc:sldChg chg="modSp">
-        <pc:chgData name="Július Baráth" userId="e650c4ab-697e-4750-bd58-c1531aabce95" providerId="ADAL" clId="{1CE0762B-C29E-2C4D-A25A-398E6F204CBD}" dt="2020-02-26T15:37:41.709" v="14" actId="207"/>
-        <pc:sldMkLst>
-          <pc:docMk/>
-          <pc:sldMk cId="1219818006" sldId="302"/>
-        </pc:sldMkLst>
-      </pc:sldChg>
-      <pc:sldChg chg="modSp">
-        <pc:chgData name="Július Baráth" userId="e650c4ab-697e-4750-bd58-c1531aabce95" providerId="ADAL" clId="{1CE0762B-C29E-2C4D-A25A-398E6F204CBD}" dt="2020-02-26T15:52:04.913" v="17" actId="113"/>
-        <pc:sldMkLst>
-          <pc:docMk/>
-          <pc:sldMk cId="2903130704" sldId="305"/>
-        </pc:sldMkLst>
-      </pc:sldChg>
-      <pc:sldChg chg="modSp">
-        <pc:chgData name="Július Baráth" userId="e650c4ab-697e-4750-bd58-c1531aabce95" providerId="ADAL" clId="{1CE0762B-C29E-2C4D-A25A-398E6F204CBD}" dt="2020-02-26T16:23:35.730" v="104" actId="113"/>
-        <pc:sldMkLst>
-          <pc:docMk/>
-          <pc:sldMk cId="89272124" sldId="310"/>
-        </pc:sldMkLst>
-      </pc:sldChg>
-      <pc:sldChg chg="modSp">
-        <pc:chgData name="Július Baráth" userId="e650c4ab-697e-4750-bd58-c1531aabce95" providerId="ADAL" clId="{1CE0762B-C29E-2C4D-A25A-398E6F204CBD}" dt="2020-02-26T14:52:10.731" v="0" actId="20577"/>
-        <pc:sldMkLst>
-          <pc:docMk/>
-          <pc:sldMk cId="1428878316" sldId="345"/>
-        </pc:sldMkLst>
-      </pc:sldChg>
-      <pc:sldChg chg="del">
-        <pc:chgData name="Július Baráth" userId="e650c4ab-697e-4750-bd58-c1531aabce95" providerId="ADAL" clId="{1CE0762B-C29E-2C4D-A25A-398E6F204CBD}" dt="2020-02-27T08:45:30.908" v="232" actId="2696"/>
-        <pc:sldMkLst>
-          <pc:docMk/>
-          <pc:sldMk cId="371903179" sldId="363"/>
-        </pc:sldMkLst>
-      </pc:sldChg>
-      <pc:sldChg chg="del">
-        <pc:chgData name="Július Baráth" userId="e650c4ab-697e-4750-bd58-c1531aabce95" providerId="ADAL" clId="{1CE0762B-C29E-2C4D-A25A-398E6F204CBD}" dt="2020-02-27T08:45:31.189" v="238" actId="2696"/>
-        <pc:sldMkLst>
-          <pc:docMk/>
-          <pc:sldMk cId="282886045" sldId="364"/>
-        </pc:sldMkLst>
-      </pc:sldChg>
-      <pc:sldChg chg="addSp modSp">
-        <pc:chgData name="Július Baráth" userId="e650c4ab-697e-4750-bd58-c1531aabce95" providerId="ADAL" clId="{1CE0762B-C29E-2C4D-A25A-398E6F204CBD}" dt="2020-02-26T17:09:46.191" v="184" actId="14100"/>
-        <pc:sldMkLst>
-          <pc:docMk/>
-          <pc:sldMk cId="4041635186" sldId="422"/>
-        </pc:sldMkLst>
-      </pc:sldChg>
-      <pc:sldChg chg="addSp modSp">
-        <pc:chgData name="Július Baráth" userId="e650c4ab-697e-4750-bd58-c1531aabce95" providerId="ADAL" clId="{1CE0762B-C29E-2C4D-A25A-398E6F204CBD}" dt="2020-02-26T16:46:23.167" v="128" actId="14100"/>
-        <pc:sldMkLst>
-          <pc:docMk/>
-          <pc:sldMk cId="3593196741" sldId="423"/>
-        </pc:sldMkLst>
-      </pc:sldChg>
-      <pc:sldChg chg="addSp modSp">
-        <pc:chgData name="Július Baráth" userId="e650c4ab-697e-4750-bd58-c1531aabce95" providerId="ADAL" clId="{1CE0762B-C29E-2C4D-A25A-398E6F204CBD}" dt="2020-02-26T16:52:49.728" v="156" actId="20577"/>
-        <pc:sldMkLst>
-          <pc:docMk/>
-          <pc:sldMk cId="2530715081" sldId="424"/>
-        </pc:sldMkLst>
-      </pc:sldChg>
-      <pc:sldChg chg="addSp modSp">
-        <pc:chgData name="Július Baráth" userId="e650c4ab-697e-4750-bd58-c1531aabce95" providerId="ADAL" clId="{1CE0762B-C29E-2C4D-A25A-398E6F204CBD}" dt="2020-02-26T16:14:59.543" v="103" actId="113"/>
-        <pc:sldMkLst>
-          <pc:docMk/>
-          <pc:sldMk cId="3550951984" sldId="436"/>
-        </pc:sldMkLst>
-      </pc:sldChg>
-      <pc:sldChg chg="addSp modSp">
-        <pc:chgData name="Július Baráth" userId="e650c4ab-697e-4750-bd58-c1531aabce95" providerId="ADAL" clId="{1CE0762B-C29E-2C4D-A25A-398E6F204CBD}" dt="2020-02-26T16:01:20.129" v="95" actId="1076"/>
-        <pc:sldMkLst>
-          <pc:docMk/>
-          <pc:sldMk cId="2214043005" sldId="440"/>
-        </pc:sldMkLst>
-      </pc:sldChg>
-      <pc:sldChg chg="addSp modSp">
-        <pc:chgData name="Július Baráth" userId="e650c4ab-697e-4750-bd58-c1531aabce95" providerId="ADAL" clId="{1CE0762B-C29E-2C4D-A25A-398E6F204CBD}" dt="2020-02-26T15:17:05.473" v="13" actId="14100"/>
-        <pc:sldMkLst>
-          <pc:docMk/>
-          <pc:sldMk cId="1890575026" sldId="455"/>
-        </pc:sldMkLst>
-      </pc:sldChg>
-      <pc:sldChg chg="addSp modSp">
-        <pc:chgData name="Július Baráth" userId="e650c4ab-697e-4750-bd58-c1531aabce95" providerId="ADAL" clId="{1CE0762B-C29E-2C4D-A25A-398E6F204CBD}" dt="2020-02-26T15:56:23.324" v="19" actId="11529"/>
-        <pc:sldMkLst>
-          <pc:docMk/>
-          <pc:sldMk cId="4108751303" sldId="459"/>
-        </pc:sldMkLst>
-      </pc:sldChg>
-      <pc:sldChg chg="modSp">
-        <pc:chgData name="Július Baráth" userId="e650c4ab-697e-4750-bd58-c1531aabce95" providerId="ADAL" clId="{1CE0762B-C29E-2C4D-A25A-398E6F204CBD}" dt="2020-02-26T16:12:54.329" v="97" actId="113"/>
-        <pc:sldMkLst>
-          <pc:docMk/>
-          <pc:sldMk cId="2573049395" sldId="461"/>
-        </pc:sldMkLst>
-      </pc:sldChg>
-      <pc:sldChg chg="modSp">
-        <pc:chgData name="Július Baráth" userId="e650c4ab-697e-4750-bd58-c1531aabce95" providerId="ADAL" clId="{1CE0762B-C29E-2C4D-A25A-398E6F204CBD}" dt="2020-02-26T16:24:26.333" v="105" actId="368"/>
-        <pc:sldMkLst>
-          <pc:docMk/>
-          <pc:sldMk cId="3949328846" sldId="463"/>
-        </pc:sldMkLst>
-      </pc:sldChg>
-      <pc:sldChg chg="delSp modSp">
-        <pc:chgData name="Július Baráth" userId="e650c4ab-697e-4750-bd58-c1531aabce95" providerId="ADAL" clId="{1CE0762B-C29E-2C4D-A25A-398E6F204CBD}" dt="2020-02-26T17:09:02.486" v="178" actId="368"/>
-        <pc:sldMkLst>
-          <pc:docMk/>
-          <pc:sldMk cId="4258474438" sldId="464"/>
-        </pc:sldMkLst>
-      </pc:sldChg>
-      <pc:sldChg chg="delSp modSp">
-        <pc:chgData name="Július Baráth" userId="e650c4ab-697e-4750-bd58-c1531aabce95" providerId="ADAL" clId="{1CE0762B-C29E-2C4D-A25A-398E6F204CBD}" dt="2020-02-26T16:53:10.791" v="160" actId="403"/>
-        <pc:sldMkLst>
-          <pc:docMk/>
-          <pc:sldMk cId="104680853" sldId="465"/>
-        </pc:sldMkLst>
-      </pc:sldChg>
-      <pc:sldChg chg="delSp modSp">
-        <pc:chgData name="Július Baráth" userId="e650c4ab-697e-4750-bd58-c1531aabce95" providerId="ADAL" clId="{1CE0762B-C29E-2C4D-A25A-398E6F204CBD}" dt="2020-02-26T16:59:52.500" v="177" actId="27636"/>
-        <pc:sldMkLst>
-          <pc:docMk/>
-          <pc:sldMk cId="1716954247" sldId="466"/>
-        </pc:sldMkLst>
-      </pc:sldChg>
-    </pc:docChg>
-  </pc:docChgLst>
-  <pc:docChgLst>
-    <pc:chgData name="Július Baráth" userId="S::julius.barath@aos.sk::e650c4ab-697e-4750-bd58-c1531aabce95" providerId="AD" clId="Web-{B62288BF-9547-9818-4759-AF0E68675F0E}"/>
-    <pc:docChg chg="modSld">
-      <pc:chgData name="Július Baráth" userId="S::julius.barath@aos.sk::e650c4ab-697e-4750-bd58-c1531aabce95" providerId="AD" clId="Web-{B62288BF-9547-9818-4759-AF0E68675F0E}" dt="2022-02-11T09:06:58.563" v="1" actId="20577"/>
-      <pc:docMkLst>
-        <pc:docMk/>
-      </pc:docMkLst>
-      <pc:sldChg chg="modSp">
-        <pc:chgData name="Július Baráth" userId="S::julius.barath@aos.sk::e650c4ab-697e-4750-bd58-c1531aabce95" providerId="AD" clId="Web-{B62288BF-9547-9818-4759-AF0E68675F0E}" dt="2022-02-11T09:06:58.563" v="1" actId="20577"/>
-        <pc:sldMkLst>
-          <pc:docMk/>
-          <pc:sldMk cId="1331417989" sldId="256"/>
-        </pc:sldMkLst>
+        <pc:spChg chg="mod">
+          <ac:chgData name="Baráth, Július" userId="aebde9b9-dccc-4475-a9ac-c05e78323d7a" providerId="ADAL" clId="{4A0811C8-ED2F-505E-B787-C8270CED5046}" dt="2026-07-13T05:57:15.235" v="191" actId="20577"/>
+          <ac:spMkLst>
+            <pc:docMk/>
+            <pc:sldMk cId="792097991" sldId="471"/>
+            <ac:spMk id="2" creationId="{06314C37-EFED-F333-B424-48D7835A8C4C}"/>
+          </ac:spMkLst>
+        </pc:spChg>
+        <pc:picChg chg="add mod modCrop">
+          <ac:chgData name="Baráth, Július" userId="aebde9b9-dccc-4475-a9ac-c05e78323d7a" providerId="ADAL" clId="{4A0811C8-ED2F-505E-B787-C8270CED5046}" dt="2026-07-13T05:58:10.088" v="197" actId="1076"/>
+          <ac:picMkLst>
+            <pc:docMk/>
+            <pc:sldMk cId="792097991" sldId="471"/>
+            <ac:picMk id="4" creationId="{FD0B4D40-DEB9-0F33-C8B0-D91FDBA43AE3}"/>
+          </ac:picMkLst>
+        </pc:picChg>
       </pc:sldChg>
     </pc:docChg>
   </pc:docChgLst>
@@ -1304,7 +780,7 @@
           <a:p>
             <a:fld id="{B156397F-D7EE-494A-A9B5-46FE695781B4}" type="datetimeFigureOut">
               <a:rPr lang="sk-SK" smtClean="0"/>
-              <a:t>4.3.2025</a:t>
+              <a:t>13.7.2026</a:t>
             </a:fld>
             <a:endParaRPr lang="sk-SK"/>
           </a:p>
@@ -2005,7 +1481,7 @@
                 <a:latin typeface="Helvetica" pitchFamily="2" charset="0"/>
               </a:rPr>
               <a:pPr/>
-              <a:t>31</a:t>
+              <a:t>32</a:t>
             </a:fld>
             <a:endParaRPr lang="en-US" altLang="sk-SK" sz="1300">
               <a:latin typeface="Helvetica" pitchFamily="2" charset="0"/>
@@ -2267,7 +1743,7 @@
                 <a:latin typeface="Helvetica" pitchFamily="2" charset="0"/>
               </a:rPr>
               <a:pPr/>
-              <a:t>32</a:t>
+              <a:t>33</a:t>
             </a:fld>
             <a:endParaRPr lang="en-US" altLang="sk-SK" sz="1300">
               <a:latin typeface="Helvetica" pitchFamily="2" charset="0"/>
@@ -2529,7 +2005,7 @@
                 <a:latin typeface="Helvetica" pitchFamily="2" charset="0"/>
               </a:rPr>
               <a:pPr/>
-              <a:t>33</a:t>
+              <a:t>34</a:t>
             </a:fld>
             <a:endParaRPr lang="en-US" altLang="sk-SK" sz="1300">
               <a:latin typeface="Helvetica" pitchFamily="2" charset="0"/>
@@ -2791,7 +2267,7 @@
                 <a:latin typeface="Helvetica" pitchFamily="2" charset="0"/>
               </a:rPr>
               <a:pPr/>
-              <a:t>34</a:t>
+              <a:t>35</a:t>
             </a:fld>
             <a:endParaRPr lang="en-US" altLang="sk-SK" sz="1300">
               <a:latin typeface="Helvetica" pitchFamily="2" charset="0"/>
@@ -3053,7 +2529,7 @@
                 <a:latin typeface="Helvetica" pitchFamily="2" charset="0"/>
               </a:rPr>
               <a:pPr/>
-              <a:t>35</a:t>
+              <a:t>36</a:t>
             </a:fld>
             <a:endParaRPr lang="en-US" altLang="sk-SK" sz="1300">
               <a:latin typeface="Helvetica" pitchFamily="2" charset="0"/>
@@ -3315,7 +2791,7 @@
                 <a:latin typeface="Helvetica" pitchFamily="2" charset="0"/>
               </a:rPr>
               <a:pPr/>
-              <a:t>36</a:t>
+              <a:t>37</a:t>
             </a:fld>
             <a:endParaRPr lang="en-US" altLang="sk-SK" sz="1300">
               <a:latin typeface="Helvetica" pitchFamily="2" charset="0"/>
@@ -3577,7 +3053,7 @@
                 <a:latin typeface="Helvetica" pitchFamily="2" charset="0"/>
               </a:rPr>
               <a:pPr/>
-              <a:t>39</a:t>
+              <a:t>40</a:t>
             </a:fld>
             <a:endParaRPr lang="en-US" altLang="sk-SK" sz="1300">
               <a:latin typeface="Helvetica" pitchFamily="2" charset="0"/>
@@ -3839,7 +3315,7 @@
                 <a:latin typeface="Helvetica" pitchFamily="2" charset="0"/>
               </a:rPr>
               <a:pPr/>
-              <a:t>40</a:t>
+              <a:t>41</a:t>
             </a:fld>
             <a:endParaRPr lang="en-US" altLang="sk-SK" sz="1300">
               <a:latin typeface="Helvetica" pitchFamily="2" charset="0"/>
@@ -4101,7 +3577,7 @@
                 <a:latin typeface="Helvetica" pitchFamily="2" charset="0"/>
               </a:rPr>
               <a:pPr/>
-              <a:t>41</a:t>
+              <a:t>42</a:t>
             </a:fld>
             <a:endParaRPr lang="en-US" altLang="sk-SK" sz="1300">
               <a:latin typeface="Helvetica" pitchFamily="2" charset="0"/>
@@ -4363,7 +3839,7 @@
                 <a:latin typeface="Helvetica" pitchFamily="2" charset="0"/>
               </a:rPr>
               <a:pPr/>
-              <a:t>42</a:t>
+              <a:t>43</a:t>
             </a:fld>
             <a:endParaRPr lang="en-US" altLang="sk-SK" sz="1300">
               <a:latin typeface="Helvetica" pitchFamily="2" charset="0"/>
@@ -4887,7 +4363,7 @@
                 <a:latin typeface="Helvetica" pitchFamily="2" charset="0"/>
               </a:rPr>
               <a:pPr/>
-              <a:t>43</a:t>
+              <a:t>44</a:t>
             </a:fld>
             <a:endParaRPr lang="en-US" altLang="sk-SK" sz="1300">
               <a:latin typeface="Helvetica" pitchFamily="2" charset="0"/>
@@ -5149,7 +4625,7 @@
                 <a:latin typeface="Helvetica" pitchFamily="2" charset="0"/>
               </a:rPr>
               <a:pPr/>
-              <a:t>45</a:t>
+              <a:t>46</a:t>
             </a:fld>
             <a:endParaRPr lang="en-US" altLang="sk-SK" sz="1300">
               <a:latin typeface="Helvetica" pitchFamily="2" charset="0"/>
@@ -5411,7 +4887,7 @@
                 <a:latin typeface="Helvetica" pitchFamily="2" charset="0"/>
               </a:rPr>
               <a:pPr/>
-              <a:t>46</a:t>
+              <a:t>47</a:t>
             </a:fld>
             <a:endParaRPr lang="en-US" altLang="sk-SK" sz="1300">
               <a:latin typeface="Helvetica" pitchFamily="2" charset="0"/>
@@ -5673,7 +5149,7 @@
                 <a:latin typeface="Helvetica" pitchFamily="2" charset="0"/>
               </a:rPr>
               <a:pPr/>
-              <a:t>47</a:t>
+              <a:t>48</a:t>
             </a:fld>
             <a:endParaRPr lang="en-US" altLang="sk-SK" sz="1300">
               <a:latin typeface="Helvetica" pitchFamily="2" charset="0"/>
@@ -5935,7 +5411,7 @@
                 <a:latin typeface="Helvetica" pitchFamily="2" charset="0"/>
               </a:rPr>
               <a:pPr/>
-              <a:t>48</a:t>
+              <a:t>49</a:t>
             </a:fld>
             <a:endParaRPr lang="en-US" altLang="sk-SK" sz="1300">
               <a:latin typeface="Helvetica" pitchFamily="2" charset="0"/>
@@ -6197,7 +5673,7 @@
                 <a:latin typeface="Helvetica" pitchFamily="2" charset="0"/>
               </a:rPr>
               <a:pPr/>
-              <a:t>49</a:t>
+              <a:t>50</a:t>
             </a:fld>
             <a:endParaRPr lang="en-US" altLang="sk-SK" sz="1300">
               <a:latin typeface="Helvetica" pitchFamily="2" charset="0"/>
@@ -6459,7 +5935,7 @@
                 <a:latin typeface="Helvetica" pitchFamily="2" charset="0"/>
               </a:rPr>
               <a:pPr/>
-              <a:t>50</a:t>
+              <a:t>51</a:t>
             </a:fld>
             <a:endParaRPr lang="en-US" altLang="sk-SK" sz="1300">
               <a:latin typeface="Helvetica" pitchFamily="2" charset="0"/>
@@ -6721,7 +6197,7 @@
                 <a:latin typeface="Helvetica" pitchFamily="2" charset="0"/>
               </a:rPr>
               <a:pPr/>
-              <a:t>51</a:t>
+              <a:t>52</a:t>
             </a:fld>
             <a:endParaRPr lang="en-US" altLang="sk-SK" sz="1300">
               <a:latin typeface="Helvetica" pitchFamily="2" charset="0"/>
@@ -6983,7 +6459,7 @@
                 <a:latin typeface="Helvetica" pitchFamily="2" charset="0"/>
               </a:rPr>
               <a:pPr/>
-              <a:t>52</a:t>
+              <a:t>53</a:t>
             </a:fld>
             <a:endParaRPr lang="en-US" altLang="sk-SK" sz="1300">
               <a:latin typeface="Helvetica" pitchFamily="2" charset="0"/>
@@ -7245,7 +6721,7 @@
                 <a:latin typeface="Helvetica" pitchFamily="2" charset="0"/>
               </a:rPr>
               <a:pPr/>
-              <a:t>53</a:t>
+              <a:t>54</a:t>
             </a:fld>
             <a:endParaRPr lang="en-US" altLang="sk-SK" sz="1300">
               <a:latin typeface="Helvetica" pitchFamily="2" charset="0"/>
@@ -7769,7 +7245,7 @@
                 <a:latin typeface="Helvetica" pitchFamily="2" charset="0"/>
               </a:rPr>
               <a:pPr/>
-              <a:t>54</a:t>
+              <a:t>55</a:t>
             </a:fld>
             <a:endParaRPr lang="en-US" altLang="sk-SK" sz="1300">
               <a:latin typeface="Helvetica" pitchFamily="2" charset="0"/>
@@ -8031,7 +7507,7 @@
                 <a:latin typeface="Helvetica" pitchFamily="2" charset="0"/>
               </a:rPr>
               <a:pPr/>
-              <a:t>55</a:t>
+              <a:t>56</a:t>
             </a:fld>
             <a:endParaRPr lang="en-US" altLang="sk-SK" sz="1300">
               <a:latin typeface="Helvetica" pitchFamily="2" charset="0"/>
@@ -8293,7 +7769,7 @@
                 <a:latin typeface="Helvetica" pitchFamily="2" charset="0"/>
               </a:rPr>
               <a:pPr/>
-              <a:t>56</a:t>
+              <a:t>57</a:t>
             </a:fld>
             <a:endParaRPr lang="en-US" altLang="sk-SK" sz="1300">
               <a:latin typeface="Helvetica" pitchFamily="2" charset="0"/>
@@ -8555,7 +8031,7 @@
                 <a:latin typeface="Helvetica" pitchFamily="2" charset="0"/>
               </a:rPr>
               <a:pPr/>
-              <a:t>57</a:t>
+              <a:t>58</a:t>
             </a:fld>
             <a:endParaRPr lang="en-US" altLang="sk-SK" sz="1300">
               <a:latin typeface="Helvetica" pitchFamily="2" charset="0"/>
@@ -8817,7 +8293,7 @@
                 <a:latin typeface="Helvetica" pitchFamily="2" charset="0"/>
               </a:rPr>
               <a:pPr/>
-              <a:t>59</a:t>
+              <a:t>60</a:t>
             </a:fld>
             <a:endParaRPr lang="en-US" altLang="sk-SK" sz="1300">
               <a:latin typeface="Helvetica" pitchFamily="2" charset="0"/>
@@ -9079,7 +8555,7 @@
                 <a:latin typeface="Helvetica" pitchFamily="2" charset="0"/>
               </a:rPr>
               <a:pPr/>
-              <a:t>60</a:t>
+              <a:t>61</a:t>
             </a:fld>
             <a:endParaRPr lang="en-US" altLang="sk-SK" sz="1300">
               <a:latin typeface="Helvetica" pitchFamily="2" charset="0"/>
@@ -9341,7 +8817,7 @@
                 <a:latin typeface="Helvetica" pitchFamily="2" charset="0"/>
               </a:rPr>
               <a:pPr/>
-              <a:t>61</a:t>
+              <a:t>62</a:t>
             </a:fld>
             <a:endParaRPr lang="en-US" altLang="sk-SK" sz="1300">
               <a:latin typeface="Helvetica" pitchFamily="2" charset="0"/>
@@ -9603,7 +9079,7 @@
                 <a:latin typeface="Helvetica" pitchFamily="2" charset="0"/>
               </a:rPr>
               <a:pPr/>
-              <a:t>63</a:t>
+              <a:t>64</a:t>
             </a:fld>
             <a:endParaRPr lang="en-US" altLang="sk-SK" sz="1300">
               <a:latin typeface="Helvetica" pitchFamily="2" charset="0"/>
@@ -9865,7 +9341,7 @@
                 <a:latin typeface="Helvetica" pitchFamily="2" charset="0"/>
               </a:rPr>
               <a:pPr/>
-              <a:t>64</a:t>
+              <a:t>65</a:t>
             </a:fld>
             <a:endParaRPr lang="en-US" altLang="sk-SK" sz="1300">
               <a:latin typeface="Helvetica" pitchFamily="2" charset="0"/>
@@ -10127,7 +9603,7 @@
                 <a:latin typeface="Helvetica" pitchFamily="2" charset="0"/>
               </a:rPr>
               <a:pPr/>
-              <a:t>65</a:t>
+              <a:t>66</a:t>
             </a:fld>
             <a:endParaRPr lang="en-US" altLang="sk-SK" sz="1300">
               <a:latin typeface="Helvetica" pitchFamily="2" charset="0"/>
@@ -10651,7 +10127,7 @@
                 <a:latin typeface="Helvetica" pitchFamily="2" charset="0"/>
               </a:rPr>
               <a:pPr/>
-              <a:t>66</a:t>
+              <a:t>67</a:t>
             </a:fld>
             <a:endParaRPr lang="en-US" altLang="sk-SK" sz="1300">
               <a:latin typeface="Helvetica" pitchFamily="2" charset="0"/>
@@ -10913,7 +10389,7 @@
                 <a:latin typeface="Helvetica" pitchFamily="2" charset="0"/>
               </a:rPr>
               <a:pPr/>
-              <a:t>67</a:t>
+              <a:t>68</a:t>
             </a:fld>
             <a:endParaRPr lang="en-US" altLang="sk-SK" sz="1300">
               <a:latin typeface="Helvetica" pitchFamily="2" charset="0"/>
@@ -11175,7 +10651,7 @@
                 <a:latin typeface="Helvetica" pitchFamily="2" charset="0"/>
               </a:rPr>
               <a:pPr/>
-              <a:t>68</a:t>
+              <a:t>69</a:t>
             </a:fld>
             <a:endParaRPr lang="en-US" altLang="sk-SK" sz="1300">
               <a:latin typeface="Helvetica" pitchFamily="2" charset="0"/>
@@ -11437,7 +10913,7 @@
                 <a:latin typeface="Helvetica" pitchFamily="2" charset="0"/>
               </a:rPr>
               <a:pPr/>
-              <a:t>69</a:t>
+              <a:t>70</a:t>
             </a:fld>
             <a:endParaRPr lang="en-US" altLang="sk-SK" sz="1300">
               <a:latin typeface="Helvetica" pitchFamily="2" charset="0"/>
@@ -11699,7 +11175,7 @@
                 <a:latin typeface="Helvetica" pitchFamily="2" charset="0"/>
               </a:rPr>
               <a:pPr/>
-              <a:t>70</a:t>
+              <a:t>71</a:t>
             </a:fld>
             <a:endParaRPr lang="en-US" altLang="sk-SK" sz="1300">
               <a:latin typeface="Helvetica" pitchFamily="2" charset="0"/>
@@ -11855,7 +11331,7 @@
           <a:p>
             <a:fld id="{48712BB7-8B62-4D58-8B0D-DA00C2F7A4FF}" type="slidenum">
               <a:rPr lang="sk-SK" smtClean="0"/>
-              <a:t>71</a:t>
+              <a:t>72</a:t>
             </a:fld>
             <a:endParaRPr lang="sk-SK"/>
           </a:p>
@@ -13137,7 +12613,7 @@
           <a:p>
             <a:fld id="{D36E510E-7675-4B9B-B9C4-765C646DF757}" type="datetimeFigureOut">
               <a:rPr lang="sk-SK" smtClean="0"/>
-              <a:t>4.3.2025</a:t>
+              <a:t>13.7.2026</a:t>
             </a:fld>
             <a:endParaRPr lang="sk-SK"/>
           </a:p>
@@ -13307,7 +12783,7 @@
           <a:p>
             <a:fld id="{D36E510E-7675-4B9B-B9C4-765C646DF757}" type="datetimeFigureOut">
               <a:rPr lang="sk-SK" smtClean="0"/>
-              <a:t>4.3.2025</a:t>
+              <a:t>13.7.2026</a:t>
             </a:fld>
             <a:endParaRPr lang="sk-SK"/>
           </a:p>
@@ -13487,7 +12963,7 @@
           <a:p>
             <a:fld id="{D36E510E-7675-4B9B-B9C4-765C646DF757}" type="datetimeFigureOut">
               <a:rPr lang="sk-SK" smtClean="0"/>
-              <a:t>4.3.2025</a:t>
+              <a:t>13.7.2026</a:t>
             </a:fld>
             <a:endParaRPr lang="sk-SK"/>
           </a:p>
@@ -13697,7 +13173,7 @@
           <a:p>
             <a:fld id="{C7C737B8-2EB9-024F-97AA-6DEC142D7247}" type="datetimeFigureOut">
               <a:rPr lang="en-US" smtClean="0"/>
-              <a:t>3/4/25</a:t>
+              <a:t>7/13/26</a:t>
             </a:fld>
             <a:endParaRPr lang="en-US"/>
           </a:p>
@@ -13897,7 +13373,7 @@
           <a:p>
             <a:fld id="{C7C737B8-2EB9-024F-97AA-6DEC142D7247}" type="datetimeFigureOut">
               <a:rPr lang="en-US" smtClean="0"/>
-              <a:t>3/4/25</a:t>
+              <a:t>7/13/26</a:t>
             </a:fld>
             <a:endParaRPr lang="en-US"/>
           </a:p>
@@ -14173,7 +13649,7 @@
           <a:p>
             <a:fld id="{C7C737B8-2EB9-024F-97AA-6DEC142D7247}" type="datetimeFigureOut">
               <a:rPr lang="en-US" smtClean="0"/>
-              <a:t>3/4/25</a:t>
+              <a:t>7/13/26</a:t>
             </a:fld>
             <a:endParaRPr lang="en-US"/>
           </a:p>
@@ -14441,7 +13917,7 @@
           <a:p>
             <a:fld id="{C7C737B8-2EB9-024F-97AA-6DEC142D7247}" type="datetimeFigureOut">
               <a:rPr lang="en-US" smtClean="0"/>
-              <a:t>3/4/25</a:t>
+              <a:t>7/13/26</a:t>
             </a:fld>
             <a:endParaRPr lang="en-US"/>
           </a:p>
@@ -14856,7 +14332,7 @@
           <a:p>
             <a:fld id="{C7C737B8-2EB9-024F-97AA-6DEC142D7247}" type="datetimeFigureOut">
               <a:rPr lang="en-US" smtClean="0"/>
-              <a:t>3/4/25</a:t>
+              <a:t>7/13/26</a:t>
             </a:fld>
             <a:endParaRPr lang="en-US"/>
           </a:p>
@@ -14998,7 +14474,7 @@
           <a:p>
             <a:fld id="{C7C737B8-2EB9-024F-97AA-6DEC142D7247}" type="datetimeFigureOut">
               <a:rPr lang="en-US" smtClean="0"/>
-              <a:t>3/4/25</a:t>
+              <a:t>7/13/26</a:t>
             </a:fld>
             <a:endParaRPr lang="en-US"/>
           </a:p>
@@ -15111,7 +14587,7 @@
           <a:p>
             <a:fld id="{C7C737B8-2EB9-024F-97AA-6DEC142D7247}" type="datetimeFigureOut">
               <a:rPr lang="en-US" smtClean="0"/>
-              <a:t>3/4/25</a:t>
+              <a:t>7/13/26</a:t>
             </a:fld>
             <a:endParaRPr lang="en-US"/>
           </a:p>
@@ -15424,7 +14900,7 @@
           <a:p>
             <a:fld id="{C7C737B8-2EB9-024F-97AA-6DEC142D7247}" type="datetimeFigureOut">
               <a:rPr lang="en-US" smtClean="0"/>
-              <a:t>3/4/25</a:t>
+              <a:t>7/13/26</a:t>
             </a:fld>
             <a:endParaRPr lang="en-US"/>
           </a:p>
@@ -15606,7 +15082,7 @@
           <a:p>
             <a:fld id="{D36E510E-7675-4B9B-B9C4-765C646DF757}" type="datetimeFigureOut">
               <a:rPr lang="sk-SK" smtClean="0"/>
-              <a:t>4.3.2025</a:t>
+              <a:t>13.7.2026</a:t>
             </a:fld>
             <a:endParaRPr lang="sk-SK"/>
           </a:p>
@@ -15883,7 +15359,7 @@
           <a:p>
             <a:fld id="{C7C737B8-2EB9-024F-97AA-6DEC142D7247}" type="datetimeFigureOut">
               <a:rPr lang="en-US" smtClean="0"/>
-              <a:t>3/4/25</a:t>
+              <a:t>7/13/26</a:t>
             </a:fld>
             <a:endParaRPr lang="en-US"/>
           </a:p>
@@ -16083,7 +15559,7 @@
           <a:p>
             <a:fld id="{C7C737B8-2EB9-024F-97AA-6DEC142D7247}" type="datetimeFigureOut">
               <a:rPr lang="en-US" smtClean="0"/>
-              <a:t>3/4/25</a:t>
+              <a:t>7/13/26</a:t>
             </a:fld>
             <a:endParaRPr lang="en-US"/>
           </a:p>
@@ -16293,7 +15769,7 @@
           <a:p>
             <a:fld id="{C7C737B8-2EB9-024F-97AA-6DEC142D7247}" type="datetimeFigureOut">
               <a:rPr lang="en-US" smtClean="0"/>
-              <a:t>3/4/25</a:t>
+              <a:t>7/13/26</a:t>
             </a:fld>
             <a:endParaRPr lang="en-US"/>
           </a:p>
@@ -16551,7 +16027,7 @@
           <a:p>
             <a:fld id="{D36E510E-7675-4B9B-B9C4-765C646DF757}" type="datetimeFigureOut">
               <a:rPr lang="sk-SK" smtClean="0"/>
-              <a:t>4.3.2025</a:t>
+              <a:t>13.7.2026</a:t>
             </a:fld>
             <a:endParaRPr lang="sk-SK"/>
           </a:p>
@@ -16783,7 +16259,7 @@
           <a:p>
             <a:fld id="{D36E510E-7675-4B9B-B9C4-765C646DF757}" type="datetimeFigureOut">
               <a:rPr lang="sk-SK" smtClean="0"/>
-              <a:t>4.3.2025</a:t>
+              <a:t>13.7.2026</a:t>
             </a:fld>
             <a:endParaRPr lang="sk-SK"/>
           </a:p>
@@ -17150,7 +16626,7 @@
           <a:p>
             <a:fld id="{D36E510E-7675-4B9B-B9C4-765C646DF757}" type="datetimeFigureOut">
               <a:rPr lang="sk-SK" smtClean="0"/>
-              <a:t>4.3.2025</a:t>
+              <a:t>13.7.2026</a:t>
             </a:fld>
             <a:endParaRPr lang="sk-SK"/>
           </a:p>
@@ -17268,7 +16744,7 @@
           <a:p>
             <a:fld id="{D36E510E-7675-4B9B-B9C4-765C646DF757}" type="datetimeFigureOut">
               <a:rPr lang="sk-SK" smtClean="0"/>
-              <a:t>4.3.2025</a:t>
+              <a:t>13.7.2026</a:t>
             </a:fld>
             <a:endParaRPr lang="sk-SK"/>
           </a:p>
@@ -17363,7 +16839,7 @@
           <a:p>
             <a:fld id="{D36E510E-7675-4B9B-B9C4-765C646DF757}" type="datetimeFigureOut">
               <a:rPr lang="sk-SK" smtClean="0"/>
-              <a:t>4.3.2025</a:t>
+              <a:t>13.7.2026</a:t>
             </a:fld>
             <a:endParaRPr lang="sk-SK"/>
           </a:p>
@@ -17640,7 +17116,7 @@
           <a:p>
             <a:fld id="{D36E510E-7675-4B9B-B9C4-765C646DF757}" type="datetimeFigureOut">
               <a:rPr lang="sk-SK" smtClean="0"/>
-              <a:t>4.3.2025</a:t>
+              <a:t>13.7.2026</a:t>
             </a:fld>
             <a:endParaRPr lang="sk-SK"/>
           </a:p>
@@ -17893,7 +17369,7 @@
           <a:p>
             <a:fld id="{D36E510E-7675-4B9B-B9C4-765C646DF757}" type="datetimeFigureOut">
               <a:rPr lang="sk-SK" smtClean="0"/>
-              <a:t>4.3.2025</a:t>
+              <a:t>13.7.2026</a:t>
             </a:fld>
             <a:endParaRPr lang="sk-SK"/>
           </a:p>
@@ -18106,7 +17582,7 @@
           <a:p>
             <a:fld id="{D36E510E-7675-4B9B-B9C4-765C646DF757}" type="datetimeFigureOut">
               <a:rPr lang="sk-SK" smtClean="0"/>
-              <a:t>4.3.2025</a:t>
+              <a:t>13.7.2026</a:t>
             </a:fld>
             <a:endParaRPr lang="sk-SK"/>
           </a:p>
@@ -18664,7 +18140,7 @@
           <a:p>
             <a:fld id="{C7C737B8-2EB9-024F-97AA-6DEC142D7247}" type="datetimeFigureOut">
               <a:rPr lang="en-US" smtClean="0"/>
-              <a:t>3/4/25</a:t>
+              <a:t>7/13/26</a:t>
             </a:fld>
             <a:endParaRPr lang="en-US"/>
           </a:p>
@@ -21873,230 +21349,40 @@
       </p:sp>
       <p:pic>
         <p:nvPicPr>
-          <p:cNvPr id="26628" name="Picture 4" descr="7_5"/>
+          <p:cNvPr id="8" name="Grafický objekt 7">
+            <a:extLst>
+              <a:ext uri="{FF2B5EF4-FFF2-40B4-BE49-F238E27FC236}">
+                <a16:creationId xmlns:a16="http://schemas.microsoft.com/office/drawing/2014/main" id="{99740C17-ECF9-8692-A78A-84BD24638FAC}"/>
+              </a:ext>
+            </a:extLst>
+          </p:cNvPr>
           <p:cNvPicPr>
-            <a:picLocks noChangeAspect="1" noChangeArrowheads="1"/>
+            <a:picLocks noChangeAspect="1"/>
           </p:cNvPicPr>
           <p:nvPr/>
         </p:nvPicPr>
         <p:blipFill>
-          <a:blip r:embed="rId2">
+          <a:blip>
             <a:extLst>
-              <a:ext uri="{BEBA8EAE-BF5A-486C-A8C5-ECC9F3942E4B}">
-                <a14:imgProps xmlns:a14="http://schemas.microsoft.com/office/drawing/2010/main">
-                  <a14:imgLayer r:embed="rId3">
-                    <a14:imgEffect>
-                      <a14:brightnessContrast bright="20000" contrast="-40000"/>
-                    </a14:imgEffect>
-                  </a14:imgLayer>
-                </a14:imgProps>
-              </a:ext>
-              <a:ext uri="{28A0092B-C50C-407E-A947-70E740481C1C}">
-                <a14:useLocalDpi xmlns:a14="http://schemas.microsoft.com/office/drawing/2010/main" val="0"/>
+              <a:ext uri="{96DAC541-7B7A-43D3-8B79-37D633B846F1}">
+                <asvg:svgBlip xmlns:asvg="http://schemas.microsoft.com/office/drawing/2016/SVG/main" r:embed="rId2"/>
               </a:ext>
             </a:extLst>
           </a:blip>
-          <a:srcRect/>
           <a:stretch>
             <a:fillRect/>
           </a:stretch>
         </p:blipFill>
-        <p:spPr bwMode="auto">
-          <a:xfrm>
-            <a:off x="2438400" y="1464469"/>
-            <a:ext cx="7315200" cy="5118100"/>
-          </a:xfrm>
-          <a:prstGeom prst="rect">
-            <a:avLst/>
-          </a:prstGeom>
-          <a:noFill/>
-          <a:ln>
-            <a:noFill/>
-          </a:ln>
-          <a:extLst>
-            <a:ext uri="{909E8E84-426E-40DD-AFC4-6F175D3DCCD1}">
-              <a14:hiddenFill xmlns:a14="http://schemas.microsoft.com/office/drawing/2010/main">
-                <a:solidFill>
-                  <a:srgbClr val="FFFFFF"/>
-                </a:solidFill>
-              </a14:hiddenFill>
-            </a:ext>
-            <a:ext uri="{91240B29-F687-4F45-9708-019B960494DF}">
-              <a14:hiddenLine xmlns:a14="http://schemas.microsoft.com/office/drawing/2010/main" w="9525">
-                <a:solidFill>
-                  <a:srgbClr val="000000"/>
-                </a:solidFill>
-                <a:miter lim="800000"/>
-                <a:headEnd/>
-                <a:tailEnd/>
-              </a14:hiddenLine>
-            </a:ext>
-          </a:extLst>
-        </p:spPr>
-      </p:pic>
-      <p:sp>
-        <p:nvSpPr>
-          <p:cNvPr id="2" name="Obdĺžnik 1"/>
-          <p:cNvSpPr/>
-          <p:nvPr/>
-        </p:nvSpPr>
         <p:spPr>
           <a:xfrm>
-            <a:off x="10221686" y="3437164"/>
-            <a:ext cx="1232807" cy="644979"/>
+            <a:off x="190500" y="1904999"/>
+            <a:ext cx="12058396" cy="3111843"/>
           </a:xfrm>
           <a:prstGeom prst="rect">
             <a:avLst/>
           </a:prstGeom>
         </p:spPr>
-        <p:style>
-          <a:lnRef idx="2">
-            <a:schemeClr val="accent1">
-              <a:shade val="50000"/>
-            </a:schemeClr>
-          </a:lnRef>
-          <a:fillRef idx="1">
-            <a:schemeClr val="accent1"/>
-          </a:fillRef>
-          <a:effectRef idx="0">
-            <a:schemeClr val="accent1"/>
-          </a:effectRef>
-          <a:fontRef idx="minor">
-            <a:schemeClr val="lt1"/>
-          </a:fontRef>
-        </p:style>
-        <p:txBody>
-          <a:bodyPr rtlCol="0" anchor="ctr"/>
-          <a:lstStyle/>
-          <a:p>
-            <a:pPr algn="ctr"/>
-            <a:r>
-              <a:rPr lang="sk-SK" dirty="0"/>
-              <a:t>DISK</a:t>
-            </a:r>
-          </a:p>
-        </p:txBody>
-      </p:sp>
-      <p:sp>
-        <p:nvSpPr>
-          <p:cNvPr id="3" name="Ovál 2"/>
-          <p:cNvSpPr/>
-          <p:nvPr/>
-        </p:nvSpPr>
-        <p:spPr>
-          <a:xfrm>
-            <a:off x="10221686" y="3331030"/>
-            <a:ext cx="1232807" cy="151854"/>
-          </a:xfrm>
-          <a:prstGeom prst="ellipse">
-            <a:avLst/>
-          </a:prstGeom>
-        </p:spPr>
-        <p:style>
-          <a:lnRef idx="2">
-            <a:schemeClr val="accent1">
-              <a:shade val="50000"/>
-            </a:schemeClr>
-          </a:lnRef>
-          <a:fillRef idx="1">
-            <a:schemeClr val="accent1"/>
-          </a:fillRef>
-          <a:effectRef idx="0">
-            <a:schemeClr val="accent1"/>
-          </a:effectRef>
-          <a:fontRef idx="minor">
-            <a:schemeClr val="lt1"/>
-          </a:fontRef>
-        </p:style>
-        <p:txBody>
-          <a:bodyPr rtlCol="0" anchor="ctr"/>
-          <a:lstStyle/>
-          <a:p>
-            <a:pPr algn="ctr"/>
-            <a:endParaRPr lang="sk-SK"/>
-          </a:p>
-        </p:txBody>
-      </p:sp>
-      <p:sp>
-        <p:nvSpPr>
-          <p:cNvPr id="7" name="Ovál 6"/>
-          <p:cNvSpPr/>
-          <p:nvPr/>
-        </p:nvSpPr>
-        <p:spPr>
-          <a:xfrm>
-            <a:off x="10221685" y="4006216"/>
-            <a:ext cx="1232807" cy="151854"/>
-          </a:xfrm>
-          <a:prstGeom prst="ellipse">
-            <a:avLst/>
-          </a:prstGeom>
-        </p:spPr>
-        <p:style>
-          <a:lnRef idx="2">
-            <a:schemeClr val="accent1">
-              <a:shade val="50000"/>
-            </a:schemeClr>
-          </a:lnRef>
-          <a:fillRef idx="1">
-            <a:schemeClr val="accent1"/>
-          </a:fillRef>
-          <a:effectRef idx="0">
-            <a:schemeClr val="accent1"/>
-          </a:effectRef>
-          <a:fontRef idx="minor">
-            <a:schemeClr val="lt1"/>
-          </a:fontRef>
-        </p:style>
-        <p:txBody>
-          <a:bodyPr rtlCol="0" anchor="ctr"/>
-          <a:lstStyle/>
-          <a:p>
-            <a:pPr algn="ctr"/>
-            <a:endParaRPr lang="sk-SK"/>
-          </a:p>
-        </p:txBody>
-      </p:sp>
-      <p:sp>
-        <p:nvSpPr>
-          <p:cNvPr id="4" name="Šípka doprava 3"/>
-          <p:cNvSpPr/>
-          <p:nvPr/>
-        </p:nvSpPr>
-        <p:spPr>
-          <a:xfrm>
-            <a:off x="9560379" y="3657600"/>
-            <a:ext cx="587828" cy="261257"/>
-          </a:xfrm>
-          <a:prstGeom prst="rightArrow">
-            <a:avLst/>
-          </a:prstGeom>
-        </p:spPr>
-        <p:style>
-          <a:lnRef idx="2">
-            <a:schemeClr val="accent1">
-              <a:shade val="50000"/>
-            </a:schemeClr>
-          </a:lnRef>
-          <a:fillRef idx="1">
-            <a:schemeClr val="accent1"/>
-          </a:fillRef>
-          <a:effectRef idx="0">
-            <a:schemeClr val="accent1"/>
-          </a:effectRef>
-          <a:fontRef idx="minor">
-            <a:schemeClr val="lt1"/>
-          </a:fontRef>
-        </p:style>
-        <p:txBody>
-          <a:bodyPr rtlCol="0" anchor="ctr"/>
-          <a:lstStyle/>
-          <a:p>
-            <a:pPr algn="ctr"/>
-            <a:endParaRPr lang="sk-SK"/>
-          </a:p>
-        </p:txBody>
-      </p:sp>
+      </p:pic>
     </p:spTree>
     <p:extLst>
       <p:ext uri="{BB962C8B-B14F-4D97-AF65-F5344CB8AC3E}">
@@ -22714,9 +22000,15 @@
       </p:grpSpPr>
       <p:sp>
         <p:nvSpPr>
-          <p:cNvPr id="30723" name="Rectangle 2"/>
+          <p:cNvPr id="19" name="Nadpis 18">
+            <a:extLst>
+              <a:ext uri="{FF2B5EF4-FFF2-40B4-BE49-F238E27FC236}">
+                <a16:creationId xmlns:a16="http://schemas.microsoft.com/office/drawing/2014/main" id="{625777FF-E442-FFB6-7F7A-A093EFCE7F60}"/>
+              </a:ext>
+            </a:extLst>
+          </p:cNvPr>
           <p:cNvSpPr>
-            <a:spLocks noGrp="1" noChangeArrowheads="1"/>
+            <a:spLocks noGrp="1"/>
           </p:cNvSpPr>
           <p:nvPr>
             <p:ph type="title"/>
@@ -22729,7 +22021,7 @@
           <a:p>
             <a:r>
               <a:rPr lang="sk-SK" dirty="0"/>
-              <a:t>Prekrývanie segmentov – stromová štruktúra</a:t>
+              <a:t>Architektúra prekrývania segmentov</a:t>
             </a:r>
           </a:p>
         </p:txBody>
@@ -22855,331 +22147,42 @@
           </a:p>
         </p:txBody>
       </p:sp>
-      <p:sp>
-        <p:nvSpPr>
-          <p:cNvPr id="2" name="BlokTextu 1"/>
-          <p:cNvSpPr txBox="1"/>
+      <p:pic>
+        <p:nvPicPr>
+          <p:cNvPr id="15" name="Grafický objekt 14">
+            <a:extLst>
+              <a:ext uri="{FF2B5EF4-FFF2-40B4-BE49-F238E27FC236}">
+                <a16:creationId xmlns:a16="http://schemas.microsoft.com/office/drawing/2014/main" id="{66C1EEE2-035C-D9CC-C03A-5F3FD2F9FA2E}"/>
+              </a:ext>
+            </a:extLst>
+          </p:cNvPr>
+          <p:cNvPicPr>
+            <a:picLocks noChangeAspect="1"/>
+          </p:cNvPicPr>
           <p:nvPr/>
-        </p:nvSpPr>
+        </p:nvPicPr>
+        <p:blipFill>
+          <a:blip>
+            <a:extLst>
+              <a:ext uri="{96DAC541-7B7A-43D3-8B79-37D633B846F1}">
+                <asvg:svgBlip xmlns:asvg="http://schemas.microsoft.com/office/drawing/2016/SVG/main" r:embed="rId2"/>
+              </a:ext>
+            </a:extLst>
+          </a:blip>
+          <a:stretch>
+            <a:fillRect/>
+          </a:stretch>
+        </p:blipFill>
         <p:spPr>
           <a:xfrm>
-            <a:off x="10050236" y="3045279"/>
-            <a:ext cx="1666867" cy="369332"/>
+            <a:off x="638735" y="1294887"/>
+            <a:ext cx="10914530" cy="5457265"/>
           </a:xfrm>
           <a:prstGeom prst="rect">
             <a:avLst/>
           </a:prstGeom>
-          <a:noFill/>
         </p:spPr>
-        <p:txBody>
-          <a:bodyPr wrap="none" rtlCol="0">
-            <a:spAutoFit/>
-          </a:bodyPr>
-          <a:lstStyle/>
-          <a:p>
-            <a:r>
-              <a:rPr lang="sk-SK" dirty="0"/>
-              <a:t>Hlavný program</a:t>
-            </a:r>
-          </a:p>
-        </p:txBody>
-      </p:sp>
-      <p:sp>
-        <p:nvSpPr>
-          <p:cNvPr id="3" name="BlokTextu 2"/>
-          <p:cNvSpPr txBox="1"/>
-          <p:nvPr/>
-        </p:nvSpPr>
-        <p:spPr>
-          <a:xfrm>
-            <a:off x="4555671" y="5796643"/>
-            <a:ext cx="4995278" cy="369332"/>
-          </a:xfrm>
-          <a:prstGeom prst="rect">
-            <a:avLst/>
-          </a:prstGeom>
-          <a:noFill/>
-        </p:spPr>
-        <p:txBody>
-          <a:bodyPr wrap="none" rtlCol="0">
-            <a:spAutoFit/>
-          </a:bodyPr>
-          <a:lstStyle/>
-          <a:p>
-            <a:r>
-              <a:rPr lang="sk-SK" dirty="0"/>
-              <a:t>t1		t2	      t3		t4</a:t>
-            </a:r>
-          </a:p>
-        </p:txBody>
-      </p:sp>
-      <p:grpSp>
-        <p:nvGrpSpPr>
-          <p:cNvPr id="8" name="Skupina 7">
-            <a:extLst>
-              <a:ext uri="{FF2B5EF4-FFF2-40B4-BE49-F238E27FC236}">
-                <a16:creationId xmlns:a16="http://schemas.microsoft.com/office/drawing/2014/main" id="{95E98811-D566-E88C-70CB-5CBB583D0C39}"/>
-              </a:ext>
-            </a:extLst>
-          </p:cNvPr>
-          <p:cNvGrpSpPr/>
-          <p:nvPr/>
-        </p:nvGrpSpPr>
-        <p:grpSpPr>
-          <a:xfrm>
-            <a:off x="2057400" y="1273175"/>
-            <a:ext cx="7992836" cy="5584825"/>
-            <a:chOff x="2057400" y="1273175"/>
-            <a:chExt cx="7992836" cy="5584825"/>
-          </a:xfrm>
-        </p:grpSpPr>
-        <p:grpSp>
-          <p:nvGrpSpPr>
-            <p:cNvPr id="6" name="Skupina 5">
-              <a:extLst>
-                <a:ext uri="{FF2B5EF4-FFF2-40B4-BE49-F238E27FC236}">
-                  <a16:creationId xmlns:a16="http://schemas.microsoft.com/office/drawing/2014/main" id="{43315C03-972A-FD70-D300-3BFDB1906918}"/>
-                </a:ext>
-              </a:extLst>
-            </p:cNvPr>
-            <p:cNvGrpSpPr/>
-            <p:nvPr/>
-          </p:nvGrpSpPr>
-          <p:grpSpPr>
-            <a:xfrm>
-              <a:off x="2057400" y="1273175"/>
-              <a:ext cx="7924800" cy="5584825"/>
-              <a:chOff x="2057400" y="1273175"/>
-              <a:chExt cx="7924800" cy="5584825"/>
-            </a:xfrm>
-          </p:grpSpPr>
-          <p:pic>
-            <p:nvPicPr>
-              <p:cNvPr id="30724" name="Picture 4" descr="7_9"/>
-              <p:cNvPicPr>
-                <a:picLocks noChangeAspect="1" noChangeArrowheads="1"/>
-              </p:cNvPicPr>
-              <p:nvPr/>
-            </p:nvPicPr>
-            <p:blipFill>
-              <a:blip r:embed="rId2">
-                <a:extLst>
-                  <a:ext uri="{BEBA8EAE-BF5A-486C-A8C5-ECC9F3942E4B}">
-                    <a14:imgProps xmlns:a14="http://schemas.microsoft.com/office/drawing/2010/main">
-                      <a14:imgLayer r:embed="rId3">
-                        <a14:imgEffect>
-                          <a14:brightnessContrast bright="20000" contrast="40000"/>
-                        </a14:imgEffect>
-                      </a14:imgLayer>
-                    </a14:imgProps>
-                  </a:ext>
-                  <a:ext uri="{28A0092B-C50C-407E-A947-70E740481C1C}">
-                    <a14:useLocalDpi xmlns:a14="http://schemas.microsoft.com/office/drawing/2010/main" val="0"/>
-                  </a:ext>
-                </a:extLst>
-              </a:blip>
-              <a:srcRect/>
-              <a:stretch>
-                <a:fillRect/>
-              </a:stretch>
-            </p:blipFill>
-            <p:spPr bwMode="auto">
-              <a:xfrm>
-                <a:off x="2057400" y="1273175"/>
-                <a:ext cx="7924800" cy="5584825"/>
-              </a:xfrm>
-              <a:prstGeom prst="rect">
-                <a:avLst/>
-              </a:prstGeom>
-              <a:noFill/>
-              <a:ln>
-                <a:noFill/>
-              </a:ln>
-              <a:extLst>
-                <a:ext uri="{909E8E84-426E-40DD-AFC4-6F175D3DCCD1}">
-                  <a14:hiddenFill xmlns:a14="http://schemas.microsoft.com/office/drawing/2010/main">
-                    <a:solidFill>
-                      <a:srgbClr val="FFFFFF"/>
-                    </a:solidFill>
-                  </a14:hiddenFill>
-                </a:ext>
-                <a:ext uri="{91240B29-F687-4F45-9708-019B960494DF}">
-                  <a14:hiddenLine xmlns:a14="http://schemas.microsoft.com/office/drawing/2010/main" w="9525">
-                    <a:solidFill>
-                      <a:srgbClr val="000000"/>
-                    </a:solidFill>
-                    <a:miter lim="800000"/>
-                    <a:headEnd/>
-                    <a:tailEnd/>
-                  </a14:hiddenLine>
-                </a:ext>
-              </a:extLst>
-            </p:spPr>
-          </p:pic>
-          <p:sp>
-            <p:nvSpPr>
-              <p:cNvPr id="4" name="Pravouholník 3">
-                <a:extLst>
-                  <a:ext uri="{FF2B5EF4-FFF2-40B4-BE49-F238E27FC236}">
-                    <a16:creationId xmlns:a16="http://schemas.microsoft.com/office/drawing/2014/main" id="{69426FE0-6C5B-9076-01C9-79AE31763926}"/>
-                  </a:ext>
-                </a:extLst>
-              </p:cNvPr>
-              <p:cNvSpPr/>
-              <p:nvPr/>
-            </p:nvSpPr>
-            <p:spPr>
-              <a:xfrm>
-                <a:off x="3152078" y="5796643"/>
-                <a:ext cx="520390" cy="425737"/>
-              </a:xfrm>
-              <a:prstGeom prst="rect">
-                <a:avLst/>
-              </a:prstGeom>
-              <a:solidFill>
-                <a:schemeClr val="bg1"/>
-              </a:solidFill>
-              <a:ln>
-                <a:solidFill>
-                  <a:schemeClr val="bg1"/>
-                </a:solidFill>
-              </a:ln>
-            </p:spPr>
-            <p:style>
-              <a:lnRef idx="2">
-                <a:schemeClr val="accent1">
-                  <a:shade val="15000"/>
-                </a:schemeClr>
-              </a:lnRef>
-              <a:fillRef idx="1">
-                <a:schemeClr val="accent1"/>
-              </a:fillRef>
-              <a:effectRef idx="0">
-                <a:schemeClr val="accent1"/>
-              </a:effectRef>
-              <a:fontRef idx="minor">
-                <a:schemeClr val="lt1"/>
-              </a:fontRef>
-            </p:style>
-            <p:txBody>
-              <a:bodyPr rtlCol="0" anchor="ctr"/>
-              <a:lstStyle/>
-              <a:p>
-                <a:pPr algn="ctr"/>
-                <a:endParaRPr lang="sk-SK"/>
-              </a:p>
-            </p:txBody>
-          </p:sp>
-          <p:sp>
-            <p:nvSpPr>
-              <p:cNvPr id="5" name="Pravouholník 4">
-                <a:extLst>
-                  <a:ext uri="{FF2B5EF4-FFF2-40B4-BE49-F238E27FC236}">
-                    <a16:creationId xmlns:a16="http://schemas.microsoft.com/office/drawing/2014/main" id="{059D1881-0E26-71C7-FE8C-C630E732F40C}"/>
-                  </a:ext>
-                </a:extLst>
-              </p:cNvPr>
-              <p:cNvSpPr/>
-              <p:nvPr/>
-            </p:nvSpPr>
-            <p:spPr>
-              <a:xfrm>
-                <a:off x="7162800" y="5740238"/>
-                <a:ext cx="520390" cy="425737"/>
-              </a:xfrm>
-              <a:prstGeom prst="rect">
-                <a:avLst/>
-              </a:prstGeom>
-              <a:solidFill>
-                <a:schemeClr val="bg1"/>
-              </a:solidFill>
-              <a:ln>
-                <a:solidFill>
-                  <a:schemeClr val="bg1"/>
-                </a:solidFill>
-              </a:ln>
-            </p:spPr>
-            <p:style>
-              <a:lnRef idx="2">
-                <a:schemeClr val="accent1">
-                  <a:shade val="15000"/>
-                </a:schemeClr>
-              </a:lnRef>
-              <a:fillRef idx="1">
-                <a:schemeClr val="accent1"/>
-              </a:fillRef>
-              <a:effectRef idx="0">
-                <a:schemeClr val="accent1"/>
-              </a:effectRef>
-              <a:fontRef idx="minor">
-                <a:schemeClr val="lt1"/>
-              </a:fontRef>
-            </p:style>
-            <p:txBody>
-              <a:bodyPr rtlCol="0" anchor="ctr"/>
-              <a:lstStyle/>
-              <a:p>
-                <a:pPr algn="ctr"/>
-                <a:endParaRPr lang="sk-SK"/>
-              </a:p>
-            </p:txBody>
-          </p:sp>
-        </p:grpSp>
-        <p:sp>
-          <p:nvSpPr>
-            <p:cNvPr id="7" name="Pravouholník 6">
-              <a:extLst>
-                <a:ext uri="{FF2B5EF4-FFF2-40B4-BE49-F238E27FC236}">
-                  <a16:creationId xmlns:a16="http://schemas.microsoft.com/office/drawing/2014/main" id="{4958B642-3787-DE69-B7C4-259DB1BBE021}"/>
-                </a:ext>
-              </a:extLst>
-            </p:cNvPr>
-            <p:cNvSpPr/>
-            <p:nvPr/>
-          </p:nvSpPr>
-          <p:spPr>
-            <a:xfrm>
-              <a:off x="2512741" y="6356350"/>
-              <a:ext cx="7537495" cy="501650"/>
-            </a:xfrm>
-            <a:prstGeom prst="rect">
-              <a:avLst/>
-            </a:prstGeom>
-            <a:solidFill>
-              <a:schemeClr val="bg1"/>
-            </a:solidFill>
-            <a:ln>
-              <a:solidFill>
-                <a:schemeClr val="bg1"/>
-              </a:solidFill>
-            </a:ln>
-          </p:spPr>
-          <p:style>
-            <a:lnRef idx="2">
-              <a:schemeClr val="accent1">
-                <a:shade val="15000"/>
-              </a:schemeClr>
-            </a:lnRef>
-            <a:fillRef idx="1">
-              <a:schemeClr val="accent1"/>
-            </a:fillRef>
-            <a:effectRef idx="0">
-              <a:schemeClr val="accent1"/>
-            </a:effectRef>
-            <a:fontRef idx="minor">
-              <a:schemeClr val="lt1"/>
-            </a:fontRef>
-          </p:style>
-          <p:txBody>
-            <a:bodyPr rtlCol="0" anchor="ctr"/>
-            <a:lstStyle/>
-            <a:p>
-              <a:pPr algn="ctr"/>
-              <a:endParaRPr lang="sk-SK"/>
-            </a:p>
-          </p:txBody>
-        </p:sp>
-      </p:grpSp>
+      </p:pic>
     </p:spTree>
     <p:extLst>
       <p:ext uri="{BB962C8B-B14F-4D97-AF65-F5344CB8AC3E}">
@@ -23212,9 +22215,15 @@
       </p:grpSpPr>
       <p:sp>
         <p:nvSpPr>
-          <p:cNvPr id="31747" name="Rectangle 2"/>
+          <p:cNvPr id="4" name="Nadpis 3">
+            <a:extLst>
+              <a:ext uri="{FF2B5EF4-FFF2-40B4-BE49-F238E27FC236}">
+                <a16:creationId xmlns:a16="http://schemas.microsoft.com/office/drawing/2014/main" id="{C73A33F2-8C5F-0159-EA54-F147A714F85F}"/>
+              </a:ext>
+            </a:extLst>
+          </p:cNvPr>
           <p:cNvSpPr>
-            <a:spLocks noGrp="1" noChangeArrowheads="1"/>
+            <a:spLocks noGrp="1"/>
           </p:cNvSpPr>
           <p:nvPr>
             <p:ph type="title"/>
@@ -23227,303 +22236,68 @@
           <a:p>
             <a:r>
               <a:rPr lang="sk-SK" dirty="0"/>
-              <a:t>Prekrývanie segmentov – zónová štruktúra</a:t>
+              <a:t>Architektúra prekrývania segmentov</a:t>
             </a:r>
           </a:p>
         </p:txBody>
       </p:sp>
       <p:sp>
         <p:nvSpPr>
-          <p:cNvPr id="31746" name="Zástupný symbol čísla snímky 5"/>
+          <p:cNvPr id="5" name="Zástupný objekt pre obsah 4">
+            <a:extLst>
+              <a:ext uri="{FF2B5EF4-FFF2-40B4-BE49-F238E27FC236}">
+                <a16:creationId xmlns:a16="http://schemas.microsoft.com/office/drawing/2014/main" id="{D663A0C5-C5FD-5904-7895-457068B1A889}"/>
+              </a:ext>
+            </a:extLst>
+          </p:cNvPr>
           <p:cNvSpPr>
             <a:spLocks noGrp="1"/>
           </p:cNvSpPr>
           <p:nvPr>
-            <p:ph type="sldNum" sz="quarter" idx="12"/>
+            <p:ph idx="1"/>
           </p:nvPr>
         </p:nvSpPr>
         <p:spPr/>
         <p:txBody>
           <a:bodyPr/>
-          <a:lstStyle>
-            <a:lvl1pPr>
-              <a:defRPr sz="2400">
-                <a:solidFill>
-                  <a:schemeClr val="tx1"/>
-                </a:solidFill>
-                <a:latin typeface="Times New Roman" panose="02020603050405020304" pitchFamily="18" charset="0"/>
-              </a:defRPr>
-            </a:lvl1pPr>
-            <a:lvl2pPr marL="742950" indent="-285750">
-              <a:defRPr sz="2400">
-                <a:solidFill>
-                  <a:schemeClr val="tx1"/>
-                </a:solidFill>
-                <a:latin typeface="Times New Roman" panose="02020603050405020304" pitchFamily="18" charset="0"/>
-              </a:defRPr>
-            </a:lvl2pPr>
-            <a:lvl3pPr marL="1143000" indent="-228600">
-              <a:defRPr sz="2400">
-                <a:solidFill>
-                  <a:schemeClr val="tx1"/>
-                </a:solidFill>
-                <a:latin typeface="Times New Roman" panose="02020603050405020304" pitchFamily="18" charset="0"/>
-              </a:defRPr>
-            </a:lvl3pPr>
-            <a:lvl4pPr marL="1600200" indent="-228600">
-              <a:defRPr sz="2400">
-                <a:solidFill>
-                  <a:schemeClr val="tx1"/>
-                </a:solidFill>
-                <a:latin typeface="Times New Roman" panose="02020603050405020304" pitchFamily="18" charset="0"/>
-              </a:defRPr>
-            </a:lvl4pPr>
-            <a:lvl5pPr marL="2057400" indent="-228600">
-              <a:defRPr sz="2400">
-                <a:solidFill>
-                  <a:schemeClr val="tx1"/>
-                </a:solidFill>
-                <a:latin typeface="Times New Roman" panose="02020603050405020304" pitchFamily="18" charset="0"/>
-              </a:defRPr>
-            </a:lvl5pPr>
-            <a:lvl6pPr marL="2514600" indent="-228600" eaLnBrk="0" fontAlgn="base" hangingPunct="0">
-              <a:spcBef>
-                <a:spcPct val="0"/>
-              </a:spcBef>
-              <a:spcAft>
-                <a:spcPct val="0"/>
-              </a:spcAft>
-              <a:defRPr sz="2400">
-                <a:solidFill>
-                  <a:schemeClr val="tx1"/>
-                </a:solidFill>
-                <a:latin typeface="Times New Roman" panose="02020603050405020304" pitchFamily="18" charset="0"/>
-              </a:defRPr>
-            </a:lvl6pPr>
-            <a:lvl7pPr marL="2971800" indent="-228600" eaLnBrk="0" fontAlgn="base" hangingPunct="0">
-              <a:spcBef>
-                <a:spcPct val="0"/>
-              </a:spcBef>
-              <a:spcAft>
-                <a:spcPct val="0"/>
-              </a:spcAft>
-              <a:defRPr sz="2400">
-                <a:solidFill>
-                  <a:schemeClr val="tx1"/>
-                </a:solidFill>
-                <a:latin typeface="Times New Roman" panose="02020603050405020304" pitchFamily="18" charset="0"/>
-              </a:defRPr>
-            </a:lvl7pPr>
-            <a:lvl8pPr marL="3429000" indent="-228600" eaLnBrk="0" fontAlgn="base" hangingPunct="0">
-              <a:spcBef>
-                <a:spcPct val="0"/>
-              </a:spcBef>
-              <a:spcAft>
-                <a:spcPct val="0"/>
-              </a:spcAft>
-              <a:defRPr sz="2400">
-                <a:solidFill>
-                  <a:schemeClr val="tx1"/>
-                </a:solidFill>
-                <a:latin typeface="Times New Roman" panose="02020603050405020304" pitchFamily="18" charset="0"/>
-              </a:defRPr>
-            </a:lvl8pPr>
-            <a:lvl9pPr marL="3886200" indent="-228600" eaLnBrk="0" fontAlgn="base" hangingPunct="0">
-              <a:spcBef>
-                <a:spcPct val="0"/>
-              </a:spcBef>
-              <a:spcAft>
-                <a:spcPct val="0"/>
-              </a:spcAft>
-              <a:defRPr sz="2400">
-                <a:solidFill>
-                  <a:schemeClr val="tx1"/>
-                </a:solidFill>
-                <a:latin typeface="Times New Roman" panose="02020603050405020304" pitchFamily="18" charset="0"/>
-              </a:defRPr>
-            </a:lvl9pPr>
-          </a:lstStyle>
-          <a:p>
-            <a:fld id="{545CD529-738F-422F-A9A3-79CC99777AFB}" type="slidenum">
-              <a:rPr lang="sk-SK" smtClean="0"/>
-              <a:pPr/>
-              <a:t>24</a:t>
-            </a:fld>
-            <a:endParaRPr lang="sk-SK"/>
+          <a:lstStyle/>
+          <a:p>
+            <a:r>
+              <a:rPr lang="sk-SK" dirty="0"/>
+              <a:t>Ľavý panel ukazuje stromovú štruktúru volaní: ROOT volá buď A alebo D, A volá buď B alebo C, D volá buď </a:t>
+            </a:r>
+            <a:r>
+              <a:rPr lang="sk-SK" dirty="0" err="1"/>
+              <a:t>E</a:t>
+            </a:r>
+            <a:r>
+              <a:rPr lang="sk-SK" dirty="0"/>
+              <a:t> alebo F. Farby v strome zodpovedajú farbám zón vpravo — takže presne vidno, ktoré moduly (na rovnakej úrovni stromu, ktoré sa nikdy nevolajú súčasne) sa v pamäti reálne delia o tú istú zónu.</a:t>
+            </a:r>
+          </a:p>
+          <a:p>
+            <a:r>
+              <a:rPr lang="sk-SK" dirty="0"/>
+              <a:t>Pravý panel zobrazuje výsledné rozloženie v pamäti zdola nahor: ROOT je trvalo rezidentný, nad ním Zóna 1 (striedavo A alebo D) a najvyššie Zóna 2 (striedavo B, C, </a:t>
+            </a:r>
+            <a:r>
+              <a:rPr lang="sk-SK" dirty="0" err="1"/>
+              <a:t>E</a:t>
+            </a:r>
+            <a:r>
+              <a:rPr lang="sk-SK" dirty="0"/>
+              <a:t> alebo F). Vďaka tomu program potrebuje len pamäť veľkosti ROOT + najväčší z {A,D} + najväčší z {B,C,E,F}, namiesto súčtu veľkostí všetkých šiestich modulov naraz.</a:t>
+            </a:r>
+          </a:p>
+          <a:p>
+            <a:endParaRPr lang="sk-SK" dirty="0"/>
           </a:p>
         </p:txBody>
       </p:sp>
-      <p:sp>
-        <p:nvSpPr>
-          <p:cNvPr id="5" name="BlokTextu 4"/>
-          <p:cNvSpPr txBox="1"/>
-          <p:nvPr/>
-        </p:nvSpPr>
-        <p:spPr>
-          <a:xfrm>
-            <a:off x="9772650" y="2563586"/>
-            <a:ext cx="1666867" cy="369332"/>
-          </a:xfrm>
-          <a:prstGeom prst="rect">
-            <a:avLst/>
-          </a:prstGeom>
-          <a:noFill/>
-        </p:spPr>
-        <p:txBody>
-          <a:bodyPr wrap="none" rtlCol="0">
-            <a:spAutoFit/>
-          </a:bodyPr>
-          <a:lstStyle/>
-          <a:p>
-            <a:r>
-              <a:rPr lang="sk-SK" dirty="0"/>
-              <a:t>Hlavný program</a:t>
-            </a:r>
-          </a:p>
-        </p:txBody>
-      </p:sp>
-      <p:grpSp>
-        <p:nvGrpSpPr>
-          <p:cNvPr id="3" name="Skupina 2">
-            <a:extLst>
-              <a:ext uri="{FF2B5EF4-FFF2-40B4-BE49-F238E27FC236}">
-                <a16:creationId xmlns:a16="http://schemas.microsoft.com/office/drawing/2014/main" id="{82C67734-E197-76F9-9111-BA31436D49EB}"/>
-              </a:ext>
-            </a:extLst>
-          </p:cNvPr>
-          <p:cNvGrpSpPr/>
-          <p:nvPr/>
-        </p:nvGrpSpPr>
-        <p:grpSpPr>
-          <a:xfrm>
-            <a:off x="2378927" y="1356960"/>
-            <a:ext cx="7076800" cy="5501040"/>
-            <a:chOff x="2378927" y="1356960"/>
-            <a:chExt cx="7076800" cy="5501040"/>
-          </a:xfrm>
-        </p:grpSpPr>
-        <p:pic>
-          <p:nvPicPr>
-            <p:cNvPr id="31748" name="Picture 4" descr="7_10"/>
-            <p:cNvPicPr>
-              <a:picLocks noChangeAspect="1" noChangeArrowheads="1"/>
-            </p:cNvPicPr>
-            <p:nvPr/>
-          </p:nvPicPr>
-          <p:blipFill>
-            <a:blip r:embed="rId2">
-              <a:extLst>
-                <a:ext uri="{BEBA8EAE-BF5A-486C-A8C5-ECC9F3942E4B}">
-                  <a14:imgProps xmlns:a14="http://schemas.microsoft.com/office/drawing/2010/main">
-                    <a14:imgLayer r:embed="rId3">
-                      <a14:imgEffect>
-                        <a14:brightnessContrast bright="20000" contrast="20000"/>
-                      </a14:imgEffect>
-                    </a14:imgLayer>
-                  </a14:imgProps>
-                </a:ext>
-                <a:ext uri="{28A0092B-C50C-407E-A947-70E740481C1C}">
-                  <a14:useLocalDpi xmlns:a14="http://schemas.microsoft.com/office/drawing/2010/main" val="0"/>
-                </a:ext>
-              </a:extLst>
-            </a:blip>
-            <a:srcRect/>
-            <a:stretch>
-              <a:fillRect/>
-            </a:stretch>
-          </p:blipFill>
-          <p:spPr bwMode="auto">
-            <a:xfrm>
-              <a:off x="2779423" y="1356960"/>
-              <a:ext cx="6676304" cy="5501040"/>
-            </a:xfrm>
-            <a:prstGeom prst="rect">
-              <a:avLst/>
-            </a:prstGeom>
-            <a:noFill/>
-            <a:ln>
-              <a:noFill/>
-            </a:ln>
-            <a:extLst>
-              <a:ext uri="{909E8E84-426E-40DD-AFC4-6F175D3DCCD1}">
-                <a14:hiddenFill xmlns:a14="http://schemas.microsoft.com/office/drawing/2010/main">
-                  <a:solidFill>
-                    <a:srgbClr val="FFFFFF"/>
-                  </a:solidFill>
-                </a14:hiddenFill>
-              </a:ext>
-              <a:ext uri="{91240B29-F687-4F45-9708-019B960494DF}">
-                <a14:hiddenLine xmlns:a14="http://schemas.microsoft.com/office/drawing/2010/main" w="9525">
-                  <a:solidFill>
-                    <a:srgbClr val="000000"/>
-                  </a:solidFill>
-                  <a:miter lim="800000"/>
-                  <a:headEnd/>
-                  <a:tailEnd/>
-                </a14:hiddenLine>
-              </a:ext>
-            </a:extLst>
-          </p:spPr>
-        </p:pic>
-        <p:sp>
-          <p:nvSpPr>
-            <p:cNvPr id="2" name="Pravouholník 1">
-              <a:extLst>
-                <a:ext uri="{FF2B5EF4-FFF2-40B4-BE49-F238E27FC236}">
-                  <a16:creationId xmlns:a16="http://schemas.microsoft.com/office/drawing/2014/main" id="{A8BCAD3F-6C8D-A4A0-A360-09860816B6BA}"/>
-                </a:ext>
-              </a:extLst>
-            </p:cNvPr>
-            <p:cNvSpPr/>
-            <p:nvPr/>
-          </p:nvSpPr>
-          <p:spPr>
-            <a:xfrm>
-              <a:off x="2378927" y="5322849"/>
-              <a:ext cx="7076800" cy="1464527"/>
-            </a:xfrm>
-            <a:prstGeom prst="rect">
-              <a:avLst/>
-            </a:prstGeom>
-            <a:solidFill>
-              <a:schemeClr val="bg1"/>
-            </a:solidFill>
-            <a:ln>
-              <a:solidFill>
-                <a:schemeClr val="bg1"/>
-              </a:solidFill>
-            </a:ln>
-          </p:spPr>
-          <p:style>
-            <a:lnRef idx="2">
-              <a:schemeClr val="accent1">
-                <a:shade val="15000"/>
-              </a:schemeClr>
-            </a:lnRef>
-            <a:fillRef idx="1">
-              <a:schemeClr val="accent1"/>
-            </a:fillRef>
-            <a:effectRef idx="0">
-              <a:schemeClr val="accent1"/>
-            </a:effectRef>
-            <a:fontRef idx="minor">
-              <a:schemeClr val="lt1"/>
-            </a:fontRef>
-          </p:style>
-          <p:txBody>
-            <a:bodyPr rtlCol="0" anchor="ctr"/>
-            <a:lstStyle/>
-            <a:p>
-              <a:pPr algn="ctr"/>
-              <a:endParaRPr lang="sk-SK"/>
-            </a:p>
-          </p:txBody>
-        </p:sp>
-      </p:grpSp>
     </p:spTree>
     <p:extLst>
       <p:ext uri="{BB962C8B-B14F-4D97-AF65-F5344CB8AC3E}">
-        <p14:creationId xmlns:p14="http://schemas.microsoft.com/office/powerpoint/2010/main" val="3434232039"/>
+        <p14:creationId xmlns:p14="http://schemas.microsoft.com/office/powerpoint/2010/main" val="1117345495"/>
       </p:ext>
     </p:extLst>
   </p:cSld>
@@ -24069,9 +22843,15 @@
       </p:grpSpPr>
       <p:sp>
         <p:nvSpPr>
-          <p:cNvPr id="35843" name="Rectangle 2"/>
+          <p:cNvPr id="2" name="Nadpis 1">
+            <a:extLst>
+              <a:ext uri="{FF2B5EF4-FFF2-40B4-BE49-F238E27FC236}">
+                <a16:creationId xmlns:a16="http://schemas.microsoft.com/office/drawing/2014/main" id="{06314C37-EFED-F333-B424-48D7835A8C4C}"/>
+              </a:ext>
+            </a:extLst>
+          </p:cNvPr>
           <p:cNvSpPr>
-            <a:spLocks noGrp="1" noChangeArrowheads="1"/>
+            <a:spLocks noGrp="1"/>
           </p:cNvSpPr>
           <p:nvPr>
             <p:ph type="title"/>
@@ -24084,210 +22864,17 @@
           <a:p>
             <a:r>
               <a:rPr lang="sk-SK" dirty="0"/>
-              <a:t>Fragmentácia pamäti</a:t>
-            </a:r>
-          </a:p>
-        </p:txBody>
-      </p:sp>
-      <p:sp>
-        <p:nvSpPr>
-          <p:cNvPr id="35844" name="Rectangle 3"/>
-          <p:cNvSpPr>
-            <a:spLocks noGrp="1" noChangeArrowheads="1"/>
-          </p:cNvSpPr>
-          <p:nvPr>
-            <p:ph idx="1"/>
-          </p:nvPr>
-        </p:nvSpPr>
-        <p:spPr/>
-        <p:txBody>
-          <a:bodyPr/>
-          <a:lstStyle/>
-          <a:p>
-            <a:r>
-              <a:rPr lang="sk-SK" dirty="0"/>
-              <a:t>vnútorná fragmentácia</a:t>
-            </a:r>
-          </a:p>
-          <a:p>
-            <a:pPr lvl="1"/>
-            <a:r>
-              <a:rPr lang="sk-SK" dirty="0"/>
-              <a:t>môžu zostať nevyužité úseky s kapacitou rovnou alebo aj väčšou ako by požadoval proces, ktorý nie je možne z nedostatku miesta vytvoriť</a:t>
-            </a:r>
-          </a:p>
-          <a:p>
-            <a:r>
-              <a:rPr lang="sk-SK" dirty="0"/>
-              <a:t>Vonkajšia fragmentácia</a:t>
-            </a:r>
-          </a:p>
-          <a:p>
-            <a:pPr lvl="1"/>
-            <a:r>
-              <a:rPr lang="sk-SK" dirty="0" err="1"/>
-              <a:t>First</a:t>
-            </a:r>
-            <a:r>
-              <a:rPr lang="sk-SK" dirty="0"/>
-              <a:t> fit - prvý vyhovujúci</a:t>
-            </a:r>
-          </a:p>
-          <a:p>
-            <a:pPr lvl="1"/>
-            <a:r>
-              <a:rPr lang="sk-SK" dirty="0"/>
-              <a:t>Best fit - najlepšie vyhovujúci</a:t>
-            </a:r>
-          </a:p>
-          <a:p>
-            <a:pPr lvl="1"/>
-            <a:r>
-              <a:rPr lang="sk-SK" dirty="0" err="1"/>
-              <a:t>Worst</a:t>
-            </a:r>
-            <a:r>
-              <a:rPr lang="sk-SK" dirty="0"/>
-              <a:t> fit – najmenej vyhovujúci</a:t>
-            </a:r>
-          </a:p>
-          <a:p>
-            <a:endParaRPr lang="sk-SK" dirty="0"/>
-          </a:p>
-        </p:txBody>
-      </p:sp>
-      <p:sp>
-        <p:nvSpPr>
-          <p:cNvPr id="35842" name="Zástupný symbol čísla snímky 5"/>
-          <p:cNvSpPr>
-            <a:spLocks noGrp="1"/>
-          </p:cNvSpPr>
-          <p:nvPr>
-            <p:ph type="sldNum" sz="quarter" idx="4294967295"/>
-          </p:nvPr>
-        </p:nvSpPr>
-        <p:spPr>
-          <a:xfrm>
-            <a:off x="0" y="6356350"/>
-            <a:ext cx="4114800" cy="365125"/>
-          </a:xfrm>
-        </p:spPr>
-        <p:txBody>
-          <a:bodyPr/>
-          <a:lstStyle>
-            <a:lvl1pPr>
-              <a:defRPr sz="2400">
-                <a:solidFill>
-                  <a:schemeClr val="tx1"/>
-                </a:solidFill>
-                <a:latin typeface="Times New Roman" panose="02020603050405020304" pitchFamily="18" charset="0"/>
-              </a:defRPr>
-            </a:lvl1pPr>
-            <a:lvl2pPr marL="742950" indent="-285750">
-              <a:defRPr sz="2400">
-                <a:solidFill>
-                  <a:schemeClr val="tx1"/>
-                </a:solidFill>
-                <a:latin typeface="Times New Roman" panose="02020603050405020304" pitchFamily="18" charset="0"/>
-              </a:defRPr>
-            </a:lvl2pPr>
-            <a:lvl3pPr marL="1143000" indent="-228600">
-              <a:defRPr sz="2400">
-                <a:solidFill>
-                  <a:schemeClr val="tx1"/>
-                </a:solidFill>
-                <a:latin typeface="Times New Roman" panose="02020603050405020304" pitchFamily="18" charset="0"/>
-              </a:defRPr>
-            </a:lvl3pPr>
-            <a:lvl4pPr marL="1600200" indent="-228600">
-              <a:defRPr sz="2400">
-                <a:solidFill>
-                  <a:schemeClr val="tx1"/>
-                </a:solidFill>
-                <a:latin typeface="Times New Roman" panose="02020603050405020304" pitchFamily="18" charset="0"/>
-              </a:defRPr>
-            </a:lvl4pPr>
-            <a:lvl5pPr marL="2057400" indent="-228600">
-              <a:defRPr sz="2400">
-                <a:solidFill>
-                  <a:schemeClr val="tx1"/>
-                </a:solidFill>
-                <a:latin typeface="Times New Roman" panose="02020603050405020304" pitchFamily="18" charset="0"/>
-              </a:defRPr>
-            </a:lvl5pPr>
-            <a:lvl6pPr marL="2514600" indent="-228600" eaLnBrk="0" fontAlgn="base" hangingPunct="0">
-              <a:spcBef>
-                <a:spcPct val="0"/>
-              </a:spcBef>
-              <a:spcAft>
-                <a:spcPct val="0"/>
-              </a:spcAft>
-              <a:defRPr sz="2400">
-                <a:solidFill>
-                  <a:schemeClr val="tx1"/>
-                </a:solidFill>
-                <a:latin typeface="Times New Roman" panose="02020603050405020304" pitchFamily="18" charset="0"/>
-              </a:defRPr>
-            </a:lvl6pPr>
-            <a:lvl7pPr marL="2971800" indent="-228600" eaLnBrk="0" fontAlgn="base" hangingPunct="0">
-              <a:spcBef>
-                <a:spcPct val="0"/>
-              </a:spcBef>
-              <a:spcAft>
-                <a:spcPct val="0"/>
-              </a:spcAft>
-              <a:defRPr sz="2400">
-                <a:solidFill>
-                  <a:schemeClr val="tx1"/>
-                </a:solidFill>
-                <a:latin typeface="Times New Roman" panose="02020603050405020304" pitchFamily="18" charset="0"/>
-              </a:defRPr>
-            </a:lvl7pPr>
-            <a:lvl8pPr marL="3429000" indent="-228600" eaLnBrk="0" fontAlgn="base" hangingPunct="0">
-              <a:spcBef>
-                <a:spcPct val="0"/>
-              </a:spcBef>
-              <a:spcAft>
-                <a:spcPct val="0"/>
-              </a:spcAft>
-              <a:defRPr sz="2400">
-                <a:solidFill>
-                  <a:schemeClr val="tx1"/>
-                </a:solidFill>
-                <a:latin typeface="Times New Roman" panose="02020603050405020304" pitchFamily="18" charset="0"/>
-              </a:defRPr>
-            </a:lvl8pPr>
-            <a:lvl9pPr marL="3886200" indent="-228600" eaLnBrk="0" fontAlgn="base" hangingPunct="0">
-              <a:spcBef>
-                <a:spcPct val="0"/>
-              </a:spcBef>
-              <a:spcAft>
-                <a:spcPct val="0"/>
-              </a:spcAft>
-              <a:defRPr sz="2400">
-                <a:solidFill>
-                  <a:schemeClr val="tx1"/>
-                </a:solidFill>
-                <a:latin typeface="Times New Roman" panose="02020603050405020304" pitchFamily="18" charset="0"/>
-              </a:defRPr>
-            </a:lvl9pPr>
-          </a:lstStyle>
-          <a:p>
-            <a:fld id="{2FDF245B-F470-4AB6-9E01-B4AAE93A9C60}" type="slidenum">
-              <a:rPr lang="sk-SK" smtClean="0"/>
-              <a:pPr/>
-              <a:t>28</a:t>
-            </a:fld>
-            <a:endParaRPr lang="sk-SK"/>
+              <a:t>Porovnanie statického a dynamického prideľovania pamäti</a:t>
+            </a:r>
           </a:p>
         </p:txBody>
       </p:sp>
       <p:pic>
         <p:nvPicPr>
-          <p:cNvPr id="3" name="Grafický objekt 2">
+          <p:cNvPr id="4" name="Grafický objekt 3">
             <a:extLst>
               <a:ext uri="{FF2B5EF4-FFF2-40B4-BE49-F238E27FC236}">
-                <a16:creationId xmlns:a16="http://schemas.microsoft.com/office/drawing/2014/main" id="{437A38CB-FB2E-C76D-8F94-AA0D240CFB42}"/>
+                <a16:creationId xmlns:a16="http://schemas.microsoft.com/office/drawing/2014/main" id="{FD0B4D40-DEB9-0F33-C8B0-D91FDBA43AE3}"/>
               </a:ext>
             </a:extLst>
           </p:cNvPr>
@@ -24297,21 +22884,22 @@
           <p:nvPr/>
         </p:nvPicPr>
         <p:blipFill>
-          <a:blip r:embed="rId2">
+          <a:blip>
             <a:extLst>
               <a:ext uri="{96DAC541-7B7A-43D3-8B79-37D633B846F1}">
-                <asvg:svgBlip xmlns:asvg="http://schemas.microsoft.com/office/drawing/2016/SVG/main" r:embed="rId3"/>
+                <asvg:svgBlip xmlns:asvg="http://schemas.microsoft.com/office/drawing/2016/SVG/main" r:embed="rId2"/>
               </a:ext>
             </a:extLst>
           </a:blip>
+          <a:srcRect b="20650"/>
           <a:stretch>
             <a:fillRect/>
           </a:stretch>
         </p:blipFill>
         <p:spPr>
           <a:xfrm>
-            <a:off x="5884334" y="3110441"/>
-            <a:ext cx="5891322" cy="2587625"/>
+            <a:off x="996984" y="1727158"/>
+            <a:ext cx="10025037" cy="4710112"/>
           </a:xfrm>
           <a:prstGeom prst="rect">
             <a:avLst/>
@@ -24321,7 +22909,7 @@
     </p:spTree>
     <p:extLst>
       <p:ext uri="{BB962C8B-B14F-4D97-AF65-F5344CB8AC3E}">
-        <p14:creationId xmlns:p14="http://schemas.microsoft.com/office/powerpoint/2010/main" val="2888860324"/>
+        <p14:creationId xmlns:p14="http://schemas.microsoft.com/office/powerpoint/2010/main" val="792097991"/>
       </p:ext>
     </p:extLst>
   </p:cSld>
@@ -24350,9 +22938,9 @@
       </p:grpSpPr>
       <p:sp>
         <p:nvSpPr>
-          <p:cNvPr id="2" name="Title 1"/>
+          <p:cNvPr id="35843" name="Rectangle 2"/>
           <p:cNvSpPr>
-            <a:spLocks noGrp="1"/>
+            <a:spLocks noGrp="1" noChangeArrowheads="1"/>
           </p:cNvSpPr>
           <p:nvPr>
             <p:ph type="title"/>
@@ -24365,16 +22953,16 @@
           <a:p>
             <a:r>
               <a:rPr lang="sk-SK" dirty="0"/>
-              <a:t>Striasanie pamäte</a:t>
+              <a:t>Fragmentácia pamäti</a:t>
             </a:r>
           </a:p>
         </p:txBody>
       </p:sp>
       <p:sp>
         <p:nvSpPr>
-          <p:cNvPr id="3" name="Content Placeholder 2"/>
+          <p:cNvPr id="35844" name="Rectangle 3"/>
           <p:cNvSpPr>
-            <a:spLocks noGrp="1"/>
+            <a:spLocks noGrp="1" noChangeArrowheads="1"/>
           </p:cNvSpPr>
           <p:nvPr>
             <p:ph idx="1"/>
@@ -24382,63 +22970,54 @@
         </p:nvSpPr>
         <p:spPr/>
         <p:txBody>
-          <a:bodyPr vert="horz" lIns="91440" tIns="45720" rIns="91440" bIns="45720" rtlCol="0" anchor="t">
-            <a:normAutofit/>
-          </a:bodyPr>
+          <a:bodyPr/>
           <a:lstStyle/>
           <a:p>
             <a:r>
               <a:rPr lang="sk-SK" dirty="0"/>
-              <a:t>presun vedúci k spojeniu voľného priestoru sa nazýva striasanie pamäte</a:t>
-            </a:r>
-          </a:p>
-          <a:p>
+              <a:t>vnútorná fragmentácia</a:t>
+            </a:r>
+          </a:p>
+          <a:p>
+            <a:pPr lvl="1"/>
             <a:r>
               <a:rPr lang="sk-SK" dirty="0"/>
-              <a:t>striasanie nesmie presúvať úsek pamäti pri periférnej operácii s dátovou štruktúrou umiestnenou v niektorom z presúvaných úsekov</a:t>
+              <a:t>môžu zostať nevyužité úseky s kapacitou rovnou alebo aj väčšou ako by požadoval proces, ktorý nie je možne z nedostatku miesta vytvoriť</a:t>
             </a:r>
           </a:p>
           <a:p>
             <a:r>
               <a:rPr lang="sk-SK" dirty="0"/>
-              <a:t>striasanie je časovo náročné </a:t>
-            </a:r>
-          </a:p>
-          <a:p>
+              <a:t>Vonkajšia fragmentácia</a:t>
+            </a:r>
+          </a:p>
+          <a:p>
+            <a:pPr lvl="1"/>
+            <a:r>
+              <a:rPr lang="sk-SK" dirty="0" err="1"/>
+              <a:t>First</a:t>
+            </a:r>
             <a:r>
               <a:rPr lang="sk-SK" dirty="0"/>
-              <a:t>Realizácia striasania: </a:t>
-            </a:r>
-            <a:endParaRPr lang="sk-SK" dirty="0">
-              <a:cs typeface="Calibri"/>
-            </a:endParaRPr>
+              <a:t> fit - prvý vyhovujúci</a:t>
+            </a:r>
           </a:p>
           <a:p>
             <a:pPr lvl="1"/>
             <a:r>
               <a:rPr lang="sk-SK" dirty="0"/>
-              <a:t>pri uvoľnení úseku aby nedošlo k (vonkajšej) fragmentácii </a:t>
+              <a:t>Best fit - najlepšie vyhovujúci</a:t>
             </a:r>
           </a:p>
           <a:p>
             <a:pPr lvl="1"/>
             <a:r>
+              <a:rPr lang="sk-SK" dirty="0" err="1"/>
+              <a:t>Worst</a:t>
+            </a:r>
+            <a:r>
               <a:rPr lang="sk-SK" dirty="0"/>
-              <a:t>keď nieje voľný úsek dostatočnej dĺžky ale súčet voľných úsekov postačuje</a:t>
-            </a:r>
-          </a:p>
-          <a:p>
-            <a:pPr lvl="2"/>
-            <a:r>
-              <a:rPr lang="sk-SK" dirty="0"/>
-              <a:t>úplné </a:t>
-            </a:r>
-          </a:p>
-          <a:p>
-            <a:pPr lvl="2"/>
-            <a:r>
-              <a:rPr lang="sk-SK" dirty="0"/>
-              <a:t>čiastočné </a:t>
+              <a:t> fit – najmenej vyhovujúci</a:t>
             </a:r>
           </a:p>
           <a:p>
@@ -24446,10 +23025,172 @@
           </a:p>
         </p:txBody>
       </p:sp>
+      <p:sp>
+        <p:nvSpPr>
+          <p:cNvPr id="35842" name="Zástupný symbol čísla snímky 5"/>
+          <p:cNvSpPr>
+            <a:spLocks noGrp="1"/>
+          </p:cNvSpPr>
+          <p:nvPr>
+            <p:ph type="sldNum" sz="quarter" idx="4294967295"/>
+          </p:nvPr>
+        </p:nvSpPr>
+        <p:spPr>
+          <a:xfrm>
+            <a:off x="0" y="6356350"/>
+            <a:ext cx="4114800" cy="365125"/>
+          </a:xfrm>
+        </p:spPr>
+        <p:txBody>
+          <a:bodyPr/>
+          <a:lstStyle>
+            <a:lvl1pPr>
+              <a:defRPr sz="2400">
+                <a:solidFill>
+                  <a:schemeClr val="tx1"/>
+                </a:solidFill>
+                <a:latin typeface="Times New Roman" panose="02020603050405020304" pitchFamily="18" charset="0"/>
+              </a:defRPr>
+            </a:lvl1pPr>
+            <a:lvl2pPr marL="742950" indent="-285750">
+              <a:defRPr sz="2400">
+                <a:solidFill>
+                  <a:schemeClr val="tx1"/>
+                </a:solidFill>
+                <a:latin typeface="Times New Roman" panose="02020603050405020304" pitchFamily="18" charset="0"/>
+              </a:defRPr>
+            </a:lvl2pPr>
+            <a:lvl3pPr marL="1143000" indent="-228600">
+              <a:defRPr sz="2400">
+                <a:solidFill>
+                  <a:schemeClr val="tx1"/>
+                </a:solidFill>
+                <a:latin typeface="Times New Roman" panose="02020603050405020304" pitchFamily="18" charset="0"/>
+              </a:defRPr>
+            </a:lvl3pPr>
+            <a:lvl4pPr marL="1600200" indent="-228600">
+              <a:defRPr sz="2400">
+                <a:solidFill>
+                  <a:schemeClr val="tx1"/>
+                </a:solidFill>
+                <a:latin typeface="Times New Roman" panose="02020603050405020304" pitchFamily="18" charset="0"/>
+              </a:defRPr>
+            </a:lvl4pPr>
+            <a:lvl5pPr marL="2057400" indent="-228600">
+              <a:defRPr sz="2400">
+                <a:solidFill>
+                  <a:schemeClr val="tx1"/>
+                </a:solidFill>
+                <a:latin typeface="Times New Roman" panose="02020603050405020304" pitchFamily="18" charset="0"/>
+              </a:defRPr>
+            </a:lvl5pPr>
+            <a:lvl6pPr marL="2514600" indent="-228600" eaLnBrk="0" fontAlgn="base" hangingPunct="0">
+              <a:spcBef>
+                <a:spcPct val="0"/>
+              </a:spcBef>
+              <a:spcAft>
+                <a:spcPct val="0"/>
+              </a:spcAft>
+              <a:defRPr sz="2400">
+                <a:solidFill>
+                  <a:schemeClr val="tx1"/>
+                </a:solidFill>
+                <a:latin typeface="Times New Roman" panose="02020603050405020304" pitchFamily="18" charset="0"/>
+              </a:defRPr>
+            </a:lvl6pPr>
+            <a:lvl7pPr marL="2971800" indent="-228600" eaLnBrk="0" fontAlgn="base" hangingPunct="0">
+              <a:spcBef>
+                <a:spcPct val="0"/>
+              </a:spcBef>
+              <a:spcAft>
+                <a:spcPct val="0"/>
+              </a:spcAft>
+              <a:defRPr sz="2400">
+                <a:solidFill>
+                  <a:schemeClr val="tx1"/>
+                </a:solidFill>
+                <a:latin typeface="Times New Roman" panose="02020603050405020304" pitchFamily="18" charset="0"/>
+              </a:defRPr>
+            </a:lvl7pPr>
+            <a:lvl8pPr marL="3429000" indent="-228600" eaLnBrk="0" fontAlgn="base" hangingPunct="0">
+              <a:spcBef>
+                <a:spcPct val="0"/>
+              </a:spcBef>
+              <a:spcAft>
+                <a:spcPct val="0"/>
+              </a:spcAft>
+              <a:defRPr sz="2400">
+                <a:solidFill>
+                  <a:schemeClr val="tx1"/>
+                </a:solidFill>
+                <a:latin typeface="Times New Roman" panose="02020603050405020304" pitchFamily="18" charset="0"/>
+              </a:defRPr>
+            </a:lvl8pPr>
+            <a:lvl9pPr marL="3886200" indent="-228600" eaLnBrk="0" fontAlgn="base" hangingPunct="0">
+              <a:spcBef>
+                <a:spcPct val="0"/>
+              </a:spcBef>
+              <a:spcAft>
+                <a:spcPct val="0"/>
+              </a:spcAft>
+              <a:defRPr sz="2400">
+                <a:solidFill>
+                  <a:schemeClr val="tx1"/>
+                </a:solidFill>
+                <a:latin typeface="Times New Roman" panose="02020603050405020304" pitchFamily="18" charset="0"/>
+              </a:defRPr>
+            </a:lvl9pPr>
+          </a:lstStyle>
+          <a:p>
+            <a:fld id="{2FDF245B-F470-4AB6-9E01-B4AAE93A9C60}" type="slidenum">
+              <a:rPr lang="sk-SK" smtClean="0"/>
+              <a:pPr/>
+              <a:t>29</a:t>
+            </a:fld>
+            <a:endParaRPr lang="sk-SK"/>
+          </a:p>
+        </p:txBody>
+      </p:sp>
+      <p:pic>
+        <p:nvPicPr>
+          <p:cNvPr id="3" name="Grafický objekt 2">
+            <a:extLst>
+              <a:ext uri="{FF2B5EF4-FFF2-40B4-BE49-F238E27FC236}">
+                <a16:creationId xmlns:a16="http://schemas.microsoft.com/office/drawing/2014/main" id="{437A38CB-FB2E-C76D-8F94-AA0D240CFB42}"/>
+              </a:ext>
+            </a:extLst>
+          </p:cNvPr>
+          <p:cNvPicPr>
+            <a:picLocks noChangeAspect="1"/>
+          </p:cNvPicPr>
+          <p:nvPr/>
+        </p:nvPicPr>
+        <p:blipFill>
+          <a:blip>
+            <a:extLst>
+              <a:ext uri="{96DAC541-7B7A-43D3-8B79-37D633B846F1}">
+                <asvg:svgBlip xmlns:asvg="http://schemas.microsoft.com/office/drawing/2016/SVG/main" r:embed="rId2"/>
+              </a:ext>
+            </a:extLst>
+          </a:blip>
+          <a:stretch>
+            <a:fillRect/>
+          </a:stretch>
+        </p:blipFill>
+        <p:spPr>
+          <a:xfrm>
+            <a:off x="5884334" y="3110441"/>
+            <a:ext cx="5891322" cy="2587625"/>
+          </a:xfrm>
+          <a:prstGeom prst="rect">
+            <a:avLst/>
+          </a:prstGeom>
+        </p:spPr>
+      </p:pic>
     </p:spTree>
     <p:extLst>
       <p:ext uri="{BB962C8B-B14F-4D97-AF65-F5344CB8AC3E}">
-        <p14:creationId xmlns:p14="http://schemas.microsoft.com/office/powerpoint/2010/main" val="1468456781"/>
+        <p14:creationId xmlns:p14="http://schemas.microsoft.com/office/powerpoint/2010/main" val="2888860324"/>
       </p:ext>
     </p:extLst>
   </p:cSld>
@@ -24706,6 +23447,134 @@
           <a:p>
             <a:r>
               <a:rPr lang="sk-SK" dirty="0"/>
+              <a:t>Striasanie pamäte</a:t>
+            </a:r>
+          </a:p>
+        </p:txBody>
+      </p:sp>
+      <p:sp>
+        <p:nvSpPr>
+          <p:cNvPr id="3" name="Content Placeholder 2"/>
+          <p:cNvSpPr>
+            <a:spLocks noGrp="1"/>
+          </p:cNvSpPr>
+          <p:nvPr>
+            <p:ph idx="1"/>
+          </p:nvPr>
+        </p:nvSpPr>
+        <p:spPr/>
+        <p:txBody>
+          <a:bodyPr vert="horz" lIns="91440" tIns="45720" rIns="91440" bIns="45720" rtlCol="0" anchor="t">
+            <a:normAutofit/>
+          </a:bodyPr>
+          <a:lstStyle/>
+          <a:p>
+            <a:r>
+              <a:rPr lang="sk-SK" dirty="0"/>
+              <a:t>presun vedúci k spojeniu voľného priestoru sa nazýva striasanie pamäte</a:t>
+            </a:r>
+          </a:p>
+          <a:p>
+            <a:r>
+              <a:rPr lang="sk-SK" dirty="0"/>
+              <a:t>striasanie nesmie presúvať úsek pamäti pri periférnej operácii s dátovou štruktúrou umiestnenou v niektorom z presúvaných úsekov</a:t>
+            </a:r>
+          </a:p>
+          <a:p>
+            <a:r>
+              <a:rPr lang="sk-SK" dirty="0"/>
+              <a:t>striasanie je časovo náročné </a:t>
+            </a:r>
+          </a:p>
+          <a:p>
+            <a:r>
+              <a:rPr lang="sk-SK" dirty="0"/>
+              <a:t>Realizácia striasania: </a:t>
+            </a:r>
+            <a:endParaRPr lang="sk-SK" dirty="0">
+              <a:cs typeface="Calibri"/>
+            </a:endParaRPr>
+          </a:p>
+          <a:p>
+            <a:pPr lvl="1"/>
+            <a:r>
+              <a:rPr lang="sk-SK" dirty="0"/>
+              <a:t>pri uvoľnení úseku aby nedošlo k (vonkajšej) fragmentácii </a:t>
+            </a:r>
+          </a:p>
+          <a:p>
+            <a:pPr lvl="1"/>
+            <a:r>
+              <a:rPr lang="sk-SK" dirty="0"/>
+              <a:t>keď nieje voľný úsek dostatočnej dĺžky ale súčet voľných úsekov postačuje</a:t>
+            </a:r>
+          </a:p>
+          <a:p>
+            <a:pPr lvl="2"/>
+            <a:r>
+              <a:rPr lang="sk-SK" dirty="0"/>
+              <a:t>úplné </a:t>
+            </a:r>
+          </a:p>
+          <a:p>
+            <a:pPr lvl="2"/>
+            <a:r>
+              <a:rPr lang="sk-SK" dirty="0"/>
+              <a:t>čiastočné </a:t>
+            </a:r>
+          </a:p>
+          <a:p>
+            <a:endParaRPr lang="sk-SK" dirty="0"/>
+          </a:p>
+        </p:txBody>
+      </p:sp>
+    </p:spTree>
+    <p:extLst>
+      <p:ext uri="{BB962C8B-B14F-4D97-AF65-F5344CB8AC3E}">
+        <p14:creationId xmlns:p14="http://schemas.microsoft.com/office/powerpoint/2010/main" val="1468456781"/>
+      </p:ext>
+    </p:extLst>
+  </p:cSld>
+  <p:clrMapOvr>
+    <a:masterClrMapping/>
+  </p:clrMapOvr>
+</p:sld>
+</file>
+
+<file path=ppt/slides/slide31.xml><?xml version="1.0" encoding="utf-8"?>
+<p:sld xmlns:a="http://schemas.openxmlformats.org/drawingml/2006/main" xmlns:r="http://schemas.openxmlformats.org/officeDocument/2006/relationships" xmlns:p="http://schemas.openxmlformats.org/presentationml/2006/main">
+  <p:cSld>
+    <p:spTree>
+      <p:nvGrpSpPr>
+        <p:cNvPr id="1" name=""/>
+        <p:cNvGrpSpPr/>
+        <p:nvPr/>
+      </p:nvGrpSpPr>
+      <p:grpSpPr>
+        <a:xfrm>
+          <a:off x="0" y="0"/>
+          <a:ext cx="0" cy="0"/>
+          <a:chOff x="0" y="0"/>
+          <a:chExt cx="0" cy="0"/>
+        </a:xfrm>
+      </p:grpSpPr>
+      <p:sp>
+        <p:nvSpPr>
+          <p:cNvPr id="2" name="Title 1"/>
+          <p:cNvSpPr>
+            <a:spLocks noGrp="1"/>
+          </p:cNvSpPr>
+          <p:nvPr>
+            <p:ph type="title"/>
+          </p:nvPr>
+        </p:nvSpPr>
+        <p:spPr/>
+        <p:txBody>
+          <a:bodyPr/>
+          <a:lstStyle/>
+          <a:p>
+            <a:r>
+              <a:rPr lang="sk-SK" dirty="0"/>
               <a:t>Segmentácia</a:t>
             </a:r>
           </a:p>
@@ -24750,7 +23619,7 @@
 </p:sld>
 </file>
 
-<file path=ppt/slides/slide31.xml><?xml version="1.0" encoding="utf-8"?>
+<file path=ppt/slides/slide32.xml><?xml version="1.0" encoding="utf-8"?>
 <p:sld xmlns:a="http://schemas.openxmlformats.org/drawingml/2006/main" xmlns:r="http://schemas.openxmlformats.org/officeDocument/2006/relationships" xmlns:p="http://schemas.openxmlformats.org/presentationml/2006/main">
   <p:cSld>
     <p:spTree>
@@ -25024,7 +23893,7 @@
 </p:sld>
 </file>
 
-<file path=ppt/slides/slide32.xml><?xml version="1.0" encoding="utf-8"?>
+<file path=ppt/slides/slide33.xml><?xml version="1.0" encoding="utf-8"?>
 <p:sld xmlns:a="http://schemas.openxmlformats.org/drawingml/2006/main" xmlns:r="http://schemas.openxmlformats.org/officeDocument/2006/relationships" xmlns:p="http://schemas.openxmlformats.org/presentationml/2006/main">
   <p:cSld>
     <p:spTree>
@@ -25160,7 +24029,7 @@
 </p:sld>
 </file>
 
-<file path=ppt/slides/slide33.xml><?xml version="1.0" encoding="utf-8"?>
+<file path=ppt/slides/slide34.xml><?xml version="1.0" encoding="utf-8"?>
 <p:sld xmlns:a="http://schemas.openxmlformats.org/drawingml/2006/main" xmlns:r="http://schemas.openxmlformats.org/officeDocument/2006/relationships" xmlns:p="http://schemas.openxmlformats.org/presentationml/2006/main">
   <p:cSld>
     <p:spTree>
@@ -25231,7 +24100,7 @@
         </p:nvSpPr>
         <p:spPr bwMode="auto">
           <a:xfrm>
-            <a:off x="2495550" y="1171575"/>
+            <a:off x="555539" y="1258073"/>
             <a:ext cx="3257550" cy="3962400"/>
           </a:xfrm>
           <a:prstGeom prst="ellipse">
@@ -25379,7 +24248,7 @@
         </p:nvSpPr>
         <p:spPr bwMode="auto">
           <a:xfrm>
-            <a:off x="3095625" y="1857375"/>
+            <a:off x="1155614" y="1943873"/>
             <a:ext cx="1114425" cy="533400"/>
           </a:xfrm>
           <a:prstGeom prst="rect">
@@ -25533,7 +24402,7 @@
         </p:nvSpPr>
         <p:spPr bwMode="auto">
           <a:xfrm>
-            <a:off x="2924175" y="3000375"/>
+            <a:off x="984164" y="3086873"/>
             <a:ext cx="1028700" cy="914400"/>
           </a:xfrm>
           <a:prstGeom prst="rect">
@@ -25687,7 +24556,7 @@
         </p:nvSpPr>
         <p:spPr bwMode="auto">
           <a:xfrm>
-            <a:off x="4552950" y="2466975"/>
+            <a:off x="2612939" y="2553473"/>
             <a:ext cx="1028700" cy="381000"/>
           </a:xfrm>
           <a:prstGeom prst="rect">
@@ -25841,7 +24710,7 @@
         </p:nvSpPr>
         <p:spPr bwMode="auto">
           <a:xfrm>
-            <a:off x="4467225" y="3457575"/>
+            <a:off x="2527214" y="3544073"/>
             <a:ext cx="1028700" cy="533400"/>
           </a:xfrm>
           <a:prstGeom prst="rect">
@@ -25995,7 +24864,7 @@
         </p:nvGrpSpPr>
         <p:grpSpPr bwMode="auto">
           <a:xfrm>
-            <a:off x="7296150" y="1171575"/>
+            <a:off x="4327439" y="1447800"/>
             <a:ext cx="1285875" cy="3962400"/>
             <a:chOff x="3888" y="1056"/>
             <a:chExt cx="720" cy="2496"/>
@@ -27485,7 +26354,7 @@
         </p:nvSpPr>
         <p:spPr bwMode="auto">
           <a:xfrm>
-            <a:off x="3449577" y="5286035"/>
+            <a:off x="1509566" y="5372533"/>
             <a:ext cx="1092324" cy="306672"/>
           </a:xfrm>
           <a:prstGeom prst="rect">
@@ -27657,7 +26526,7 @@
         </p:nvSpPr>
         <p:spPr bwMode="auto">
           <a:xfrm>
-            <a:off x="6889636" y="5286035"/>
+            <a:off x="3920925" y="5562260"/>
             <a:ext cx="2006035" cy="306672"/>
           </a:xfrm>
           <a:prstGeom prst="rect">
@@ -27813,6 +26682,42 @@
           </a:p>
         </p:txBody>
       </p:sp>
+      <p:pic>
+        <p:nvPicPr>
+          <p:cNvPr id="3" name="Obrázok 2">
+            <a:extLst>
+              <a:ext uri="{FF2B5EF4-FFF2-40B4-BE49-F238E27FC236}">
+                <a16:creationId xmlns:a16="http://schemas.microsoft.com/office/drawing/2014/main" id="{96887CC6-4779-7979-91BF-779B91F0CC91}"/>
+              </a:ext>
+            </a:extLst>
+          </p:cNvPr>
+          <p:cNvPicPr>
+            <a:picLocks noChangeAspect="1"/>
+          </p:cNvPicPr>
+          <p:nvPr/>
+        </p:nvPicPr>
+        <p:blipFill>
+          <a:blip r:embed="rId3">
+            <a:extLst>
+              <a:ext uri="{28A0092B-C50C-407E-A947-70E740481C1C}">
+                <a14:useLocalDpi xmlns:a14="http://schemas.microsoft.com/office/drawing/2010/main" val="0"/>
+              </a:ext>
+            </a:extLst>
+          </a:blip>
+          <a:stretch>
+            <a:fillRect/>
+          </a:stretch>
+        </p:blipFill>
+        <p:spPr>
+          <a:xfrm>
+            <a:off x="6113854" y="2139610"/>
+            <a:ext cx="5864165" cy="2295113"/>
+          </a:xfrm>
+          <a:prstGeom prst="rect">
+            <a:avLst/>
+          </a:prstGeom>
+        </p:spPr>
+      </p:pic>
     </p:spTree>
     <p:extLst>
       <p:ext uri="{BB962C8B-B14F-4D97-AF65-F5344CB8AC3E}">
@@ -27826,7 +26731,7 @@
 </p:sld>
 </file>
 
-<file path=ppt/slides/slide34.xml><?xml version="1.0" encoding="utf-8"?>
+<file path=ppt/slides/slide35.xml><?xml version="1.0" encoding="utf-8"?>
 <p:sld xmlns:a="http://schemas.openxmlformats.org/drawingml/2006/main" xmlns:r="http://schemas.openxmlformats.org/officeDocument/2006/relationships" xmlns:p="http://schemas.openxmlformats.org/presentationml/2006/main">
   <p:cSld>
     <p:spTree>
@@ -28202,7 +27107,7 @@
 </p:sld>
 </file>
 
-<file path=ppt/slides/slide35.xml><?xml version="1.0" encoding="utf-8"?>
+<file path=ppt/slides/slide36.xml><?xml version="1.0" encoding="utf-8"?>
 <p:sld xmlns:a="http://schemas.openxmlformats.org/drawingml/2006/main" xmlns:r="http://schemas.openxmlformats.org/officeDocument/2006/relationships" xmlns:p="http://schemas.openxmlformats.org/presentationml/2006/main">
   <p:cSld>
     <p:spTree>
@@ -28383,7 +27288,7 @@
 </p:sld>
 </file>
 
-<file path=ppt/slides/slide36.xml><?xml version="1.0" encoding="utf-8"?>
+<file path=ppt/slides/slide37.xml><?xml version="1.0" encoding="utf-8"?>
 <p:sld xmlns:a="http://schemas.openxmlformats.org/drawingml/2006/main" xmlns:r="http://schemas.openxmlformats.org/officeDocument/2006/relationships" xmlns:p="http://schemas.openxmlformats.org/presentationml/2006/main">
   <p:cSld>
     <p:spTree>
@@ -28507,7 +27412,7 @@
 </p:sld>
 </file>
 
-<file path=ppt/slides/slide37.xml><?xml version="1.0" encoding="utf-8"?>
+<file path=ppt/slides/slide38.xml><?xml version="1.0" encoding="utf-8"?>
 <p:sld xmlns:a="http://schemas.openxmlformats.org/drawingml/2006/main" xmlns:r="http://schemas.openxmlformats.org/officeDocument/2006/relationships" xmlns:p="http://schemas.openxmlformats.org/presentationml/2006/main">
   <p:cSld>
     <p:spTree>
@@ -28642,7 +27547,7 @@
 </p:sld>
 </file>
 
-<file path=ppt/slides/slide38.xml><?xml version="1.0" encoding="utf-8"?>
+<file path=ppt/slides/slide39.xml><?xml version="1.0" encoding="utf-8"?>
 <p:sld xmlns:a="http://schemas.openxmlformats.org/drawingml/2006/main" xmlns:r="http://schemas.openxmlformats.org/officeDocument/2006/relationships" xmlns:p="http://schemas.openxmlformats.org/presentationml/2006/main">
   <p:cSld>
     <p:spTree>
@@ -28720,7 +27625,240 @@
 </p:sld>
 </file>
 
-<file path=ppt/slides/slide39.xml><?xml version="1.0" encoding="utf-8"?>
+<file path=ppt/slides/slide4.xml><?xml version="1.0" encoding="utf-8"?>
+<p:sld xmlns:a="http://schemas.openxmlformats.org/drawingml/2006/main" xmlns:r="http://schemas.openxmlformats.org/officeDocument/2006/relationships" xmlns:p="http://schemas.openxmlformats.org/presentationml/2006/main">
+  <p:cSld>
+    <p:spTree>
+      <p:nvGrpSpPr>
+        <p:cNvPr id="1" name=""/>
+        <p:cNvGrpSpPr/>
+        <p:nvPr/>
+      </p:nvGrpSpPr>
+      <p:grpSpPr>
+        <a:xfrm>
+          <a:off x="0" y="0"/>
+          <a:ext cx="0" cy="0"/>
+          <a:chOff x="0" y="0"/>
+          <a:chExt cx="0" cy="0"/>
+        </a:xfrm>
+      </p:grpSpPr>
+      <p:sp>
+        <p:nvSpPr>
+          <p:cNvPr id="23553" name="Rectangle 2">
+            <a:extLst>
+              <a:ext uri="{FF2B5EF4-FFF2-40B4-BE49-F238E27FC236}">
+                <a16:creationId xmlns:a16="http://schemas.microsoft.com/office/drawing/2014/main" id="{16B6E0A5-7E04-5E46-88BE-BD8C78423D76}"/>
+              </a:ext>
+            </a:extLst>
+          </p:cNvPr>
+          <p:cNvSpPr>
+            <a:spLocks noGrp="1" noChangeArrowheads="1"/>
+          </p:cNvSpPr>
+          <p:nvPr>
+            <p:ph type="title"/>
+          </p:nvPr>
+        </p:nvSpPr>
+        <p:spPr/>
+        <p:txBody>
+          <a:bodyPr>
+            <a:normAutofit/>
+          </a:bodyPr>
+          <a:lstStyle/>
+          <a:p>
+            <a:pPr eaLnBrk="1" hangingPunct="1"/>
+            <a:r>
+              <a:rPr lang="en-US" altLang="sk-SK" dirty="0">
+                <a:ea typeface="ＭＳ Ｐゴシック" panose="020B0600070205080204" pitchFamily="34" charset="-128"/>
+              </a:rPr>
+              <a:t>Memory-Management Unit (</a:t>
+            </a:r>
+            <a:r>
+              <a:rPr lang="en-US" altLang="sk-SK" sz="2550" dirty="0">
+                <a:ea typeface="ＭＳ Ｐゴシック" panose="020B0600070205080204" pitchFamily="34" charset="-128"/>
+              </a:rPr>
+              <a:t>MMU</a:t>
+            </a:r>
+            <a:r>
+              <a:rPr lang="en-US" altLang="sk-SK" dirty="0">
+                <a:ea typeface="ＭＳ Ｐゴシック" panose="020B0600070205080204" pitchFamily="34" charset="-128"/>
+              </a:rPr>
+              <a:t>)</a:t>
+            </a:r>
+          </a:p>
+        </p:txBody>
+      </p:sp>
+      <p:sp>
+        <p:nvSpPr>
+          <p:cNvPr id="23554" name="Rectangle 3">
+            <a:extLst>
+              <a:ext uri="{FF2B5EF4-FFF2-40B4-BE49-F238E27FC236}">
+                <a16:creationId xmlns:a16="http://schemas.microsoft.com/office/drawing/2014/main" id="{9C5C4FF7-0137-B348-A1C7-422D06147EDF}"/>
+              </a:ext>
+            </a:extLst>
+          </p:cNvPr>
+          <p:cNvSpPr>
+            <a:spLocks noGrp="1" noChangeArrowheads="1"/>
+          </p:cNvSpPr>
+          <p:nvPr>
+            <p:ph idx="1"/>
+          </p:nvPr>
+        </p:nvSpPr>
+        <p:spPr/>
+        <p:txBody>
+          <a:bodyPr>
+            <a:normAutofit fontScale="92500" lnSpcReduction="20000"/>
+          </a:bodyPr>
+          <a:lstStyle/>
+          <a:p>
+            <a:r>
+              <a:rPr lang="en-US" altLang="sk-SK" dirty="0">
+                <a:ea typeface="ＭＳ Ｐゴシック" panose="020B0600070205080204" pitchFamily="34" charset="-128"/>
+              </a:rPr>
+              <a:t>Hardware device that at run time </a:t>
+            </a:r>
+            <a:r>
+              <a:rPr lang="en-US" altLang="sk-SK" u="sng" dirty="0">
+                <a:ea typeface="ＭＳ Ｐゴシック" panose="020B0600070205080204" pitchFamily="34" charset="-128"/>
+              </a:rPr>
+              <a:t>maps virtual to physical address</a:t>
+            </a:r>
+            <a:br>
+              <a:rPr lang="en-US" altLang="sk-SK" dirty="0">
+                <a:ea typeface="ＭＳ Ｐゴシック" panose="020B0600070205080204" pitchFamily="34" charset="-128"/>
+              </a:rPr>
+            </a:br>
+            <a:endParaRPr lang="en-US" altLang="sk-SK" dirty="0">
+              <a:ea typeface="ＭＳ Ｐゴシック" panose="020B0600070205080204" pitchFamily="34" charset="-128"/>
+            </a:endParaRPr>
+          </a:p>
+          <a:p>
+            <a:r>
+              <a:rPr lang="en-US" altLang="sk-SK" dirty="0">
+                <a:ea typeface="ＭＳ Ｐゴシック" panose="020B0600070205080204" pitchFamily="34" charset="-128"/>
+              </a:rPr>
+              <a:t>The user program deals with </a:t>
+            </a:r>
+            <a:r>
+              <a:rPr lang="en-US" altLang="sk-SK" i="1" dirty="0">
+                <a:ea typeface="ＭＳ Ｐゴシック" panose="020B0600070205080204" pitchFamily="34" charset="-128"/>
+              </a:rPr>
+              <a:t>logical</a:t>
+            </a:r>
+            <a:r>
+              <a:rPr lang="en-US" altLang="sk-SK" dirty="0">
+                <a:ea typeface="ＭＳ Ｐゴシック" panose="020B0600070205080204" pitchFamily="34" charset="-128"/>
+              </a:rPr>
+              <a:t> addresses; it never sees the </a:t>
+            </a:r>
+            <a:r>
+              <a:rPr lang="en-US" altLang="sk-SK" i="1" dirty="0">
+                <a:ea typeface="ＭＳ Ｐゴシック" panose="020B0600070205080204" pitchFamily="34" charset="-128"/>
+              </a:rPr>
+              <a:t>real</a:t>
+            </a:r>
+            <a:r>
+              <a:rPr lang="en-US" altLang="sk-SK" dirty="0">
+                <a:ea typeface="ＭＳ Ｐゴシック" panose="020B0600070205080204" pitchFamily="34" charset="-128"/>
+              </a:rPr>
+              <a:t> physical addresses</a:t>
+            </a:r>
+          </a:p>
+          <a:p>
+            <a:pPr lvl="1"/>
+            <a:r>
+              <a:rPr lang="en-US" altLang="sk-SK" dirty="0">
+                <a:ea typeface="ＭＳ Ｐゴシック" panose="020B0600070205080204" pitchFamily="34" charset="-128"/>
+              </a:rPr>
+              <a:t>Execution-time binding occurs when reference is made to location in memory</a:t>
+            </a:r>
+          </a:p>
+          <a:p>
+            <a:pPr lvl="1"/>
+            <a:r>
+              <a:rPr lang="en-US" altLang="sk-SK" dirty="0">
+                <a:ea typeface="ＭＳ Ｐゴシック" panose="020B0600070205080204" pitchFamily="34" charset="-128"/>
+              </a:rPr>
+              <a:t>Logical address bound to physical addresses</a:t>
+            </a:r>
+          </a:p>
+          <a:p>
+            <a:pPr lvl="1"/>
+            <a:endParaRPr lang="en-US" altLang="sk-SK" dirty="0">
+              <a:ea typeface="ＭＳ Ｐゴシック" panose="020B0600070205080204" pitchFamily="34" charset="-128"/>
+            </a:endParaRPr>
+          </a:p>
+          <a:p>
+            <a:r>
+              <a:rPr lang="sk-SK" dirty="0"/>
+              <a:t>požiadavky - správa pamäte</a:t>
+            </a:r>
+          </a:p>
+          <a:p>
+            <a:pPr marL="914400" lvl="1" indent="-457200">
+              <a:buFont typeface="+mj-lt"/>
+              <a:buAutoNum type="arabicPeriod"/>
+            </a:pPr>
+            <a:r>
+              <a:rPr lang="sk-SK" dirty="0"/>
+              <a:t>udržuje prehľad o využívaných a nevyužívaných priestoroch pamäti</a:t>
+            </a:r>
+          </a:p>
+          <a:p>
+            <a:pPr marL="914400" lvl="1" indent="-457200">
+              <a:buFont typeface="+mj-lt"/>
+              <a:buAutoNum type="arabicPeriod"/>
+            </a:pPr>
+            <a:r>
+              <a:rPr lang="sk-SK" dirty="0"/>
+              <a:t>rozhoduje o poradí plnenia požiadaviek</a:t>
+            </a:r>
+          </a:p>
+          <a:p>
+            <a:pPr marL="914400" lvl="1" indent="-457200">
+              <a:buFont typeface="+mj-lt"/>
+              <a:buAutoNum type="arabicPeriod"/>
+            </a:pPr>
+            <a:r>
+              <a:rPr lang="sk-SK" dirty="0"/>
+              <a:t>realizuje pridelenie pamäti pre procesy</a:t>
+            </a:r>
+          </a:p>
+          <a:p>
+            <a:pPr marL="914400" lvl="1" indent="-457200">
+              <a:buFont typeface="+mj-lt"/>
+              <a:buAutoNum type="arabicPeriod"/>
+            </a:pPr>
+            <a:r>
+              <a:rPr lang="sk-SK" dirty="0"/>
+              <a:t>Ochrana pamäti s využitím hardvérovej podpory</a:t>
+            </a:r>
+          </a:p>
+          <a:p>
+            <a:pPr marL="914400" lvl="1" indent="-457200">
+              <a:buFont typeface="+mj-lt"/>
+              <a:buAutoNum type="arabicPeriod"/>
+            </a:pPr>
+            <a:r>
+              <a:rPr lang="sk-SK" dirty="0"/>
+              <a:t>spolupracuje s ostatnými funkciami jadra</a:t>
+            </a:r>
+          </a:p>
+        </p:txBody>
+      </p:sp>
+    </p:spTree>
+    <p:extLst>
+      <p:ext uri="{BB962C8B-B14F-4D97-AF65-F5344CB8AC3E}">
+        <p14:creationId xmlns:p14="http://schemas.microsoft.com/office/powerpoint/2010/main" val="2967805831"/>
+      </p:ext>
+    </p:extLst>
+  </p:cSld>
+  <p:clrMapOvr>
+    <a:masterClrMapping/>
+  </p:clrMapOvr>
+</p:sld>
+</file>
+
+<file path=ppt/slides/slide40.xml><?xml version="1.0" encoding="utf-8"?>
 <p:sld xmlns:a="http://schemas.openxmlformats.org/drawingml/2006/main" xmlns:r="http://schemas.openxmlformats.org/officeDocument/2006/relationships" xmlns:p="http://schemas.openxmlformats.org/presentationml/2006/main">
   <p:cSld>
     <p:spTree>
@@ -29234,240 +28372,7 @@
 </p:sld>
 </file>
 
-<file path=ppt/slides/slide4.xml><?xml version="1.0" encoding="utf-8"?>
-<p:sld xmlns:a="http://schemas.openxmlformats.org/drawingml/2006/main" xmlns:r="http://schemas.openxmlformats.org/officeDocument/2006/relationships" xmlns:p="http://schemas.openxmlformats.org/presentationml/2006/main">
-  <p:cSld>
-    <p:spTree>
-      <p:nvGrpSpPr>
-        <p:cNvPr id="1" name=""/>
-        <p:cNvGrpSpPr/>
-        <p:nvPr/>
-      </p:nvGrpSpPr>
-      <p:grpSpPr>
-        <a:xfrm>
-          <a:off x="0" y="0"/>
-          <a:ext cx="0" cy="0"/>
-          <a:chOff x="0" y="0"/>
-          <a:chExt cx="0" cy="0"/>
-        </a:xfrm>
-      </p:grpSpPr>
-      <p:sp>
-        <p:nvSpPr>
-          <p:cNvPr id="23553" name="Rectangle 2">
-            <a:extLst>
-              <a:ext uri="{FF2B5EF4-FFF2-40B4-BE49-F238E27FC236}">
-                <a16:creationId xmlns:a16="http://schemas.microsoft.com/office/drawing/2014/main" id="{16B6E0A5-7E04-5E46-88BE-BD8C78423D76}"/>
-              </a:ext>
-            </a:extLst>
-          </p:cNvPr>
-          <p:cNvSpPr>
-            <a:spLocks noGrp="1" noChangeArrowheads="1"/>
-          </p:cNvSpPr>
-          <p:nvPr>
-            <p:ph type="title"/>
-          </p:nvPr>
-        </p:nvSpPr>
-        <p:spPr/>
-        <p:txBody>
-          <a:bodyPr>
-            <a:normAutofit/>
-          </a:bodyPr>
-          <a:lstStyle/>
-          <a:p>
-            <a:pPr eaLnBrk="1" hangingPunct="1"/>
-            <a:r>
-              <a:rPr lang="en-US" altLang="sk-SK" dirty="0">
-                <a:ea typeface="ＭＳ Ｐゴシック" panose="020B0600070205080204" pitchFamily="34" charset="-128"/>
-              </a:rPr>
-              <a:t>Memory-Management Unit (</a:t>
-            </a:r>
-            <a:r>
-              <a:rPr lang="en-US" altLang="sk-SK" sz="2550" dirty="0">
-                <a:ea typeface="ＭＳ Ｐゴシック" panose="020B0600070205080204" pitchFamily="34" charset="-128"/>
-              </a:rPr>
-              <a:t>MMU</a:t>
-            </a:r>
-            <a:r>
-              <a:rPr lang="en-US" altLang="sk-SK" dirty="0">
-                <a:ea typeface="ＭＳ Ｐゴシック" panose="020B0600070205080204" pitchFamily="34" charset="-128"/>
-              </a:rPr>
-              <a:t>)</a:t>
-            </a:r>
-          </a:p>
-        </p:txBody>
-      </p:sp>
-      <p:sp>
-        <p:nvSpPr>
-          <p:cNvPr id="23554" name="Rectangle 3">
-            <a:extLst>
-              <a:ext uri="{FF2B5EF4-FFF2-40B4-BE49-F238E27FC236}">
-                <a16:creationId xmlns:a16="http://schemas.microsoft.com/office/drawing/2014/main" id="{9C5C4FF7-0137-B348-A1C7-422D06147EDF}"/>
-              </a:ext>
-            </a:extLst>
-          </p:cNvPr>
-          <p:cNvSpPr>
-            <a:spLocks noGrp="1" noChangeArrowheads="1"/>
-          </p:cNvSpPr>
-          <p:nvPr>
-            <p:ph idx="1"/>
-          </p:nvPr>
-        </p:nvSpPr>
-        <p:spPr/>
-        <p:txBody>
-          <a:bodyPr>
-            <a:normAutofit fontScale="92500" lnSpcReduction="20000"/>
-          </a:bodyPr>
-          <a:lstStyle/>
-          <a:p>
-            <a:r>
-              <a:rPr lang="en-US" altLang="sk-SK" dirty="0">
-                <a:ea typeface="ＭＳ Ｐゴシック" panose="020B0600070205080204" pitchFamily="34" charset="-128"/>
-              </a:rPr>
-              <a:t>Hardware device that at run time </a:t>
-            </a:r>
-            <a:r>
-              <a:rPr lang="en-US" altLang="sk-SK" u="sng" dirty="0">
-                <a:ea typeface="ＭＳ Ｐゴシック" panose="020B0600070205080204" pitchFamily="34" charset="-128"/>
-              </a:rPr>
-              <a:t>maps virtual to physical address</a:t>
-            </a:r>
-            <a:br>
-              <a:rPr lang="en-US" altLang="sk-SK" dirty="0">
-                <a:ea typeface="ＭＳ Ｐゴシック" panose="020B0600070205080204" pitchFamily="34" charset="-128"/>
-              </a:rPr>
-            </a:br>
-            <a:endParaRPr lang="en-US" altLang="sk-SK" dirty="0">
-              <a:ea typeface="ＭＳ Ｐゴシック" panose="020B0600070205080204" pitchFamily="34" charset="-128"/>
-            </a:endParaRPr>
-          </a:p>
-          <a:p>
-            <a:r>
-              <a:rPr lang="en-US" altLang="sk-SK" dirty="0">
-                <a:ea typeface="ＭＳ Ｐゴシック" panose="020B0600070205080204" pitchFamily="34" charset="-128"/>
-              </a:rPr>
-              <a:t>The user program deals with </a:t>
-            </a:r>
-            <a:r>
-              <a:rPr lang="en-US" altLang="sk-SK" i="1" dirty="0">
-                <a:ea typeface="ＭＳ Ｐゴシック" panose="020B0600070205080204" pitchFamily="34" charset="-128"/>
-              </a:rPr>
-              <a:t>logical</a:t>
-            </a:r>
-            <a:r>
-              <a:rPr lang="en-US" altLang="sk-SK" dirty="0">
-                <a:ea typeface="ＭＳ Ｐゴシック" panose="020B0600070205080204" pitchFamily="34" charset="-128"/>
-              </a:rPr>
-              <a:t> addresses; it never sees the </a:t>
-            </a:r>
-            <a:r>
-              <a:rPr lang="en-US" altLang="sk-SK" i="1" dirty="0">
-                <a:ea typeface="ＭＳ Ｐゴシック" panose="020B0600070205080204" pitchFamily="34" charset="-128"/>
-              </a:rPr>
-              <a:t>real</a:t>
-            </a:r>
-            <a:r>
-              <a:rPr lang="en-US" altLang="sk-SK" dirty="0">
-                <a:ea typeface="ＭＳ Ｐゴシック" panose="020B0600070205080204" pitchFamily="34" charset="-128"/>
-              </a:rPr>
-              <a:t> physical addresses</a:t>
-            </a:r>
-          </a:p>
-          <a:p>
-            <a:pPr lvl="1"/>
-            <a:r>
-              <a:rPr lang="en-US" altLang="sk-SK" dirty="0">
-                <a:ea typeface="ＭＳ Ｐゴシック" panose="020B0600070205080204" pitchFamily="34" charset="-128"/>
-              </a:rPr>
-              <a:t>Execution-time binding occurs when reference is made to location in memory</a:t>
-            </a:r>
-          </a:p>
-          <a:p>
-            <a:pPr lvl="1"/>
-            <a:r>
-              <a:rPr lang="en-US" altLang="sk-SK" dirty="0">
-                <a:ea typeface="ＭＳ Ｐゴシック" panose="020B0600070205080204" pitchFamily="34" charset="-128"/>
-              </a:rPr>
-              <a:t>Logical address bound to physical addresses</a:t>
-            </a:r>
-          </a:p>
-          <a:p>
-            <a:pPr lvl="1"/>
-            <a:endParaRPr lang="en-US" altLang="sk-SK" dirty="0">
-              <a:ea typeface="ＭＳ Ｐゴシック" panose="020B0600070205080204" pitchFamily="34" charset="-128"/>
-            </a:endParaRPr>
-          </a:p>
-          <a:p>
-            <a:r>
-              <a:rPr lang="sk-SK" dirty="0"/>
-              <a:t>požiadavky - správa pamäte</a:t>
-            </a:r>
-          </a:p>
-          <a:p>
-            <a:pPr marL="914400" lvl="1" indent="-457200">
-              <a:buFont typeface="+mj-lt"/>
-              <a:buAutoNum type="arabicPeriod"/>
-            </a:pPr>
-            <a:r>
-              <a:rPr lang="sk-SK" dirty="0"/>
-              <a:t>udržuje prehľad o využívaných a nevyužívaných priestoroch pamäti</a:t>
-            </a:r>
-          </a:p>
-          <a:p>
-            <a:pPr marL="914400" lvl="1" indent="-457200">
-              <a:buFont typeface="+mj-lt"/>
-              <a:buAutoNum type="arabicPeriod"/>
-            </a:pPr>
-            <a:r>
-              <a:rPr lang="sk-SK" dirty="0"/>
-              <a:t>rozhoduje o poradí plnenia požiadaviek</a:t>
-            </a:r>
-          </a:p>
-          <a:p>
-            <a:pPr marL="914400" lvl="1" indent="-457200">
-              <a:buFont typeface="+mj-lt"/>
-              <a:buAutoNum type="arabicPeriod"/>
-            </a:pPr>
-            <a:r>
-              <a:rPr lang="sk-SK" dirty="0"/>
-              <a:t>realizuje pridelenie pamäti pre procesy</a:t>
-            </a:r>
-          </a:p>
-          <a:p>
-            <a:pPr marL="914400" lvl="1" indent="-457200">
-              <a:buFont typeface="+mj-lt"/>
-              <a:buAutoNum type="arabicPeriod"/>
-            </a:pPr>
-            <a:r>
-              <a:rPr lang="sk-SK" dirty="0"/>
-              <a:t>Ochrana pamäti s využitím hardvérovej podpory</a:t>
-            </a:r>
-          </a:p>
-          <a:p>
-            <a:pPr marL="914400" lvl="1" indent="-457200">
-              <a:buFont typeface="+mj-lt"/>
-              <a:buAutoNum type="arabicPeriod"/>
-            </a:pPr>
-            <a:r>
-              <a:rPr lang="sk-SK" dirty="0"/>
-              <a:t>spolupracuje s ostatnými funkciami jadra</a:t>
-            </a:r>
-          </a:p>
-        </p:txBody>
-      </p:sp>
-    </p:spTree>
-    <p:extLst>
-      <p:ext uri="{BB962C8B-B14F-4D97-AF65-F5344CB8AC3E}">
-        <p14:creationId xmlns:p14="http://schemas.microsoft.com/office/powerpoint/2010/main" val="2967805831"/>
-      </p:ext>
-    </p:extLst>
-  </p:cSld>
-  <p:clrMapOvr>
-    <a:masterClrMapping/>
-  </p:clrMapOvr>
-</p:sld>
-</file>
-
-<file path=ppt/slides/slide40.xml><?xml version="1.0" encoding="utf-8"?>
+<file path=ppt/slides/slide41.xml><?xml version="1.0" encoding="utf-8"?>
 <p:sld xmlns:a="http://schemas.openxmlformats.org/drawingml/2006/main" xmlns:r="http://schemas.openxmlformats.org/officeDocument/2006/relationships" xmlns:p="http://schemas.openxmlformats.org/presentationml/2006/main">
   <p:cSld>
     <p:spTree>
@@ -31008,7 +29913,7 @@
 </p:sld>
 </file>
 
-<file path=ppt/slides/slide41.xml><?xml version="1.0" encoding="utf-8"?>
+<file path=ppt/slides/slide42.xml><?xml version="1.0" encoding="utf-8"?>
 <p:sld xmlns:a="http://schemas.openxmlformats.org/drawingml/2006/main" xmlns:r="http://schemas.openxmlformats.org/officeDocument/2006/relationships" xmlns:p="http://schemas.openxmlformats.org/presentationml/2006/main">
   <p:cSld>
     <p:spTree>
@@ -31136,7 +30041,7 @@
 </p:sld>
 </file>
 
-<file path=ppt/slides/slide42.xml><?xml version="1.0" encoding="utf-8"?>
+<file path=ppt/slides/slide43.xml><?xml version="1.0" encoding="utf-8"?>
 <p:sld xmlns:a="http://schemas.openxmlformats.org/drawingml/2006/main" xmlns:r="http://schemas.openxmlformats.org/officeDocument/2006/relationships" xmlns:p="http://schemas.openxmlformats.org/presentationml/2006/main">
   <p:cSld>
     <p:spTree>
@@ -31463,7 +30368,7 @@
 </p:sld>
 </file>
 
-<file path=ppt/slides/slide43.xml><?xml version="1.0" encoding="utf-8"?>
+<file path=ppt/slides/slide44.xml><?xml version="1.0" encoding="utf-8"?>
 <p:sld xmlns:a="http://schemas.openxmlformats.org/drawingml/2006/main" xmlns:r="http://schemas.openxmlformats.org/officeDocument/2006/relationships" xmlns:p="http://schemas.openxmlformats.org/presentationml/2006/main">
   <p:cSld>
     <p:spTree>
@@ -32007,7 +30912,7 @@
 </p:sld>
 </file>
 
-<file path=ppt/slides/slide44.xml><?xml version="1.0" encoding="utf-8"?>
+<file path=ppt/slides/slide45.xml><?xml version="1.0" encoding="utf-8"?>
 <p:sld xmlns:a="http://schemas.openxmlformats.org/drawingml/2006/main" xmlns:r="http://schemas.openxmlformats.org/officeDocument/2006/relationships" xmlns:p="http://schemas.openxmlformats.org/presentationml/2006/main">
   <p:cSld>
     <p:spTree>
@@ -32205,7 +31110,7 @@
 </p:sld>
 </file>
 
-<file path=ppt/slides/slide45.xml><?xml version="1.0" encoding="utf-8"?>
+<file path=ppt/slides/slide46.xml><?xml version="1.0" encoding="utf-8"?>
 <p:sld xmlns:a="http://schemas.openxmlformats.org/drawingml/2006/main" xmlns:r="http://schemas.openxmlformats.org/officeDocument/2006/relationships" xmlns:p="http://schemas.openxmlformats.org/presentationml/2006/main">
   <p:cSld>
     <p:spTree>
@@ -32764,7 +31669,7 @@
 </p:sld>
 </file>
 
-<file path=ppt/slides/slide46.xml><?xml version="1.0" encoding="utf-8"?>
+<file path=ppt/slides/slide47.xml><?xml version="1.0" encoding="utf-8"?>
 <p:sld xmlns:a="http://schemas.openxmlformats.org/drawingml/2006/main" xmlns:r="http://schemas.openxmlformats.org/officeDocument/2006/relationships" xmlns:p="http://schemas.openxmlformats.org/presentationml/2006/main">
   <p:cSld>
     <p:spTree>
@@ -33180,7 +32085,7 @@
 </p:sld>
 </file>
 
-<file path=ppt/slides/slide47.xml><?xml version="1.0" encoding="utf-8"?>
+<file path=ppt/slides/slide48.xml><?xml version="1.0" encoding="utf-8"?>
 <p:sld xmlns:a="http://schemas.openxmlformats.org/drawingml/2006/main" xmlns:r="http://schemas.openxmlformats.org/officeDocument/2006/relationships" xmlns:p="http://schemas.openxmlformats.org/presentationml/2006/main">
   <p:cSld>
     <p:spTree>
@@ -34038,7 +32943,7 @@
 </p:sld>
 </file>
 
-<file path=ppt/slides/slide48.xml><?xml version="1.0" encoding="utf-8"?>
+<file path=ppt/slides/slide49.xml><?xml version="1.0" encoding="utf-8"?>
 <p:sld xmlns:a="http://schemas.openxmlformats.org/drawingml/2006/main" xmlns:r="http://schemas.openxmlformats.org/officeDocument/2006/relationships" xmlns:p="http://schemas.openxmlformats.org/presentationml/2006/main">
   <p:cSld>
     <p:spTree>
@@ -34162,915 +33067,6 @@
     <p:extLst>
       <p:ext uri="{BB962C8B-B14F-4D97-AF65-F5344CB8AC3E}">
         <p14:creationId xmlns:p14="http://schemas.microsoft.com/office/powerpoint/2010/main" val="477686888"/>
-      </p:ext>
-    </p:extLst>
-  </p:cSld>
-  <p:clrMapOvr>
-    <a:masterClrMapping/>
-  </p:clrMapOvr>
-</p:sld>
-</file>
-
-<file path=ppt/slides/slide49.xml><?xml version="1.0" encoding="utf-8"?>
-<p:sld xmlns:a="http://schemas.openxmlformats.org/drawingml/2006/main" xmlns:r="http://schemas.openxmlformats.org/officeDocument/2006/relationships" xmlns:p="http://schemas.openxmlformats.org/presentationml/2006/main">
-  <p:cSld>
-    <p:spTree>
-      <p:nvGrpSpPr>
-        <p:cNvPr id="1" name=""/>
-        <p:cNvGrpSpPr/>
-        <p:nvPr/>
-      </p:nvGrpSpPr>
-      <p:grpSpPr>
-        <a:xfrm>
-          <a:off x="0" y="0"/>
-          <a:ext cx="0" cy="0"/>
-          <a:chOff x="0" y="0"/>
-          <a:chExt cx="0" cy="0"/>
-        </a:xfrm>
-      </p:grpSpPr>
-      <p:sp>
-        <p:nvSpPr>
-          <p:cNvPr id="78849" name="Rectangle 2">
-            <a:extLst>
-              <a:ext uri="{FF2B5EF4-FFF2-40B4-BE49-F238E27FC236}">
-                <a16:creationId xmlns:a16="http://schemas.microsoft.com/office/drawing/2014/main" id="{773F6BB0-444A-754E-88F3-528CC320C9EF}"/>
-              </a:ext>
-            </a:extLst>
-          </p:cNvPr>
-          <p:cNvSpPr>
-            <a:spLocks noGrp="1" noChangeArrowheads="1"/>
-          </p:cNvSpPr>
-          <p:nvPr>
-            <p:ph type="title"/>
-          </p:nvPr>
-        </p:nvSpPr>
-        <p:spPr/>
-        <p:txBody>
-          <a:bodyPr/>
-          <a:lstStyle/>
-          <a:p>
-            <a:pPr eaLnBrk="1" hangingPunct="1"/>
-            <a:r>
-              <a:rPr lang="en-US" altLang="sk-SK" dirty="0">
-                <a:ea typeface="ＭＳ Ｐゴシック" panose="020B0600070205080204" pitchFamily="34" charset="-128"/>
-              </a:rPr>
-              <a:t>Effective Memory Access Time -EMAT</a:t>
-            </a:r>
-          </a:p>
-        </p:txBody>
-      </p:sp>
-      <p:sp>
-        <p:nvSpPr>
-          <p:cNvPr id="78850" name="Rectangle 3">
-            <a:extLst>
-              <a:ext uri="{FF2B5EF4-FFF2-40B4-BE49-F238E27FC236}">
-                <a16:creationId xmlns:a16="http://schemas.microsoft.com/office/drawing/2014/main" id="{E450E446-F97B-7746-8C99-B7DA5BAAC109}"/>
-              </a:ext>
-            </a:extLst>
-          </p:cNvPr>
-          <p:cNvSpPr>
-            <a:spLocks noGrp="1" noChangeArrowheads="1"/>
-          </p:cNvSpPr>
-          <p:nvPr>
-            <p:ph idx="1"/>
-          </p:nvPr>
-        </p:nvSpPr>
-        <p:spPr>
-          <a:xfrm>
-            <a:off x="838200" y="1333500"/>
-            <a:ext cx="10515600" cy="4843463"/>
-          </a:xfrm>
-        </p:spPr>
-        <p:txBody>
-          <a:bodyPr>
-            <a:normAutofit fontScale="85000" lnSpcReduction="20000"/>
-          </a:bodyPr>
-          <a:lstStyle/>
-          <a:p>
-            <a:pPr marL="457200" lvl="1" indent="0">
-              <a:buNone/>
-              <a:tabLst>
-                <a:tab pos="2210991" algn="l"/>
-                <a:tab pos="2751535" algn="l"/>
-              </a:tabLst>
-            </a:pPr>
-            <a:r>
-              <a:rPr lang="en-US" altLang="sk-SK" dirty="0" err="1">
-                <a:ea typeface="ＭＳ Ｐゴシック" panose="020B0600070205080204" pitchFamily="34" charset="-128"/>
-                <a:sym typeface="Symbol" pitchFamily="2" charset="2"/>
-              </a:rPr>
-              <a:t>Predstavme</a:t>
-            </a:r>
-            <a:r>
-              <a:rPr lang="en-US" altLang="sk-SK" dirty="0">
-                <a:ea typeface="ＭＳ Ｐゴシック" panose="020B0600070205080204" pitchFamily="34" charset="-128"/>
-                <a:sym typeface="Symbol" pitchFamily="2" charset="2"/>
-              </a:rPr>
-              <a:t> </a:t>
-            </a:r>
-            <a:r>
-              <a:rPr lang="en-US" altLang="sk-SK" dirty="0" err="1">
-                <a:ea typeface="ＭＳ Ｐゴシック" panose="020B0600070205080204" pitchFamily="34" charset="-128"/>
-                <a:sym typeface="Symbol" pitchFamily="2" charset="2"/>
-              </a:rPr>
-              <a:t>si</a:t>
-            </a:r>
-            <a:r>
-              <a:rPr lang="en-US" altLang="sk-SK" dirty="0">
-                <a:ea typeface="ＭＳ Ｐゴシック" panose="020B0600070205080204" pitchFamily="34" charset="-128"/>
-                <a:sym typeface="Symbol" pitchFamily="2" charset="2"/>
-              </a:rPr>
-              <a:t>, </a:t>
-            </a:r>
-            <a:r>
-              <a:rPr lang="en-US" altLang="sk-SK" dirty="0" err="1">
-                <a:ea typeface="ＭＳ Ｐゴシック" panose="020B0600070205080204" pitchFamily="34" charset="-128"/>
-                <a:sym typeface="Symbol" pitchFamily="2" charset="2"/>
-              </a:rPr>
-              <a:t>že</a:t>
-            </a:r>
-            <a:r>
-              <a:rPr lang="en-US" altLang="sk-SK" dirty="0">
-                <a:ea typeface="ＭＳ Ｐゴシック" panose="020B0600070205080204" pitchFamily="34" charset="-128"/>
-                <a:sym typeface="Symbol" pitchFamily="2" charset="2"/>
-              </a:rPr>
-              <a:t> </a:t>
-            </a:r>
-            <a:r>
-              <a:rPr lang="en-US" altLang="sk-SK" dirty="0" err="1">
-                <a:ea typeface="ＭＳ Ｐゴシック" panose="020B0600070205080204" pitchFamily="34" charset="-128"/>
-                <a:sym typeface="Symbol" pitchFamily="2" charset="2"/>
-              </a:rPr>
-              <a:t>máme</a:t>
-            </a:r>
-            <a:r>
-              <a:rPr lang="en-US" altLang="sk-SK" dirty="0">
-                <a:ea typeface="ＭＳ Ｐゴシック" panose="020B0600070205080204" pitchFamily="34" charset="-128"/>
-                <a:sym typeface="Symbol" pitchFamily="2" charset="2"/>
-              </a:rPr>
-              <a:t> </a:t>
-            </a:r>
-            <a:r>
-              <a:rPr lang="en-US" altLang="sk-SK" dirty="0" err="1">
-                <a:ea typeface="ＭＳ Ｐゴシック" panose="020B0600070205080204" pitchFamily="34" charset="-128"/>
-                <a:sym typeface="Symbol" pitchFamily="2" charset="2"/>
-              </a:rPr>
-              <a:t>tieto</a:t>
-            </a:r>
-            <a:r>
-              <a:rPr lang="en-US" altLang="sk-SK" dirty="0">
-                <a:ea typeface="ＭＳ Ｐゴシック" panose="020B0600070205080204" pitchFamily="34" charset="-128"/>
-                <a:sym typeface="Symbol" pitchFamily="2" charset="2"/>
-              </a:rPr>
-              <a:t> </a:t>
-            </a:r>
-            <a:r>
-              <a:rPr lang="en-US" altLang="sk-SK" dirty="0" err="1">
-                <a:ea typeface="ＭＳ Ｐゴシック" panose="020B0600070205080204" pitchFamily="34" charset="-128"/>
-                <a:sym typeface="Symbol" pitchFamily="2" charset="2"/>
-              </a:rPr>
-              <a:t>hodnoty</a:t>
-            </a:r>
-            <a:r>
-              <a:rPr lang="en-US" altLang="sk-SK" dirty="0">
-                <a:ea typeface="ＭＳ Ｐゴシック" panose="020B0600070205080204" pitchFamily="34" charset="-128"/>
-                <a:sym typeface="Symbol" pitchFamily="2" charset="2"/>
-              </a:rPr>
-              <a:t>:</a:t>
-            </a:r>
-          </a:p>
-          <a:p>
-            <a:pPr lvl="1">
-              <a:tabLst>
-                <a:tab pos="2210991" algn="l"/>
-                <a:tab pos="2751535" algn="l"/>
-              </a:tabLst>
-            </a:pPr>
-            <a:r>
-              <a:rPr lang="en-US" altLang="sk-SK" dirty="0">
-                <a:ea typeface="ＭＳ Ｐゴシック" panose="020B0600070205080204" pitchFamily="34" charset="-128"/>
-                <a:sym typeface="Symbol" pitchFamily="2" charset="2"/>
-              </a:rPr>
-              <a:t>P(TLB) = 0,95 (95% </a:t>
-            </a:r>
-            <a:r>
-              <a:rPr lang="en-US" altLang="sk-SK" dirty="0" err="1">
-                <a:ea typeface="ＭＳ Ｐゴシック" panose="020B0600070205080204" pitchFamily="34" charset="-128"/>
-                <a:sym typeface="Symbol" pitchFamily="2" charset="2"/>
-              </a:rPr>
-              <a:t>pravdepodobnosť</a:t>
-            </a:r>
-            <a:r>
-              <a:rPr lang="en-US" altLang="sk-SK" dirty="0">
-                <a:ea typeface="ＭＳ Ｐゴシック" panose="020B0600070205080204" pitchFamily="34" charset="-128"/>
-                <a:sym typeface="Symbol" pitchFamily="2" charset="2"/>
-              </a:rPr>
-              <a:t> </a:t>
-            </a:r>
-            <a:r>
-              <a:rPr lang="en-US" altLang="sk-SK" dirty="0" err="1">
-                <a:ea typeface="ＭＳ Ｐゴシック" panose="020B0600070205080204" pitchFamily="34" charset="-128"/>
-                <a:sym typeface="Symbol" pitchFamily="2" charset="2"/>
-              </a:rPr>
-              <a:t>nálezu</a:t>
-            </a:r>
-            <a:r>
-              <a:rPr lang="en-US" altLang="sk-SK" dirty="0">
-                <a:ea typeface="ＭＳ Ｐゴシック" panose="020B0600070205080204" pitchFamily="34" charset="-128"/>
-                <a:sym typeface="Symbol" pitchFamily="2" charset="2"/>
-              </a:rPr>
-              <a:t> v TLB)</a:t>
-            </a:r>
-          </a:p>
-          <a:p>
-            <a:pPr lvl="1">
-              <a:tabLst>
-                <a:tab pos="2210991" algn="l"/>
-                <a:tab pos="2751535" algn="l"/>
-              </a:tabLst>
-            </a:pPr>
-            <a:r>
-              <a:rPr lang="en-US" altLang="sk-SK" dirty="0">
-                <a:ea typeface="ＭＳ Ｐゴシック" panose="020B0600070205080204" pitchFamily="34" charset="-128"/>
-                <a:sym typeface="Symbol" pitchFamily="2" charset="2"/>
-              </a:rPr>
-              <a:t>P(page) = 0,99 (99% </a:t>
-            </a:r>
-            <a:r>
-              <a:rPr lang="en-US" altLang="sk-SK" dirty="0" err="1">
-                <a:ea typeface="ＭＳ Ｐゴシック" panose="020B0600070205080204" pitchFamily="34" charset="-128"/>
-                <a:sym typeface="Symbol" pitchFamily="2" charset="2"/>
-              </a:rPr>
-              <a:t>pravdepodobnosť</a:t>
-            </a:r>
-            <a:r>
-              <a:rPr lang="en-US" altLang="sk-SK" dirty="0">
-                <a:ea typeface="ＭＳ Ｐゴシック" panose="020B0600070205080204" pitchFamily="34" charset="-128"/>
-                <a:sym typeface="Symbol" pitchFamily="2" charset="2"/>
-              </a:rPr>
-              <a:t>, </a:t>
-            </a:r>
-            <a:r>
-              <a:rPr lang="en-US" altLang="sk-SK" dirty="0" err="1">
-                <a:ea typeface="ＭＳ Ｐゴシック" panose="020B0600070205080204" pitchFamily="34" charset="-128"/>
-                <a:sym typeface="Symbol" pitchFamily="2" charset="2"/>
-              </a:rPr>
-              <a:t>že</a:t>
-            </a:r>
-            <a:r>
-              <a:rPr lang="en-US" altLang="sk-SK" dirty="0">
-                <a:ea typeface="ＭＳ Ｐゴシック" panose="020B0600070205080204" pitchFamily="34" charset="-128"/>
-                <a:sym typeface="Symbol" pitchFamily="2" charset="2"/>
-              </a:rPr>
-              <a:t> </a:t>
-            </a:r>
-            <a:r>
-              <a:rPr lang="en-US" altLang="sk-SK" dirty="0" err="1">
-                <a:ea typeface="ＭＳ Ｐゴシック" panose="020B0600070205080204" pitchFamily="34" charset="-128"/>
-                <a:sym typeface="Symbol" pitchFamily="2" charset="2"/>
-              </a:rPr>
-              <a:t>stránka</a:t>
-            </a:r>
-            <a:r>
-              <a:rPr lang="en-US" altLang="sk-SK" dirty="0">
-                <a:ea typeface="ＭＳ Ｐゴシック" panose="020B0600070205080204" pitchFamily="34" charset="-128"/>
-                <a:sym typeface="Symbol" pitchFamily="2" charset="2"/>
-              </a:rPr>
-              <a:t> </a:t>
-            </a:r>
-            <a:r>
-              <a:rPr lang="en-US" altLang="sk-SK" dirty="0" err="1">
-                <a:ea typeface="ＭＳ Ｐゴシック" panose="020B0600070205080204" pitchFamily="34" charset="-128"/>
-                <a:sym typeface="Symbol" pitchFamily="2" charset="2"/>
-              </a:rPr>
-              <a:t>sa</a:t>
-            </a:r>
-            <a:r>
-              <a:rPr lang="en-US" altLang="sk-SK" dirty="0">
-                <a:ea typeface="ＭＳ Ｐゴシック" panose="020B0600070205080204" pitchFamily="34" charset="-128"/>
-                <a:sym typeface="Symbol" pitchFamily="2" charset="2"/>
-              </a:rPr>
-              <a:t> </a:t>
-            </a:r>
-            <a:r>
-              <a:rPr lang="en-US" altLang="sk-SK" dirty="0" err="1">
-                <a:ea typeface="ＭＳ Ｐゴシック" panose="020B0600070205080204" pitchFamily="34" charset="-128"/>
-                <a:sym typeface="Symbol" pitchFamily="2" charset="2"/>
-              </a:rPr>
-              <a:t>nachádza</a:t>
-            </a:r>
-            <a:r>
-              <a:rPr lang="en-US" altLang="sk-SK" dirty="0">
-                <a:ea typeface="ＭＳ Ｐゴシック" panose="020B0600070205080204" pitchFamily="34" charset="-128"/>
-                <a:sym typeface="Symbol" pitchFamily="2" charset="2"/>
-              </a:rPr>
-              <a:t> v </a:t>
-            </a:r>
-            <a:r>
-              <a:rPr lang="en-US" altLang="sk-SK" dirty="0" err="1">
-                <a:ea typeface="ＭＳ Ｐゴシック" panose="020B0600070205080204" pitchFamily="34" charset="-128"/>
-                <a:sym typeface="Symbol" pitchFamily="2" charset="2"/>
-              </a:rPr>
-              <a:t>hlavnej</a:t>
-            </a:r>
-            <a:r>
-              <a:rPr lang="en-US" altLang="sk-SK" dirty="0">
-                <a:ea typeface="ＭＳ Ｐゴシック" panose="020B0600070205080204" pitchFamily="34" charset="-128"/>
-                <a:sym typeface="Symbol" pitchFamily="2" charset="2"/>
-              </a:rPr>
-              <a:t> </a:t>
-            </a:r>
-            <a:r>
-              <a:rPr lang="en-US" altLang="sk-SK" dirty="0" err="1">
-                <a:ea typeface="ＭＳ Ｐゴシック" panose="020B0600070205080204" pitchFamily="34" charset="-128"/>
-                <a:sym typeface="Symbol" pitchFamily="2" charset="2"/>
-              </a:rPr>
-              <a:t>pamäti</a:t>
-            </a:r>
-            <a:r>
-              <a:rPr lang="en-US" altLang="sk-SK" dirty="0">
-                <a:ea typeface="ＭＳ Ｐゴシック" panose="020B0600070205080204" pitchFamily="34" charset="-128"/>
-                <a:sym typeface="Symbol" pitchFamily="2" charset="2"/>
-              </a:rPr>
-              <a:t>)</a:t>
-            </a:r>
-          </a:p>
-          <a:p>
-            <a:pPr lvl="1">
-              <a:tabLst>
-                <a:tab pos="2210991" algn="l"/>
-                <a:tab pos="2751535" algn="l"/>
-              </a:tabLst>
-            </a:pPr>
-            <a:r>
-              <a:rPr lang="en-US" altLang="sk-SK" dirty="0">
-                <a:ea typeface="ＭＳ Ｐゴシック" panose="020B0600070205080204" pitchFamily="34" charset="-128"/>
-                <a:sym typeface="Symbol" pitchFamily="2" charset="2"/>
-              </a:rPr>
-              <a:t>T(TLB) = 10 ns (</a:t>
-            </a:r>
-            <a:r>
-              <a:rPr lang="en-US" altLang="sk-SK" dirty="0" err="1">
-                <a:ea typeface="ＭＳ Ｐゴシック" panose="020B0600070205080204" pitchFamily="34" charset="-128"/>
-                <a:sym typeface="Symbol" pitchFamily="2" charset="2"/>
-              </a:rPr>
-              <a:t>čas</a:t>
-            </a:r>
-            <a:r>
-              <a:rPr lang="en-US" altLang="sk-SK" dirty="0">
-                <a:ea typeface="ＭＳ Ｐゴシック" panose="020B0600070205080204" pitchFamily="34" charset="-128"/>
-                <a:sym typeface="Symbol" pitchFamily="2" charset="2"/>
-              </a:rPr>
-              <a:t> </a:t>
-            </a:r>
-            <a:r>
-              <a:rPr lang="en-US" altLang="sk-SK" dirty="0" err="1">
-                <a:ea typeface="ＭＳ Ｐゴシック" panose="020B0600070205080204" pitchFamily="34" charset="-128"/>
-                <a:sym typeface="Symbol" pitchFamily="2" charset="2"/>
-              </a:rPr>
-              <a:t>potrebný</a:t>
-            </a:r>
-            <a:r>
-              <a:rPr lang="en-US" altLang="sk-SK" dirty="0">
-                <a:ea typeface="ＭＳ Ｐゴシック" panose="020B0600070205080204" pitchFamily="34" charset="-128"/>
-                <a:sym typeface="Symbol" pitchFamily="2" charset="2"/>
-              </a:rPr>
-              <a:t> </a:t>
-            </a:r>
-            <a:r>
-              <a:rPr lang="en-US" altLang="sk-SK" dirty="0" err="1">
-                <a:ea typeface="ＭＳ Ｐゴシック" panose="020B0600070205080204" pitchFamily="34" charset="-128"/>
-                <a:sym typeface="Symbol" pitchFamily="2" charset="2"/>
-              </a:rPr>
-              <a:t>na</a:t>
-            </a:r>
-            <a:r>
-              <a:rPr lang="en-US" altLang="sk-SK" dirty="0">
-                <a:ea typeface="ＭＳ Ｐゴシック" panose="020B0600070205080204" pitchFamily="34" charset="-128"/>
-                <a:sym typeface="Symbol" pitchFamily="2" charset="2"/>
-              </a:rPr>
-              <a:t> </a:t>
-            </a:r>
-            <a:r>
-              <a:rPr lang="en-US" altLang="sk-SK" dirty="0" err="1">
-                <a:ea typeface="ＭＳ Ｐゴシック" panose="020B0600070205080204" pitchFamily="34" charset="-128"/>
-                <a:sym typeface="Symbol" pitchFamily="2" charset="2"/>
-              </a:rPr>
-              <a:t>prístup</a:t>
-            </a:r>
-            <a:r>
-              <a:rPr lang="en-US" altLang="sk-SK" dirty="0">
-                <a:ea typeface="ＭＳ Ｐゴシック" panose="020B0600070205080204" pitchFamily="34" charset="-128"/>
-                <a:sym typeface="Symbol" pitchFamily="2" charset="2"/>
-              </a:rPr>
-              <a:t> k TLB)</a:t>
-            </a:r>
-          </a:p>
-          <a:p>
-            <a:pPr lvl="1">
-              <a:tabLst>
-                <a:tab pos="2210991" algn="l"/>
-                <a:tab pos="2751535" algn="l"/>
-              </a:tabLst>
-            </a:pPr>
-            <a:r>
-              <a:rPr lang="en-US" altLang="sk-SK" dirty="0">
-                <a:ea typeface="ＭＳ Ｐゴシック" panose="020B0600070205080204" pitchFamily="34" charset="-128"/>
-                <a:sym typeface="Symbol" pitchFamily="2" charset="2"/>
-              </a:rPr>
-              <a:t>T(Memory) = 100 ns (</a:t>
-            </a:r>
-            <a:r>
-              <a:rPr lang="en-US" altLang="sk-SK" dirty="0" err="1">
-                <a:ea typeface="ＭＳ Ｐゴシック" panose="020B0600070205080204" pitchFamily="34" charset="-128"/>
-                <a:sym typeface="Symbol" pitchFamily="2" charset="2"/>
-              </a:rPr>
-              <a:t>čas</a:t>
-            </a:r>
-            <a:r>
-              <a:rPr lang="en-US" altLang="sk-SK" dirty="0">
-                <a:ea typeface="ＭＳ Ｐゴシック" panose="020B0600070205080204" pitchFamily="34" charset="-128"/>
-                <a:sym typeface="Symbol" pitchFamily="2" charset="2"/>
-              </a:rPr>
-              <a:t> </a:t>
-            </a:r>
-            <a:r>
-              <a:rPr lang="en-US" altLang="sk-SK" dirty="0" err="1">
-                <a:ea typeface="ＭＳ Ｐゴシック" panose="020B0600070205080204" pitchFamily="34" charset="-128"/>
-                <a:sym typeface="Symbol" pitchFamily="2" charset="2"/>
-              </a:rPr>
-              <a:t>potrebný</a:t>
-            </a:r>
-            <a:r>
-              <a:rPr lang="en-US" altLang="sk-SK" dirty="0">
-                <a:ea typeface="ＭＳ Ｐゴシック" panose="020B0600070205080204" pitchFamily="34" charset="-128"/>
-                <a:sym typeface="Symbol" pitchFamily="2" charset="2"/>
-              </a:rPr>
-              <a:t> </a:t>
-            </a:r>
-            <a:r>
-              <a:rPr lang="en-US" altLang="sk-SK" dirty="0" err="1">
-                <a:ea typeface="ＭＳ Ｐゴシック" panose="020B0600070205080204" pitchFamily="34" charset="-128"/>
-                <a:sym typeface="Symbol" pitchFamily="2" charset="2"/>
-              </a:rPr>
-              <a:t>na</a:t>
-            </a:r>
-            <a:r>
-              <a:rPr lang="en-US" altLang="sk-SK" dirty="0">
-                <a:ea typeface="ＭＳ Ｐゴシック" panose="020B0600070205080204" pitchFamily="34" charset="-128"/>
-                <a:sym typeface="Symbol" pitchFamily="2" charset="2"/>
-              </a:rPr>
-              <a:t> </a:t>
-            </a:r>
-            <a:r>
-              <a:rPr lang="en-US" altLang="sk-SK" dirty="0" err="1">
-                <a:ea typeface="ＭＳ Ｐゴシック" panose="020B0600070205080204" pitchFamily="34" charset="-128"/>
-                <a:sym typeface="Symbol" pitchFamily="2" charset="2"/>
-              </a:rPr>
-              <a:t>prístup</a:t>
-            </a:r>
-            <a:r>
-              <a:rPr lang="en-US" altLang="sk-SK" dirty="0">
-                <a:ea typeface="ＭＳ Ｐゴシック" panose="020B0600070205080204" pitchFamily="34" charset="-128"/>
-                <a:sym typeface="Symbol" pitchFamily="2" charset="2"/>
-              </a:rPr>
-              <a:t> k </a:t>
-            </a:r>
-            <a:r>
-              <a:rPr lang="en-US" altLang="sk-SK" dirty="0" err="1">
-                <a:ea typeface="ＭＳ Ｐゴシック" panose="020B0600070205080204" pitchFamily="34" charset="-128"/>
-                <a:sym typeface="Symbol" pitchFamily="2" charset="2"/>
-              </a:rPr>
-              <a:t>hlavnej</a:t>
-            </a:r>
-            <a:r>
-              <a:rPr lang="en-US" altLang="sk-SK" dirty="0">
-                <a:ea typeface="ＭＳ Ｐゴシック" panose="020B0600070205080204" pitchFamily="34" charset="-128"/>
-                <a:sym typeface="Symbol" pitchFamily="2" charset="2"/>
-              </a:rPr>
-              <a:t> </a:t>
-            </a:r>
-            <a:r>
-              <a:rPr lang="en-US" altLang="sk-SK" dirty="0" err="1">
-                <a:ea typeface="ＭＳ Ｐゴシック" panose="020B0600070205080204" pitchFamily="34" charset="-128"/>
-                <a:sym typeface="Symbol" pitchFamily="2" charset="2"/>
-              </a:rPr>
-              <a:t>pamäti</a:t>
-            </a:r>
-            <a:r>
-              <a:rPr lang="en-US" altLang="sk-SK" dirty="0">
-                <a:ea typeface="ＭＳ Ｐゴシック" panose="020B0600070205080204" pitchFamily="34" charset="-128"/>
-                <a:sym typeface="Symbol" pitchFamily="2" charset="2"/>
-              </a:rPr>
-              <a:t>)</a:t>
-            </a:r>
-          </a:p>
-          <a:p>
-            <a:pPr lvl="1">
-              <a:tabLst>
-                <a:tab pos="2210991" algn="l"/>
-                <a:tab pos="2751535" algn="l"/>
-              </a:tabLst>
-            </a:pPr>
-            <a:r>
-              <a:rPr lang="en-US" altLang="sk-SK" dirty="0">
-                <a:ea typeface="ＭＳ Ｐゴシック" panose="020B0600070205080204" pitchFamily="34" charset="-128"/>
-                <a:sym typeface="Symbol" pitchFamily="2" charset="2"/>
-              </a:rPr>
-              <a:t>Page Fault Penalty = 8 </a:t>
-            </a:r>
-            <a:r>
-              <a:rPr lang="en-US" altLang="sk-SK" dirty="0" err="1">
-                <a:ea typeface="ＭＳ Ｐゴシック" panose="020B0600070205080204" pitchFamily="34" charset="-128"/>
-                <a:sym typeface="Symbol" pitchFamily="2" charset="2"/>
-              </a:rPr>
-              <a:t>ms</a:t>
-            </a:r>
-            <a:r>
-              <a:rPr lang="en-US" altLang="sk-SK" dirty="0">
-                <a:ea typeface="ＭＳ Ｐゴシック" panose="020B0600070205080204" pitchFamily="34" charset="-128"/>
-                <a:sym typeface="Symbol" pitchFamily="2" charset="2"/>
-              </a:rPr>
-              <a:t> (</a:t>
-            </a:r>
-            <a:r>
-              <a:rPr lang="en-US" altLang="sk-SK" dirty="0" err="1">
-                <a:ea typeface="ＭＳ Ｐゴシック" panose="020B0600070205080204" pitchFamily="34" charset="-128"/>
-                <a:sym typeface="Symbol" pitchFamily="2" charset="2"/>
-              </a:rPr>
-              <a:t>čas</a:t>
-            </a:r>
-            <a:r>
-              <a:rPr lang="en-US" altLang="sk-SK" dirty="0">
-                <a:ea typeface="ＭＳ Ｐゴシック" panose="020B0600070205080204" pitchFamily="34" charset="-128"/>
-                <a:sym typeface="Symbol" pitchFamily="2" charset="2"/>
-              </a:rPr>
-              <a:t> </a:t>
-            </a:r>
-            <a:r>
-              <a:rPr lang="en-US" altLang="sk-SK" dirty="0" err="1">
-                <a:ea typeface="ＭＳ Ｐゴシック" panose="020B0600070205080204" pitchFamily="34" charset="-128"/>
-                <a:sym typeface="Symbol" pitchFamily="2" charset="2"/>
-              </a:rPr>
-              <a:t>potrebný</a:t>
-            </a:r>
-            <a:r>
-              <a:rPr lang="en-US" altLang="sk-SK" dirty="0">
-                <a:ea typeface="ＭＳ Ｐゴシック" panose="020B0600070205080204" pitchFamily="34" charset="-128"/>
-                <a:sym typeface="Symbol" pitchFamily="2" charset="2"/>
-              </a:rPr>
-              <a:t> </a:t>
-            </a:r>
-            <a:r>
-              <a:rPr lang="en-US" altLang="sk-SK" dirty="0" err="1">
-                <a:ea typeface="ＭＳ Ｐゴシック" panose="020B0600070205080204" pitchFamily="34" charset="-128"/>
-                <a:sym typeface="Symbol" pitchFamily="2" charset="2"/>
-              </a:rPr>
-              <a:t>na</a:t>
-            </a:r>
-            <a:r>
-              <a:rPr lang="en-US" altLang="sk-SK" dirty="0">
-                <a:ea typeface="ＭＳ Ｐゴシック" panose="020B0600070205080204" pitchFamily="34" charset="-128"/>
-                <a:sym typeface="Symbol" pitchFamily="2" charset="2"/>
-              </a:rPr>
-              <a:t> </a:t>
-            </a:r>
-            <a:r>
-              <a:rPr lang="en-US" altLang="sk-SK" dirty="0" err="1">
-                <a:ea typeface="ＭＳ Ｐゴシック" panose="020B0600070205080204" pitchFamily="34" charset="-128"/>
-                <a:sym typeface="Symbol" pitchFamily="2" charset="2"/>
-              </a:rPr>
-              <a:t>načítanie</a:t>
-            </a:r>
-            <a:r>
-              <a:rPr lang="en-US" altLang="sk-SK" dirty="0">
-                <a:ea typeface="ＭＳ Ｐゴシック" panose="020B0600070205080204" pitchFamily="34" charset="-128"/>
-                <a:sym typeface="Symbol" pitchFamily="2" charset="2"/>
-              </a:rPr>
-              <a:t> </a:t>
-            </a:r>
-            <a:r>
-              <a:rPr lang="en-US" altLang="sk-SK" dirty="0" err="1">
-                <a:ea typeface="ＭＳ Ｐゴシック" panose="020B0600070205080204" pitchFamily="34" charset="-128"/>
-                <a:sym typeface="Symbol" pitchFamily="2" charset="2"/>
-              </a:rPr>
-              <a:t>stránky</a:t>
-            </a:r>
-            <a:r>
-              <a:rPr lang="en-US" altLang="sk-SK" dirty="0">
-                <a:ea typeface="ＭＳ Ｐゴシック" panose="020B0600070205080204" pitchFamily="34" charset="-128"/>
-                <a:sym typeface="Symbol" pitchFamily="2" charset="2"/>
-              </a:rPr>
-              <a:t> z </a:t>
-            </a:r>
-            <a:r>
-              <a:rPr lang="en-US" altLang="sk-SK" dirty="0" err="1">
-                <a:ea typeface="ＭＳ Ｐゴシック" panose="020B0600070205080204" pitchFamily="34" charset="-128"/>
-                <a:sym typeface="Symbol" pitchFamily="2" charset="2"/>
-              </a:rPr>
-              <a:t>diskového</a:t>
-            </a:r>
-            <a:r>
-              <a:rPr lang="en-US" altLang="sk-SK" dirty="0">
-                <a:ea typeface="ＭＳ Ｐゴシック" panose="020B0600070205080204" pitchFamily="34" charset="-128"/>
-                <a:sym typeface="Symbol" pitchFamily="2" charset="2"/>
-              </a:rPr>
-              <a:t> </a:t>
-            </a:r>
-            <a:r>
-              <a:rPr lang="en-US" altLang="sk-SK" dirty="0" err="1">
-                <a:ea typeface="ＭＳ Ｐゴシック" panose="020B0600070205080204" pitchFamily="34" charset="-128"/>
-                <a:sym typeface="Symbol" pitchFamily="2" charset="2"/>
-              </a:rPr>
-              <a:t>úložiska</a:t>
-            </a:r>
-            <a:r>
-              <a:rPr lang="en-US" altLang="sk-SK" dirty="0">
-                <a:ea typeface="ＭＳ Ｐゴシック" panose="020B0600070205080204" pitchFamily="34" charset="-128"/>
-                <a:sym typeface="Symbol" pitchFamily="2" charset="2"/>
-              </a:rPr>
-              <a:t>)</a:t>
-            </a:r>
-          </a:p>
-          <a:p>
-            <a:pPr marL="457200" lvl="1" indent="0">
-              <a:buNone/>
-              <a:tabLst>
-                <a:tab pos="2210991" algn="l"/>
-                <a:tab pos="2751535" algn="l"/>
-              </a:tabLst>
-            </a:pPr>
-            <a:endParaRPr lang="en-US" altLang="sk-SK" dirty="0">
-              <a:ea typeface="ＭＳ Ｐゴシック" panose="020B0600070205080204" pitchFamily="34" charset="-128"/>
-              <a:sym typeface="Symbol" pitchFamily="2" charset="2"/>
-            </a:endParaRPr>
-          </a:p>
-          <a:p>
-            <a:pPr marL="457200" lvl="1" indent="0">
-              <a:buNone/>
-              <a:tabLst>
-                <a:tab pos="2210991" algn="l"/>
-                <a:tab pos="2751535" algn="l"/>
-              </a:tabLst>
-            </a:pPr>
-            <a:r>
-              <a:rPr lang="en-US" altLang="sk-SK" dirty="0">
-                <a:ea typeface="ＭＳ Ｐゴシック" panose="020B0600070205080204" pitchFamily="34" charset="-128"/>
-                <a:sym typeface="Symbol" pitchFamily="2" charset="2"/>
-              </a:rPr>
-              <a:t>EMAT = P(TLB) * T(TLB) + (1 - P(TLB)) * (P(page) * T(TLB) + T(Memory)) + (1 - P(page)) *{Page Fault Penalty}</a:t>
-            </a:r>
-          </a:p>
-          <a:p>
-            <a:pPr marL="457200" lvl="1" indent="0">
-              <a:buNone/>
-              <a:tabLst>
-                <a:tab pos="2210991" algn="l"/>
-                <a:tab pos="2751535" algn="l"/>
-              </a:tabLst>
-            </a:pPr>
-            <a:r>
-              <a:rPr lang="en-US" altLang="sk-SK" dirty="0">
-                <a:ea typeface="ＭＳ Ｐゴシック" panose="020B0600070205080204" pitchFamily="34" charset="-128"/>
-                <a:sym typeface="Symbol" pitchFamily="2" charset="2"/>
-              </a:rPr>
-              <a:t>EMAT = 0,95 * 10 + (1 – 0,95) * (0,99 *10 + 100) + (1 – 0,99) *8000000 = 80014,995 ns </a:t>
-            </a:r>
-          </a:p>
-          <a:p>
-            <a:pPr marL="457200" lvl="1" indent="0">
-              <a:buNone/>
-              <a:tabLst>
-                <a:tab pos="2210991" algn="l"/>
-                <a:tab pos="2751535" algn="l"/>
-              </a:tabLst>
-            </a:pPr>
-            <a:endParaRPr lang="en-US" altLang="sk-SK" dirty="0">
-              <a:ea typeface="ＭＳ Ｐゴシック" panose="020B0600070205080204" pitchFamily="34" charset="-128"/>
-              <a:sym typeface="Symbol" pitchFamily="2" charset="2"/>
-            </a:endParaRPr>
-          </a:p>
-          <a:p>
-            <a:pPr marL="457200" lvl="1" indent="0">
-              <a:buNone/>
-              <a:tabLst>
-                <a:tab pos="2210991" algn="l"/>
-                <a:tab pos="2751535" algn="l"/>
-              </a:tabLst>
-            </a:pPr>
-            <a:r>
-              <a:rPr lang="en-US" altLang="sk-SK" b="1" dirty="0">
-                <a:ea typeface="ＭＳ Ｐゴシック" panose="020B0600070205080204" pitchFamily="34" charset="-128"/>
-                <a:sym typeface="Symbol" pitchFamily="2" charset="2"/>
-              </a:rPr>
-              <a:t>Ak </a:t>
-            </a:r>
-            <a:r>
-              <a:rPr lang="en-US" altLang="sk-SK" b="1" dirty="0" err="1">
-                <a:ea typeface="ＭＳ Ｐゴシック" panose="020B0600070205080204" pitchFamily="34" charset="-128"/>
-                <a:sym typeface="Symbol" pitchFamily="2" charset="2"/>
-              </a:rPr>
-              <a:t>meníme</a:t>
-            </a:r>
-            <a:r>
-              <a:rPr lang="en-US" altLang="sk-SK" b="1" dirty="0">
-                <a:ea typeface="ＭＳ Ｐゴシック" panose="020B0600070205080204" pitchFamily="34" charset="-128"/>
-                <a:sym typeface="Symbol" pitchFamily="2" charset="2"/>
-              </a:rPr>
-              <a:t> P(TLB) </a:t>
-            </a:r>
-            <a:r>
-              <a:rPr lang="en-US" altLang="sk-SK" b="1" dirty="0" err="1">
-                <a:ea typeface="ＭＳ Ｐゴシック" panose="020B0600070205080204" pitchFamily="34" charset="-128"/>
-                <a:sym typeface="Symbol" pitchFamily="2" charset="2"/>
-              </a:rPr>
-              <a:t>na</a:t>
-            </a:r>
-            <a:r>
-              <a:rPr lang="en-US" altLang="sk-SK" b="1" dirty="0">
-                <a:ea typeface="ＭＳ Ｐゴシック" panose="020B0600070205080204" pitchFamily="34" charset="-128"/>
-                <a:sym typeface="Symbol" pitchFamily="2" charset="2"/>
-              </a:rPr>
-              <a:t> 80% a 60%</a:t>
-            </a:r>
-          </a:p>
-          <a:p>
-            <a:pPr marL="457200" lvl="1" indent="0">
-              <a:buNone/>
-              <a:tabLst>
-                <a:tab pos="2210991" algn="l"/>
-                <a:tab pos="2751535" algn="l"/>
-              </a:tabLst>
-            </a:pPr>
-            <a:r>
-              <a:rPr lang="en-US" altLang="sk-SK" dirty="0">
-                <a:ea typeface="ＭＳ Ｐゴシック" panose="020B0600070205080204" pitchFamily="34" charset="-128"/>
-                <a:sym typeface="Symbol" pitchFamily="2" charset="2"/>
-              </a:rPr>
-              <a:t>EMAT = 0,8 * 10 + (1 – 0,8) * (0,99 *10 + 100) + (1 – 0,99) *8000000 = 80 029,98ns</a:t>
-            </a:r>
-          </a:p>
-          <a:p>
-            <a:pPr marL="457200" lvl="1" indent="0">
-              <a:buNone/>
-              <a:tabLst>
-                <a:tab pos="2210991" algn="l"/>
-                <a:tab pos="2751535" algn="l"/>
-              </a:tabLst>
-            </a:pPr>
-            <a:r>
-              <a:rPr lang="en-US" altLang="sk-SK" dirty="0">
-                <a:ea typeface="ＭＳ Ｐゴシック" panose="020B0600070205080204" pitchFamily="34" charset="-128"/>
-                <a:sym typeface="Symbol" pitchFamily="2" charset="2"/>
-              </a:rPr>
-              <a:t>EMAT = 0,6 * 10 + (1 – 0,6) * (0,99 *10 + 100) + (1 – 0,99) *8000000 = 80 049,96ns</a:t>
-            </a:r>
-          </a:p>
-          <a:p>
-            <a:pPr marL="457200" lvl="1" indent="0">
-              <a:buNone/>
-              <a:tabLst>
-                <a:tab pos="2210991" algn="l"/>
-                <a:tab pos="2751535" algn="l"/>
-              </a:tabLst>
-            </a:pPr>
-            <a:r>
-              <a:rPr lang="en-US" altLang="sk-SK" b="1" dirty="0">
-                <a:ea typeface="ＭＳ Ｐゴシック" panose="020B0600070205080204" pitchFamily="34" charset="-128"/>
-                <a:sym typeface="Symbol" pitchFamily="2" charset="2"/>
-              </a:rPr>
-              <a:t>Ak </a:t>
-            </a:r>
-            <a:r>
-              <a:rPr lang="en-US" altLang="sk-SK" b="1" dirty="0" err="1">
-                <a:ea typeface="ＭＳ Ｐゴシック" panose="020B0600070205080204" pitchFamily="34" charset="-128"/>
-                <a:sym typeface="Symbol" pitchFamily="2" charset="2"/>
-              </a:rPr>
-              <a:t>meníme</a:t>
-            </a:r>
-            <a:r>
-              <a:rPr lang="en-US" altLang="sk-SK" b="1" dirty="0">
-                <a:ea typeface="ＭＳ Ｐゴシック" panose="020B0600070205080204" pitchFamily="34" charset="-128"/>
-                <a:sym typeface="Symbol" pitchFamily="2" charset="2"/>
-              </a:rPr>
-              <a:t> P(page) </a:t>
-            </a:r>
-            <a:r>
-              <a:rPr lang="en-US" altLang="sk-SK" b="1" dirty="0" err="1">
-                <a:ea typeface="ＭＳ Ｐゴシック" panose="020B0600070205080204" pitchFamily="34" charset="-128"/>
-                <a:sym typeface="Symbol" pitchFamily="2" charset="2"/>
-              </a:rPr>
-              <a:t>na</a:t>
-            </a:r>
-            <a:r>
-              <a:rPr lang="en-US" altLang="sk-SK" b="1" dirty="0">
-                <a:ea typeface="ＭＳ Ｐゴシック" panose="020B0600070205080204" pitchFamily="34" charset="-128"/>
-                <a:sym typeface="Symbol" pitchFamily="2" charset="2"/>
-              </a:rPr>
-              <a:t> 90% a 80% P(TLB)=95</a:t>
-            </a:r>
-          </a:p>
-          <a:p>
-            <a:pPr marL="457200" lvl="1" indent="0">
-              <a:buNone/>
-              <a:tabLst>
-                <a:tab pos="2210991" algn="l"/>
-                <a:tab pos="2751535" algn="l"/>
-              </a:tabLst>
-            </a:pPr>
-            <a:r>
-              <a:rPr lang="en-US" altLang="sk-SK" dirty="0">
-                <a:ea typeface="ＭＳ Ｐゴシック" panose="020B0600070205080204" pitchFamily="34" charset="-128"/>
-                <a:sym typeface="Symbol" pitchFamily="2" charset="2"/>
-              </a:rPr>
-              <a:t>EMAT = 0,95 * 10 + (1 – 0,95) * (0,9 *10 + 100) + (1 – 0,9) *8000000 = 800 014,95ns</a:t>
-            </a:r>
-          </a:p>
-          <a:p>
-            <a:pPr marL="457200" lvl="1" indent="0">
-              <a:buNone/>
-              <a:tabLst>
-                <a:tab pos="2210991" algn="l"/>
-                <a:tab pos="2751535" algn="l"/>
-              </a:tabLst>
-            </a:pPr>
-            <a:r>
-              <a:rPr lang="en-US" altLang="sk-SK" dirty="0">
-                <a:ea typeface="ＭＳ Ｐゴシック" panose="020B0600070205080204" pitchFamily="34" charset="-128"/>
-                <a:sym typeface="Symbol" pitchFamily="2" charset="2"/>
-              </a:rPr>
-              <a:t>EMAT = 0,95 * 10 + (1 – 0,95) * (0,8 *10 + 100) + (1 – 0,8) *8000000 = 1 600 014,9ns</a:t>
-            </a:r>
-          </a:p>
-          <a:p>
-            <a:pPr marL="457200" lvl="1" indent="0">
-              <a:buNone/>
-              <a:tabLst>
-                <a:tab pos="2210991" algn="l"/>
-                <a:tab pos="2751535" algn="l"/>
-              </a:tabLst>
-            </a:pPr>
-            <a:endParaRPr lang="en-US" altLang="sk-SK" dirty="0">
-              <a:ea typeface="ＭＳ Ｐゴシック" panose="020B0600070205080204" pitchFamily="34" charset="-128"/>
-              <a:sym typeface="Symbol" pitchFamily="2" charset="2"/>
-            </a:endParaRPr>
-          </a:p>
-          <a:p>
-            <a:pPr lvl="1">
-              <a:tabLst>
-                <a:tab pos="2210991" algn="l"/>
-                <a:tab pos="2751535" algn="l"/>
-              </a:tabLst>
-            </a:pPr>
-            <a:endParaRPr lang="en-US" altLang="sk-SK" dirty="0">
-              <a:ea typeface="ＭＳ Ｐゴシック" panose="020B0600070205080204" pitchFamily="34" charset="-128"/>
-              <a:sym typeface="Symbol" pitchFamily="2" charset="2"/>
-            </a:endParaRPr>
-          </a:p>
-          <a:p>
-            <a:pPr marL="457200" lvl="1" indent="0">
-              <a:buNone/>
-              <a:tabLst>
-                <a:tab pos="2210991" algn="l"/>
-                <a:tab pos="2751535" algn="l"/>
-              </a:tabLst>
-            </a:pPr>
-            <a:endParaRPr lang="en-US" altLang="sk-SK" dirty="0">
-              <a:ea typeface="ＭＳ Ｐゴシック" panose="020B0600070205080204" pitchFamily="34" charset="-128"/>
-              <a:sym typeface="Symbol" pitchFamily="2" charset="2"/>
-            </a:endParaRPr>
-          </a:p>
-          <a:p>
-            <a:pPr marL="457200" lvl="1" indent="0">
-              <a:buNone/>
-              <a:tabLst>
-                <a:tab pos="2210991" algn="l"/>
-                <a:tab pos="2751535" algn="l"/>
-              </a:tabLst>
-            </a:pPr>
-            <a:endParaRPr lang="en-US" altLang="sk-SK" dirty="0">
-              <a:ea typeface="ＭＳ Ｐゴシック" panose="020B0600070205080204" pitchFamily="34" charset="-128"/>
-              <a:sym typeface="Symbol" pitchFamily="2" charset="2"/>
-            </a:endParaRPr>
-          </a:p>
-          <a:p>
-            <a:pPr>
-              <a:buNone/>
-              <a:tabLst>
-                <a:tab pos="2210991" algn="l"/>
-                <a:tab pos="2751535" algn="l"/>
-              </a:tabLst>
-            </a:pPr>
-            <a:endParaRPr lang="en-US" altLang="sk-SK" dirty="0">
-              <a:ea typeface="ＭＳ Ｐゴシック" panose="020B0600070205080204" pitchFamily="34" charset="-128"/>
-            </a:endParaRPr>
-          </a:p>
-        </p:txBody>
-      </p:sp>
-    </p:spTree>
-    <p:extLst>
-      <p:ext uri="{BB962C8B-B14F-4D97-AF65-F5344CB8AC3E}">
-        <p14:creationId xmlns:p14="http://schemas.microsoft.com/office/powerpoint/2010/main" val="333524277"/>
       </p:ext>
     </p:extLst>
   </p:cSld>
@@ -35329,6 +33325,915 @@
       </p:grpSpPr>
       <p:sp>
         <p:nvSpPr>
+          <p:cNvPr id="78849" name="Rectangle 2">
+            <a:extLst>
+              <a:ext uri="{FF2B5EF4-FFF2-40B4-BE49-F238E27FC236}">
+                <a16:creationId xmlns:a16="http://schemas.microsoft.com/office/drawing/2014/main" id="{773F6BB0-444A-754E-88F3-528CC320C9EF}"/>
+              </a:ext>
+            </a:extLst>
+          </p:cNvPr>
+          <p:cNvSpPr>
+            <a:spLocks noGrp="1" noChangeArrowheads="1"/>
+          </p:cNvSpPr>
+          <p:nvPr>
+            <p:ph type="title"/>
+          </p:nvPr>
+        </p:nvSpPr>
+        <p:spPr/>
+        <p:txBody>
+          <a:bodyPr/>
+          <a:lstStyle/>
+          <a:p>
+            <a:pPr eaLnBrk="1" hangingPunct="1"/>
+            <a:r>
+              <a:rPr lang="en-US" altLang="sk-SK" dirty="0">
+                <a:ea typeface="ＭＳ Ｐゴシック" panose="020B0600070205080204" pitchFamily="34" charset="-128"/>
+              </a:rPr>
+              <a:t>Effective Memory Access Time -EMAT</a:t>
+            </a:r>
+          </a:p>
+        </p:txBody>
+      </p:sp>
+      <p:sp>
+        <p:nvSpPr>
+          <p:cNvPr id="78850" name="Rectangle 3">
+            <a:extLst>
+              <a:ext uri="{FF2B5EF4-FFF2-40B4-BE49-F238E27FC236}">
+                <a16:creationId xmlns:a16="http://schemas.microsoft.com/office/drawing/2014/main" id="{E450E446-F97B-7746-8C99-B7DA5BAAC109}"/>
+              </a:ext>
+            </a:extLst>
+          </p:cNvPr>
+          <p:cNvSpPr>
+            <a:spLocks noGrp="1" noChangeArrowheads="1"/>
+          </p:cNvSpPr>
+          <p:nvPr>
+            <p:ph idx="1"/>
+          </p:nvPr>
+        </p:nvSpPr>
+        <p:spPr>
+          <a:xfrm>
+            <a:off x="838200" y="1333500"/>
+            <a:ext cx="10515600" cy="4843463"/>
+          </a:xfrm>
+        </p:spPr>
+        <p:txBody>
+          <a:bodyPr>
+            <a:normAutofit fontScale="85000" lnSpcReduction="20000"/>
+          </a:bodyPr>
+          <a:lstStyle/>
+          <a:p>
+            <a:pPr marL="457200" lvl="1" indent="0">
+              <a:buNone/>
+              <a:tabLst>
+                <a:tab pos="2210991" algn="l"/>
+                <a:tab pos="2751535" algn="l"/>
+              </a:tabLst>
+            </a:pPr>
+            <a:r>
+              <a:rPr lang="en-US" altLang="sk-SK" dirty="0" err="1">
+                <a:ea typeface="ＭＳ Ｐゴシック" panose="020B0600070205080204" pitchFamily="34" charset="-128"/>
+                <a:sym typeface="Symbol" pitchFamily="2" charset="2"/>
+              </a:rPr>
+              <a:t>Predstavme</a:t>
+            </a:r>
+            <a:r>
+              <a:rPr lang="en-US" altLang="sk-SK" dirty="0">
+                <a:ea typeface="ＭＳ Ｐゴシック" panose="020B0600070205080204" pitchFamily="34" charset="-128"/>
+                <a:sym typeface="Symbol" pitchFamily="2" charset="2"/>
+              </a:rPr>
+              <a:t> </a:t>
+            </a:r>
+            <a:r>
+              <a:rPr lang="en-US" altLang="sk-SK" dirty="0" err="1">
+                <a:ea typeface="ＭＳ Ｐゴシック" panose="020B0600070205080204" pitchFamily="34" charset="-128"/>
+                <a:sym typeface="Symbol" pitchFamily="2" charset="2"/>
+              </a:rPr>
+              <a:t>si</a:t>
+            </a:r>
+            <a:r>
+              <a:rPr lang="en-US" altLang="sk-SK" dirty="0">
+                <a:ea typeface="ＭＳ Ｐゴシック" panose="020B0600070205080204" pitchFamily="34" charset="-128"/>
+                <a:sym typeface="Symbol" pitchFamily="2" charset="2"/>
+              </a:rPr>
+              <a:t>, </a:t>
+            </a:r>
+            <a:r>
+              <a:rPr lang="en-US" altLang="sk-SK" dirty="0" err="1">
+                <a:ea typeface="ＭＳ Ｐゴシック" panose="020B0600070205080204" pitchFamily="34" charset="-128"/>
+                <a:sym typeface="Symbol" pitchFamily="2" charset="2"/>
+              </a:rPr>
+              <a:t>že</a:t>
+            </a:r>
+            <a:r>
+              <a:rPr lang="en-US" altLang="sk-SK" dirty="0">
+                <a:ea typeface="ＭＳ Ｐゴシック" panose="020B0600070205080204" pitchFamily="34" charset="-128"/>
+                <a:sym typeface="Symbol" pitchFamily="2" charset="2"/>
+              </a:rPr>
+              <a:t> </a:t>
+            </a:r>
+            <a:r>
+              <a:rPr lang="en-US" altLang="sk-SK" dirty="0" err="1">
+                <a:ea typeface="ＭＳ Ｐゴシック" panose="020B0600070205080204" pitchFamily="34" charset="-128"/>
+                <a:sym typeface="Symbol" pitchFamily="2" charset="2"/>
+              </a:rPr>
+              <a:t>máme</a:t>
+            </a:r>
+            <a:r>
+              <a:rPr lang="en-US" altLang="sk-SK" dirty="0">
+                <a:ea typeface="ＭＳ Ｐゴシック" panose="020B0600070205080204" pitchFamily="34" charset="-128"/>
+                <a:sym typeface="Symbol" pitchFamily="2" charset="2"/>
+              </a:rPr>
+              <a:t> </a:t>
+            </a:r>
+            <a:r>
+              <a:rPr lang="en-US" altLang="sk-SK" dirty="0" err="1">
+                <a:ea typeface="ＭＳ Ｐゴシック" panose="020B0600070205080204" pitchFamily="34" charset="-128"/>
+                <a:sym typeface="Symbol" pitchFamily="2" charset="2"/>
+              </a:rPr>
+              <a:t>tieto</a:t>
+            </a:r>
+            <a:r>
+              <a:rPr lang="en-US" altLang="sk-SK" dirty="0">
+                <a:ea typeface="ＭＳ Ｐゴシック" panose="020B0600070205080204" pitchFamily="34" charset="-128"/>
+                <a:sym typeface="Symbol" pitchFamily="2" charset="2"/>
+              </a:rPr>
+              <a:t> </a:t>
+            </a:r>
+            <a:r>
+              <a:rPr lang="en-US" altLang="sk-SK" dirty="0" err="1">
+                <a:ea typeface="ＭＳ Ｐゴシック" panose="020B0600070205080204" pitchFamily="34" charset="-128"/>
+                <a:sym typeface="Symbol" pitchFamily="2" charset="2"/>
+              </a:rPr>
+              <a:t>hodnoty</a:t>
+            </a:r>
+            <a:r>
+              <a:rPr lang="en-US" altLang="sk-SK" dirty="0">
+                <a:ea typeface="ＭＳ Ｐゴシック" panose="020B0600070205080204" pitchFamily="34" charset="-128"/>
+                <a:sym typeface="Symbol" pitchFamily="2" charset="2"/>
+              </a:rPr>
+              <a:t>:</a:t>
+            </a:r>
+          </a:p>
+          <a:p>
+            <a:pPr lvl="1">
+              <a:tabLst>
+                <a:tab pos="2210991" algn="l"/>
+                <a:tab pos="2751535" algn="l"/>
+              </a:tabLst>
+            </a:pPr>
+            <a:r>
+              <a:rPr lang="en-US" altLang="sk-SK" dirty="0">
+                <a:ea typeface="ＭＳ Ｐゴシック" panose="020B0600070205080204" pitchFamily="34" charset="-128"/>
+                <a:sym typeface="Symbol" pitchFamily="2" charset="2"/>
+              </a:rPr>
+              <a:t>P(TLB) = 0,95 (95% </a:t>
+            </a:r>
+            <a:r>
+              <a:rPr lang="en-US" altLang="sk-SK" dirty="0" err="1">
+                <a:ea typeface="ＭＳ Ｐゴシック" panose="020B0600070205080204" pitchFamily="34" charset="-128"/>
+                <a:sym typeface="Symbol" pitchFamily="2" charset="2"/>
+              </a:rPr>
+              <a:t>pravdepodobnosť</a:t>
+            </a:r>
+            <a:r>
+              <a:rPr lang="en-US" altLang="sk-SK" dirty="0">
+                <a:ea typeface="ＭＳ Ｐゴシック" panose="020B0600070205080204" pitchFamily="34" charset="-128"/>
+                <a:sym typeface="Symbol" pitchFamily="2" charset="2"/>
+              </a:rPr>
+              <a:t> </a:t>
+            </a:r>
+            <a:r>
+              <a:rPr lang="en-US" altLang="sk-SK" dirty="0" err="1">
+                <a:ea typeface="ＭＳ Ｐゴシック" panose="020B0600070205080204" pitchFamily="34" charset="-128"/>
+                <a:sym typeface="Symbol" pitchFamily="2" charset="2"/>
+              </a:rPr>
+              <a:t>nálezu</a:t>
+            </a:r>
+            <a:r>
+              <a:rPr lang="en-US" altLang="sk-SK" dirty="0">
+                <a:ea typeface="ＭＳ Ｐゴシック" panose="020B0600070205080204" pitchFamily="34" charset="-128"/>
+                <a:sym typeface="Symbol" pitchFamily="2" charset="2"/>
+              </a:rPr>
+              <a:t> v TLB)</a:t>
+            </a:r>
+          </a:p>
+          <a:p>
+            <a:pPr lvl="1">
+              <a:tabLst>
+                <a:tab pos="2210991" algn="l"/>
+                <a:tab pos="2751535" algn="l"/>
+              </a:tabLst>
+            </a:pPr>
+            <a:r>
+              <a:rPr lang="en-US" altLang="sk-SK" dirty="0">
+                <a:ea typeface="ＭＳ Ｐゴシック" panose="020B0600070205080204" pitchFamily="34" charset="-128"/>
+                <a:sym typeface="Symbol" pitchFamily="2" charset="2"/>
+              </a:rPr>
+              <a:t>P(page) = 0,99 (99% </a:t>
+            </a:r>
+            <a:r>
+              <a:rPr lang="en-US" altLang="sk-SK" dirty="0" err="1">
+                <a:ea typeface="ＭＳ Ｐゴシック" panose="020B0600070205080204" pitchFamily="34" charset="-128"/>
+                <a:sym typeface="Symbol" pitchFamily="2" charset="2"/>
+              </a:rPr>
+              <a:t>pravdepodobnosť</a:t>
+            </a:r>
+            <a:r>
+              <a:rPr lang="en-US" altLang="sk-SK" dirty="0">
+                <a:ea typeface="ＭＳ Ｐゴシック" panose="020B0600070205080204" pitchFamily="34" charset="-128"/>
+                <a:sym typeface="Symbol" pitchFamily="2" charset="2"/>
+              </a:rPr>
+              <a:t>, </a:t>
+            </a:r>
+            <a:r>
+              <a:rPr lang="en-US" altLang="sk-SK" dirty="0" err="1">
+                <a:ea typeface="ＭＳ Ｐゴシック" panose="020B0600070205080204" pitchFamily="34" charset="-128"/>
+                <a:sym typeface="Symbol" pitchFamily="2" charset="2"/>
+              </a:rPr>
+              <a:t>že</a:t>
+            </a:r>
+            <a:r>
+              <a:rPr lang="en-US" altLang="sk-SK" dirty="0">
+                <a:ea typeface="ＭＳ Ｐゴシック" panose="020B0600070205080204" pitchFamily="34" charset="-128"/>
+                <a:sym typeface="Symbol" pitchFamily="2" charset="2"/>
+              </a:rPr>
+              <a:t> </a:t>
+            </a:r>
+            <a:r>
+              <a:rPr lang="en-US" altLang="sk-SK" dirty="0" err="1">
+                <a:ea typeface="ＭＳ Ｐゴシック" panose="020B0600070205080204" pitchFamily="34" charset="-128"/>
+                <a:sym typeface="Symbol" pitchFamily="2" charset="2"/>
+              </a:rPr>
+              <a:t>stránka</a:t>
+            </a:r>
+            <a:r>
+              <a:rPr lang="en-US" altLang="sk-SK" dirty="0">
+                <a:ea typeface="ＭＳ Ｐゴシック" panose="020B0600070205080204" pitchFamily="34" charset="-128"/>
+                <a:sym typeface="Symbol" pitchFamily="2" charset="2"/>
+              </a:rPr>
+              <a:t> </a:t>
+            </a:r>
+            <a:r>
+              <a:rPr lang="en-US" altLang="sk-SK" dirty="0" err="1">
+                <a:ea typeface="ＭＳ Ｐゴシック" panose="020B0600070205080204" pitchFamily="34" charset="-128"/>
+                <a:sym typeface="Symbol" pitchFamily="2" charset="2"/>
+              </a:rPr>
+              <a:t>sa</a:t>
+            </a:r>
+            <a:r>
+              <a:rPr lang="en-US" altLang="sk-SK" dirty="0">
+                <a:ea typeface="ＭＳ Ｐゴシック" panose="020B0600070205080204" pitchFamily="34" charset="-128"/>
+                <a:sym typeface="Symbol" pitchFamily="2" charset="2"/>
+              </a:rPr>
+              <a:t> </a:t>
+            </a:r>
+            <a:r>
+              <a:rPr lang="en-US" altLang="sk-SK" dirty="0" err="1">
+                <a:ea typeface="ＭＳ Ｐゴシック" panose="020B0600070205080204" pitchFamily="34" charset="-128"/>
+                <a:sym typeface="Symbol" pitchFamily="2" charset="2"/>
+              </a:rPr>
+              <a:t>nachádza</a:t>
+            </a:r>
+            <a:r>
+              <a:rPr lang="en-US" altLang="sk-SK" dirty="0">
+                <a:ea typeface="ＭＳ Ｐゴシック" panose="020B0600070205080204" pitchFamily="34" charset="-128"/>
+                <a:sym typeface="Symbol" pitchFamily="2" charset="2"/>
+              </a:rPr>
+              <a:t> v </a:t>
+            </a:r>
+            <a:r>
+              <a:rPr lang="en-US" altLang="sk-SK" dirty="0" err="1">
+                <a:ea typeface="ＭＳ Ｐゴシック" panose="020B0600070205080204" pitchFamily="34" charset="-128"/>
+                <a:sym typeface="Symbol" pitchFamily="2" charset="2"/>
+              </a:rPr>
+              <a:t>hlavnej</a:t>
+            </a:r>
+            <a:r>
+              <a:rPr lang="en-US" altLang="sk-SK" dirty="0">
+                <a:ea typeface="ＭＳ Ｐゴシック" panose="020B0600070205080204" pitchFamily="34" charset="-128"/>
+                <a:sym typeface="Symbol" pitchFamily="2" charset="2"/>
+              </a:rPr>
+              <a:t> </a:t>
+            </a:r>
+            <a:r>
+              <a:rPr lang="en-US" altLang="sk-SK" dirty="0" err="1">
+                <a:ea typeface="ＭＳ Ｐゴシック" panose="020B0600070205080204" pitchFamily="34" charset="-128"/>
+                <a:sym typeface="Symbol" pitchFamily="2" charset="2"/>
+              </a:rPr>
+              <a:t>pamäti</a:t>
+            </a:r>
+            <a:r>
+              <a:rPr lang="en-US" altLang="sk-SK" dirty="0">
+                <a:ea typeface="ＭＳ Ｐゴシック" panose="020B0600070205080204" pitchFamily="34" charset="-128"/>
+                <a:sym typeface="Symbol" pitchFamily="2" charset="2"/>
+              </a:rPr>
+              <a:t>)</a:t>
+            </a:r>
+          </a:p>
+          <a:p>
+            <a:pPr lvl="1">
+              <a:tabLst>
+                <a:tab pos="2210991" algn="l"/>
+                <a:tab pos="2751535" algn="l"/>
+              </a:tabLst>
+            </a:pPr>
+            <a:r>
+              <a:rPr lang="en-US" altLang="sk-SK" dirty="0">
+                <a:ea typeface="ＭＳ Ｐゴシック" panose="020B0600070205080204" pitchFamily="34" charset="-128"/>
+                <a:sym typeface="Symbol" pitchFamily="2" charset="2"/>
+              </a:rPr>
+              <a:t>T(TLB) = 10 ns (</a:t>
+            </a:r>
+            <a:r>
+              <a:rPr lang="en-US" altLang="sk-SK" dirty="0" err="1">
+                <a:ea typeface="ＭＳ Ｐゴシック" panose="020B0600070205080204" pitchFamily="34" charset="-128"/>
+                <a:sym typeface="Symbol" pitchFamily="2" charset="2"/>
+              </a:rPr>
+              <a:t>čas</a:t>
+            </a:r>
+            <a:r>
+              <a:rPr lang="en-US" altLang="sk-SK" dirty="0">
+                <a:ea typeface="ＭＳ Ｐゴシック" panose="020B0600070205080204" pitchFamily="34" charset="-128"/>
+                <a:sym typeface="Symbol" pitchFamily="2" charset="2"/>
+              </a:rPr>
+              <a:t> </a:t>
+            </a:r>
+            <a:r>
+              <a:rPr lang="en-US" altLang="sk-SK" dirty="0" err="1">
+                <a:ea typeface="ＭＳ Ｐゴシック" panose="020B0600070205080204" pitchFamily="34" charset="-128"/>
+                <a:sym typeface="Symbol" pitchFamily="2" charset="2"/>
+              </a:rPr>
+              <a:t>potrebný</a:t>
+            </a:r>
+            <a:r>
+              <a:rPr lang="en-US" altLang="sk-SK" dirty="0">
+                <a:ea typeface="ＭＳ Ｐゴシック" panose="020B0600070205080204" pitchFamily="34" charset="-128"/>
+                <a:sym typeface="Symbol" pitchFamily="2" charset="2"/>
+              </a:rPr>
+              <a:t> </a:t>
+            </a:r>
+            <a:r>
+              <a:rPr lang="en-US" altLang="sk-SK" dirty="0" err="1">
+                <a:ea typeface="ＭＳ Ｐゴシック" panose="020B0600070205080204" pitchFamily="34" charset="-128"/>
+                <a:sym typeface="Symbol" pitchFamily="2" charset="2"/>
+              </a:rPr>
+              <a:t>na</a:t>
+            </a:r>
+            <a:r>
+              <a:rPr lang="en-US" altLang="sk-SK" dirty="0">
+                <a:ea typeface="ＭＳ Ｐゴシック" panose="020B0600070205080204" pitchFamily="34" charset="-128"/>
+                <a:sym typeface="Symbol" pitchFamily="2" charset="2"/>
+              </a:rPr>
+              <a:t> </a:t>
+            </a:r>
+            <a:r>
+              <a:rPr lang="en-US" altLang="sk-SK" dirty="0" err="1">
+                <a:ea typeface="ＭＳ Ｐゴシック" panose="020B0600070205080204" pitchFamily="34" charset="-128"/>
+                <a:sym typeface="Symbol" pitchFamily="2" charset="2"/>
+              </a:rPr>
+              <a:t>prístup</a:t>
+            </a:r>
+            <a:r>
+              <a:rPr lang="en-US" altLang="sk-SK" dirty="0">
+                <a:ea typeface="ＭＳ Ｐゴシック" panose="020B0600070205080204" pitchFamily="34" charset="-128"/>
+                <a:sym typeface="Symbol" pitchFamily="2" charset="2"/>
+              </a:rPr>
+              <a:t> k TLB)</a:t>
+            </a:r>
+          </a:p>
+          <a:p>
+            <a:pPr lvl="1">
+              <a:tabLst>
+                <a:tab pos="2210991" algn="l"/>
+                <a:tab pos="2751535" algn="l"/>
+              </a:tabLst>
+            </a:pPr>
+            <a:r>
+              <a:rPr lang="en-US" altLang="sk-SK" dirty="0">
+                <a:ea typeface="ＭＳ Ｐゴシック" panose="020B0600070205080204" pitchFamily="34" charset="-128"/>
+                <a:sym typeface="Symbol" pitchFamily="2" charset="2"/>
+              </a:rPr>
+              <a:t>T(Memory) = 100 ns (</a:t>
+            </a:r>
+            <a:r>
+              <a:rPr lang="en-US" altLang="sk-SK" dirty="0" err="1">
+                <a:ea typeface="ＭＳ Ｐゴシック" panose="020B0600070205080204" pitchFamily="34" charset="-128"/>
+                <a:sym typeface="Symbol" pitchFamily="2" charset="2"/>
+              </a:rPr>
+              <a:t>čas</a:t>
+            </a:r>
+            <a:r>
+              <a:rPr lang="en-US" altLang="sk-SK" dirty="0">
+                <a:ea typeface="ＭＳ Ｐゴシック" panose="020B0600070205080204" pitchFamily="34" charset="-128"/>
+                <a:sym typeface="Symbol" pitchFamily="2" charset="2"/>
+              </a:rPr>
+              <a:t> </a:t>
+            </a:r>
+            <a:r>
+              <a:rPr lang="en-US" altLang="sk-SK" dirty="0" err="1">
+                <a:ea typeface="ＭＳ Ｐゴシック" panose="020B0600070205080204" pitchFamily="34" charset="-128"/>
+                <a:sym typeface="Symbol" pitchFamily="2" charset="2"/>
+              </a:rPr>
+              <a:t>potrebný</a:t>
+            </a:r>
+            <a:r>
+              <a:rPr lang="en-US" altLang="sk-SK" dirty="0">
+                <a:ea typeface="ＭＳ Ｐゴシック" panose="020B0600070205080204" pitchFamily="34" charset="-128"/>
+                <a:sym typeface="Symbol" pitchFamily="2" charset="2"/>
+              </a:rPr>
+              <a:t> </a:t>
+            </a:r>
+            <a:r>
+              <a:rPr lang="en-US" altLang="sk-SK" dirty="0" err="1">
+                <a:ea typeface="ＭＳ Ｐゴシック" panose="020B0600070205080204" pitchFamily="34" charset="-128"/>
+                <a:sym typeface="Symbol" pitchFamily="2" charset="2"/>
+              </a:rPr>
+              <a:t>na</a:t>
+            </a:r>
+            <a:r>
+              <a:rPr lang="en-US" altLang="sk-SK" dirty="0">
+                <a:ea typeface="ＭＳ Ｐゴシック" panose="020B0600070205080204" pitchFamily="34" charset="-128"/>
+                <a:sym typeface="Symbol" pitchFamily="2" charset="2"/>
+              </a:rPr>
+              <a:t> </a:t>
+            </a:r>
+            <a:r>
+              <a:rPr lang="en-US" altLang="sk-SK" dirty="0" err="1">
+                <a:ea typeface="ＭＳ Ｐゴシック" panose="020B0600070205080204" pitchFamily="34" charset="-128"/>
+                <a:sym typeface="Symbol" pitchFamily="2" charset="2"/>
+              </a:rPr>
+              <a:t>prístup</a:t>
+            </a:r>
+            <a:r>
+              <a:rPr lang="en-US" altLang="sk-SK" dirty="0">
+                <a:ea typeface="ＭＳ Ｐゴシック" panose="020B0600070205080204" pitchFamily="34" charset="-128"/>
+                <a:sym typeface="Symbol" pitchFamily="2" charset="2"/>
+              </a:rPr>
+              <a:t> k </a:t>
+            </a:r>
+            <a:r>
+              <a:rPr lang="en-US" altLang="sk-SK" dirty="0" err="1">
+                <a:ea typeface="ＭＳ Ｐゴシック" panose="020B0600070205080204" pitchFamily="34" charset="-128"/>
+                <a:sym typeface="Symbol" pitchFamily="2" charset="2"/>
+              </a:rPr>
+              <a:t>hlavnej</a:t>
+            </a:r>
+            <a:r>
+              <a:rPr lang="en-US" altLang="sk-SK" dirty="0">
+                <a:ea typeface="ＭＳ Ｐゴシック" panose="020B0600070205080204" pitchFamily="34" charset="-128"/>
+                <a:sym typeface="Symbol" pitchFamily="2" charset="2"/>
+              </a:rPr>
+              <a:t> </a:t>
+            </a:r>
+            <a:r>
+              <a:rPr lang="en-US" altLang="sk-SK" dirty="0" err="1">
+                <a:ea typeface="ＭＳ Ｐゴシック" panose="020B0600070205080204" pitchFamily="34" charset="-128"/>
+                <a:sym typeface="Symbol" pitchFamily="2" charset="2"/>
+              </a:rPr>
+              <a:t>pamäti</a:t>
+            </a:r>
+            <a:r>
+              <a:rPr lang="en-US" altLang="sk-SK" dirty="0">
+                <a:ea typeface="ＭＳ Ｐゴシック" panose="020B0600070205080204" pitchFamily="34" charset="-128"/>
+                <a:sym typeface="Symbol" pitchFamily="2" charset="2"/>
+              </a:rPr>
+              <a:t>)</a:t>
+            </a:r>
+          </a:p>
+          <a:p>
+            <a:pPr lvl="1">
+              <a:tabLst>
+                <a:tab pos="2210991" algn="l"/>
+                <a:tab pos="2751535" algn="l"/>
+              </a:tabLst>
+            </a:pPr>
+            <a:r>
+              <a:rPr lang="en-US" altLang="sk-SK" dirty="0">
+                <a:ea typeface="ＭＳ Ｐゴシック" panose="020B0600070205080204" pitchFamily="34" charset="-128"/>
+                <a:sym typeface="Symbol" pitchFamily="2" charset="2"/>
+              </a:rPr>
+              <a:t>Page Fault Penalty = 8 </a:t>
+            </a:r>
+            <a:r>
+              <a:rPr lang="en-US" altLang="sk-SK" dirty="0" err="1">
+                <a:ea typeface="ＭＳ Ｐゴシック" panose="020B0600070205080204" pitchFamily="34" charset="-128"/>
+                <a:sym typeface="Symbol" pitchFamily="2" charset="2"/>
+              </a:rPr>
+              <a:t>ms</a:t>
+            </a:r>
+            <a:r>
+              <a:rPr lang="en-US" altLang="sk-SK" dirty="0">
+                <a:ea typeface="ＭＳ Ｐゴシック" panose="020B0600070205080204" pitchFamily="34" charset="-128"/>
+                <a:sym typeface="Symbol" pitchFamily="2" charset="2"/>
+              </a:rPr>
+              <a:t> (</a:t>
+            </a:r>
+            <a:r>
+              <a:rPr lang="en-US" altLang="sk-SK" dirty="0" err="1">
+                <a:ea typeface="ＭＳ Ｐゴシック" panose="020B0600070205080204" pitchFamily="34" charset="-128"/>
+                <a:sym typeface="Symbol" pitchFamily="2" charset="2"/>
+              </a:rPr>
+              <a:t>čas</a:t>
+            </a:r>
+            <a:r>
+              <a:rPr lang="en-US" altLang="sk-SK" dirty="0">
+                <a:ea typeface="ＭＳ Ｐゴシック" panose="020B0600070205080204" pitchFamily="34" charset="-128"/>
+                <a:sym typeface="Symbol" pitchFamily="2" charset="2"/>
+              </a:rPr>
+              <a:t> </a:t>
+            </a:r>
+            <a:r>
+              <a:rPr lang="en-US" altLang="sk-SK" dirty="0" err="1">
+                <a:ea typeface="ＭＳ Ｐゴシック" panose="020B0600070205080204" pitchFamily="34" charset="-128"/>
+                <a:sym typeface="Symbol" pitchFamily="2" charset="2"/>
+              </a:rPr>
+              <a:t>potrebný</a:t>
+            </a:r>
+            <a:r>
+              <a:rPr lang="en-US" altLang="sk-SK" dirty="0">
+                <a:ea typeface="ＭＳ Ｐゴシック" panose="020B0600070205080204" pitchFamily="34" charset="-128"/>
+                <a:sym typeface="Symbol" pitchFamily="2" charset="2"/>
+              </a:rPr>
+              <a:t> </a:t>
+            </a:r>
+            <a:r>
+              <a:rPr lang="en-US" altLang="sk-SK" dirty="0" err="1">
+                <a:ea typeface="ＭＳ Ｐゴシック" panose="020B0600070205080204" pitchFamily="34" charset="-128"/>
+                <a:sym typeface="Symbol" pitchFamily="2" charset="2"/>
+              </a:rPr>
+              <a:t>na</a:t>
+            </a:r>
+            <a:r>
+              <a:rPr lang="en-US" altLang="sk-SK" dirty="0">
+                <a:ea typeface="ＭＳ Ｐゴシック" panose="020B0600070205080204" pitchFamily="34" charset="-128"/>
+                <a:sym typeface="Symbol" pitchFamily="2" charset="2"/>
+              </a:rPr>
+              <a:t> </a:t>
+            </a:r>
+            <a:r>
+              <a:rPr lang="en-US" altLang="sk-SK" dirty="0" err="1">
+                <a:ea typeface="ＭＳ Ｐゴシック" panose="020B0600070205080204" pitchFamily="34" charset="-128"/>
+                <a:sym typeface="Symbol" pitchFamily="2" charset="2"/>
+              </a:rPr>
+              <a:t>načítanie</a:t>
+            </a:r>
+            <a:r>
+              <a:rPr lang="en-US" altLang="sk-SK" dirty="0">
+                <a:ea typeface="ＭＳ Ｐゴシック" panose="020B0600070205080204" pitchFamily="34" charset="-128"/>
+                <a:sym typeface="Symbol" pitchFamily="2" charset="2"/>
+              </a:rPr>
+              <a:t> </a:t>
+            </a:r>
+            <a:r>
+              <a:rPr lang="en-US" altLang="sk-SK" dirty="0" err="1">
+                <a:ea typeface="ＭＳ Ｐゴシック" panose="020B0600070205080204" pitchFamily="34" charset="-128"/>
+                <a:sym typeface="Symbol" pitchFamily="2" charset="2"/>
+              </a:rPr>
+              <a:t>stránky</a:t>
+            </a:r>
+            <a:r>
+              <a:rPr lang="en-US" altLang="sk-SK" dirty="0">
+                <a:ea typeface="ＭＳ Ｐゴシック" panose="020B0600070205080204" pitchFamily="34" charset="-128"/>
+                <a:sym typeface="Symbol" pitchFamily="2" charset="2"/>
+              </a:rPr>
+              <a:t> z </a:t>
+            </a:r>
+            <a:r>
+              <a:rPr lang="en-US" altLang="sk-SK" dirty="0" err="1">
+                <a:ea typeface="ＭＳ Ｐゴシック" panose="020B0600070205080204" pitchFamily="34" charset="-128"/>
+                <a:sym typeface="Symbol" pitchFamily="2" charset="2"/>
+              </a:rPr>
+              <a:t>diskového</a:t>
+            </a:r>
+            <a:r>
+              <a:rPr lang="en-US" altLang="sk-SK" dirty="0">
+                <a:ea typeface="ＭＳ Ｐゴシック" panose="020B0600070205080204" pitchFamily="34" charset="-128"/>
+                <a:sym typeface="Symbol" pitchFamily="2" charset="2"/>
+              </a:rPr>
+              <a:t> </a:t>
+            </a:r>
+            <a:r>
+              <a:rPr lang="en-US" altLang="sk-SK" dirty="0" err="1">
+                <a:ea typeface="ＭＳ Ｐゴシック" panose="020B0600070205080204" pitchFamily="34" charset="-128"/>
+                <a:sym typeface="Symbol" pitchFamily="2" charset="2"/>
+              </a:rPr>
+              <a:t>úložiska</a:t>
+            </a:r>
+            <a:r>
+              <a:rPr lang="en-US" altLang="sk-SK" dirty="0">
+                <a:ea typeface="ＭＳ Ｐゴシック" panose="020B0600070205080204" pitchFamily="34" charset="-128"/>
+                <a:sym typeface="Symbol" pitchFamily="2" charset="2"/>
+              </a:rPr>
+              <a:t>)</a:t>
+            </a:r>
+          </a:p>
+          <a:p>
+            <a:pPr marL="457200" lvl="1" indent="0">
+              <a:buNone/>
+              <a:tabLst>
+                <a:tab pos="2210991" algn="l"/>
+                <a:tab pos="2751535" algn="l"/>
+              </a:tabLst>
+            </a:pPr>
+            <a:endParaRPr lang="en-US" altLang="sk-SK" dirty="0">
+              <a:ea typeface="ＭＳ Ｐゴシック" panose="020B0600070205080204" pitchFamily="34" charset="-128"/>
+              <a:sym typeface="Symbol" pitchFamily="2" charset="2"/>
+            </a:endParaRPr>
+          </a:p>
+          <a:p>
+            <a:pPr marL="457200" lvl="1" indent="0">
+              <a:buNone/>
+              <a:tabLst>
+                <a:tab pos="2210991" algn="l"/>
+                <a:tab pos="2751535" algn="l"/>
+              </a:tabLst>
+            </a:pPr>
+            <a:r>
+              <a:rPr lang="en-US" altLang="sk-SK" dirty="0">
+                <a:ea typeface="ＭＳ Ｐゴシック" panose="020B0600070205080204" pitchFamily="34" charset="-128"/>
+                <a:sym typeface="Symbol" pitchFamily="2" charset="2"/>
+              </a:rPr>
+              <a:t>EMAT = P(TLB) * T(TLB) + (1 - P(TLB)) * (P(page) * T(TLB) + T(Memory)) + (1 - P(page)) *{Page Fault Penalty}</a:t>
+            </a:r>
+          </a:p>
+          <a:p>
+            <a:pPr marL="457200" lvl="1" indent="0">
+              <a:buNone/>
+              <a:tabLst>
+                <a:tab pos="2210991" algn="l"/>
+                <a:tab pos="2751535" algn="l"/>
+              </a:tabLst>
+            </a:pPr>
+            <a:r>
+              <a:rPr lang="en-US" altLang="sk-SK" dirty="0">
+                <a:ea typeface="ＭＳ Ｐゴシック" panose="020B0600070205080204" pitchFamily="34" charset="-128"/>
+                <a:sym typeface="Symbol" pitchFamily="2" charset="2"/>
+              </a:rPr>
+              <a:t>EMAT = 0,95 * 10 + (1 – 0,95) * (0,99 *10 + 100) + (1 – 0,99) *8000000 = 80014,995 ns </a:t>
+            </a:r>
+          </a:p>
+          <a:p>
+            <a:pPr marL="457200" lvl="1" indent="0">
+              <a:buNone/>
+              <a:tabLst>
+                <a:tab pos="2210991" algn="l"/>
+                <a:tab pos="2751535" algn="l"/>
+              </a:tabLst>
+            </a:pPr>
+            <a:endParaRPr lang="en-US" altLang="sk-SK" dirty="0">
+              <a:ea typeface="ＭＳ Ｐゴシック" panose="020B0600070205080204" pitchFamily="34" charset="-128"/>
+              <a:sym typeface="Symbol" pitchFamily="2" charset="2"/>
+            </a:endParaRPr>
+          </a:p>
+          <a:p>
+            <a:pPr marL="457200" lvl="1" indent="0">
+              <a:buNone/>
+              <a:tabLst>
+                <a:tab pos="2210991" algn="l"/>
+                <a:tab pos="2751535" algn="l"/>
+              </a:tabLst>
+            </a:pPr>
+            <a:r>
+              <a:rPr lang="en-US" altLang="sk-SK" b="1" dirty="0">
+                <a:ea typeface="ＭＳ Ｐゴシック" panose="020B0600070205080204" pitchFamily="34" charset="-128"/>
+                <a:sym typeface="Symbol" pitchFamily="2" charset="2"/>
+              </a:rPr>
+              <a:t>Ak </a:t>
+            </a:r>
+            <a:r>
+              <a:rPr lang="en-US" altLang="sk-SK" b="1" dirty="0" err="1">
+                <a:ea typeface="ＭＳ Ｐゴシック" panose="020B0600070205080204" pitchFamily="34" charset="-128"/>
+                <a:sym typeface="Symbol" pitchFamily="2" charset="2"/>
+              </a:rPr>
+              <a:t>meníme</a:t>
+            </a:r>
+            <a:r>
+              <a:rPr lang="en-US" altLang="sk-SK" b="1" dirty="0">
+                <a:ea typeface="ＭＳ Ｐゴシック" panose="020B0600070205080204" pitchFamily="34" charset="-128"/>
+                <a:sym typeface="Symbol" pitchFamily="2" charset="2"/>
+              </a:rPr>
+              <a:t> P(TLB) </a:t>
+            </a:r>
+            <a:r>
+              <a:rPr lang="en-US" altLang="sk-SK" b="1" dirty="0" err="1">
+                <a:ea typeface="ＭＳ Ｐゴシック" panose="020B0600070205080204" pitchFamily="34" charset="-128"/>
+                <a:sym typeface="Symbol" pitchFamily="2" charset="2"/>
+              </a:rPr>
+              <a:t>na</a:t>
+            </a:r>
+            <a:r>
+              <a:rPr lang="en-US" altLang="sk-SK" b="1" dirty="0">
+                <a:ea typeface="ＭＳ Ｐゴシック" panose="020B0600070205080204" pitchFamily="34" charset="-128"/>
+                <a:sym typeface="Symbol" pitchFamily="2" charset="2"/>
+              </a:rPr>
+              <a:t> 80% a 60%</a:t>
+            </a:r>
+          </a:p>
+          <a:p>
+            <a:pPr marL="457200" lvl="1" indent="0">
+              <a:buNone/>
+              <a:tabLst>
+                <a:tab pos="2210991" algn="l"/>
+                <a:tab pos="2751535" algn="l"/>
+              </a:tabLst>
+            </a:pPr>
+            <a:r>
+              <a:rPr lang="en-US" altLang="sk-SK" dirty="0">
+                <a:ea typeface="ＭＳ Ｐゴシック" panose="020B0600070205080204" pitchFamily="34" charset="-128"/>
+                <a:sym typeface="Symbol" pitchFamily="2" charset="2"/>
+              </a:rPr>
+              <a:t>EMAT = 0,8 * 10 + (1 – 0,8) * (0,99 *10 + 100) + (1 – 0,99) *8000000 = 80 029,98ns</a:t>
+            </a:r>
+          </a:p>
+          <a:p>
+            <a:pPr marL="457200" lvl="1" indent="0">
+              <a:buNone/>
+              <a:tabLst>
+                <a:tab pos="2210991" algn="l"/>
+                <a:tab pos="2751535" algn="l"/>
+              </a:tabLst>
+            </a:pPr>
+            <a:r>
+              <a:rPr lang="en-US" altLang="sk-SK" dirty="0">
+                <a:ea typeface="ＭＳ Ｐゴシック" panose="020B0600070205080204" pitchFamily="34" charset="-128"/>
+                <a:sym typeface="Symbol" pitchFamily="2" charset="2"/>
+              </a:rPr>
+              <a:t>EMAT = 0,6 * 10 + (1 – 0,6) * (0,99 *10 + 100) + (1 – 0,99) *8000000 = 80 049,96ns</a:t>
+            </a:r>
+          </a:p>
+          <a:p>
+            <a:pPr marL="457200" lvl="1" indent="0">
+              <a:buNone/>
+              <a:tabLst>
+                <a:tab pos="2210991" algn="l"/>
+                <a:tab pos="2751535" algn="l"/>
+              </a:tabLst>
+            </a:pPr>
+            <a:r>
+              <a:rPr lang="en-US" altLang="sk-SK" b="1" dirty="0">
+                <a:ea typeface="ＭＳ Ｐゴシック" panose="020B0600070205080204" pitchFamily="34" charset="-128"/>
+                <a:sym typeface="Symbol" pitchFamily="2" charset="2"/>
+              </a:rPr>
+              <a:t>Ak </a:t>
+            </a:r>
+            <a:r>
+              <a:rPr lang="en-US" altLang="sk-SK" b="1" dirty="0" err="1">
+                <a:ea typeface="ＭＳ Ｐゴシック" panose="020B0600070205080204" pitchFamily="34" charset="-128"/>
+                <a:sym typeface="Symbol" pitchFamily="2" charset="2"/>
+              </a:rPr>
+              <a:t>meníme</a:t>
+            </a:r>
+            <a:r>
+              <a:rPr lang="en-US" altLang="sk-SK" b="1" dirty="0">
+                <a:ea typeface="ＭＳ Ｐゴシック" panose="020B0600070205080204" pitchFamily="34" charset="-128"/>
+                <a:sym typeface="Symbol" pitchFamily="2" charset="2"/>
+              </a:rPr>
+              <a:t> P(page) </a:t>
+            </a:r>
+            <a:r>
+              <a:rPr lang="en-US" altLang="sk-SK" b="1" dirty="0" err="1">
+                <a:ea typeface="ＭＳ Ｐゴシック" panose="020B0600070205080204" pitchFamily="34" charset="-128"/>
+                <a:sym typeface="Symbol" pitchFamily="2" charset="2"/>
+              </a:rPr>
+              <a:t>na</a:t>
+            </a:r>
+            <a:r>
+              <a:rPr lang="en-US" altLang="sk-SK" b="1" dirty="0">
+                <a:ea typeface="ＭＳ Ｐゴシック" panose="020B0600070205080204" pitchFamily="34" charset="-128"/>
+                <a:sym typeface="Symbol" pitchFamily="2" charset="2"/>
+              </a:rPr>
+              <a:t> 90% a 80% P(TLB)=95</a:t>
+            </a:r>
+          </a:p>
+          <a:p>
+            <a:pPr marL="457200" lvl="1" indent="0">
+              <a:buNone/>
+              <a:tabLst>
+                <a:tab pos="2210991" algn="l"/>
+                <a:tab pos="2751535" algn="l"/>
+              </a:tabLst>
+            </a:pPr>
+            <a:r>
+              <a:rPr lang="en-US" altLang="sk-SK" dirty="0">
+                <a:ea typeface="ＭＳ Ｐゴシック" panose="020B0600070205080204" pitchFamily="34" charset="-128"/>
+                <a:sym typeface="Symbol" pitchFamily="2" charset="2"/>
+              </a:rPr>
+              <a:t>EMAT = 0,95 * 10 + (1 – 0,95) * (0,9 *10 + 100) + (1 – 0,9) *8000000 = 800 014,95ns</a:t>
+            </a:r>
+          </a:p>
+          <a:p>
+            <a:pPr marL="457200" lvl="1" indent="0">
+              <a:buNone/>
+              <a:tabLst>
+                <a:tab pos="2210991" algn="l"/>
+                <a:tab pos="2751535" algn="l"/>
+              </a:tabLst>
+            </a:pPr>
+            <a:r>
+              <a:rPr lang="en-US" altLang="sk-SK" dirty="0">
+                <a:ea typeface="ＭＳ Ｐゴシック" panose="020B0600070205080204" pitchFamily="34" charset="-128"/>
+                <a:sym typeface="Symbol" pitchFamily="2" charset="2"/>
+              </a:rPr>
+              <a:t>EMAT = 0,95 * 10 + (1 – 0,95) * (0,8 *10 + 100) + (1 – 0,8) *8000000 = 1 600 014,9ns</a:t>
+            </a:r>
+          </a:p>
+          <a:p>
+            <a:pPr marL="457200" lvl="1" indent="0">
+              <a:buNone/>
+              <a:tabLst>
+                <a:tab pos="2210991" algn="l"/>
+                <a:tab pos="2751535" algn="l"/>
+              </a:tabLst>
+            </a:pPr>
+            <a:endParaRPr lang="en-US" altLang="sk-SK" dirty="0">
+              <a:ea typeface="ＭＳ Ｐゴシック" panose="020B0600070205080204" pitchFamily="34" charset="-128"/>
+              <a:sym typeface="Symbol" pitchFamily="2" charset="2"/>
+            </a:endParaRPr>
+          </a:p>
+          <a:p>
+            <a:pPr lvl="1">
+              <a:tabLst>
+                <a:tab pos="2210991" algn="l"/>
+                <a:tab pos="2751535" algn="l"/>
+              </a:tabLst>
+            </a:pPr>
+            <a:endParaRPr lang="en-US" altLang="sk-SK" dirty="0">
+              <a:ea typeface="ＭＳ Ｐゴシック" panose="020B0600070205080204" pitchFamily="34" charset="-128"/>
+              <a:sym typeface="Symbol" pitchFamily="2" charset="2"/>
+            </a:endParaRPr>
+          </a:p>
+          <a:p>
+            <a:pPr marL="457200" lvl="1" indent="0">
+              <a:buNone/>
+              <a:tabLst>
+                <a:tab pos="2210991" algn="l"/>
+                <a:tab pos="2751535" algn="l"/>
+              </a:tabLst>
+            </a:pPr>
+            <a:endParaRPr lang="en-US" altLang="sk-SK" dirty="0">
+              <a:ea typeface="ＭＳ Ｐゴシック" panose="020B0600070205080204" pitchFamily="34" charset="-128"/>
+              <a:sym typeface="Symbol" pitchFamily="2" charset="2"/>
+            </a:endParaRPr>
+          </a:p>
+          <a:p>
+            <a:pPr marL="457200" lvl="1" indent="0">
+              <a:buNone/>
+              <a:tabLst>
+                <a:tab pos="2210991" algn="l"/>
+                <a:tab pos="2751535" algn="l"/>
+              </a:tabLst>
+            </a:pPr>
+            <a:endParaRPr lang="en-US" altLang="sk-SK" dirty="0">
+              <a:ea typeface="ＭＳ Ｐゴシック" panose="020B0600070205080204" pitchFamily="34" charset="-128"/>
+              <a:sym typeface="Symbol" pitchFamily="2" charset="2"/>
+            </a:endParaRPr>
+          </a:p>
+          <a:p>
+            <a:pPr>
+              <a:buNone/>
+              <a:tabLst>
+                <a:tab pos="2210991" algn="l"/>
+                <a:tab pos="2751535" algn="l"/>
+              </a:tabLst>
+            </a:pPr>
+            <a:endParaRPr lang="en-US" altLang="sk-SK" dirty="0">
+              <a:ea typeface="ＭＳ Ｐゴシック" panose="020B0600070205080204" pitchFamily="34" charset="-128"/>
+            </a:endParaRPr>
+          </a:p>
+        </p:txBody>
+      </p:sp>
+    </p:spTree>
+    <p:extLst>
+      <p:ext uri="{BB962C8B-B14F-4D97-AF65-F5344CB8AC3E}">
+        <p14:creationId xmlns:p14="http://schemas.microsoft.com/office/powerpoint/2010/main" val="333524277"/>
+      </p:ext>
+    </p:extLst>
+  </p:cSld>
+  <p:clrMapOvr>
+    <a:masterClrMapping/>
+  </p:clrMapOvr>
+</p:sld>
+</file>
+
+<file path=ppt/slides/slide51.xml><?xml version="1.0" encoding="utf-8"?>
+<p:sld xmlns:a="http://schemas.openxmlformats.org/drawingml/2006/main" xmlns:r="http://schemas.openxmlformats.org/officeDocument/2006/relationships" xmlns:p="http://schemas.openxmlformats.org/presentationml/2006/main">
+  <p:cSld>
+    <p:spTree>
+      <p:nvGrpSpPr>
+        <p:cNvPr id="1" name=""/>
+        <p:cNvGrpSpPr/>
+        <p:nvPr/>
+      </p:nvGrpSpPr>
+      <p:grpSpPr>
+        <a:xfrm>
+          <a:off x="0" y="0"/>
+          <a:ext cx="0" cy="0"/>
+          <a:chOff x="0" y="0"/>
+          <a:chExt cx="0" cy="0"/>
+        </a:xfrm>
+      </p:grpSpPr>
+      <p:sp>
+        <p:nvSpPr>
           <p:cNvPr id="80897" name="Rectangle 2050">
             <a:extLst>
               <a:ext uri="{FF2B5EF4-FFF2-40B4-BE49-F238E27FC236}">
@@ -35631,7 +34536,7 @@
 </p:sld>
 </file>
 
-<file path=ppt/slides/slide51.xml><?xml version="1.0" encoding="utf-8"?>
+<file path=ppt/slides/slide52.xml><?xml version="1.0" encoding="utf-8"?>
 <p:sld xmlns:a="http://schemas.openxmlformats.org/drawingml/2006/main" xmlns:r="http://schemas.openxmlformats.org/officeDocument/2006/relationships" xmlns:p="http://schemas.openxmlformats.org/presentationml/2006/main">
   <p:cSld>
     <p:spTree>
@@ -35835,7 +34740,7 @@
 </p:sld>
 </file>
 
-<file path=ppt/slides/slide52.xml><?xml version="1.0" encoding="utf-8"?>
+<file path=ppt/slides/slide53.xml><?xml version="1.0" encoding="utf-8"?>
 <p:sld xmlns:a="http://schemas.openxmlformats.org/drawingml/2006/main" xmlns:r="http://schemas.openxmlformats.org/officeDocument/2006/relationships" xmlns:p="http://schemas.openxmlformats.org/presentationml/2006/main">
   <p:cSld>
     <p:spTree>
@@ -36015,7 +34920,7 @@
 </p:sld>
 </file>
 
-<file path=ppt/slides/slide53.xml><?xml version="1.0" encoding="utf-8"?>
+<file path=ppt/slides/slide54.xml><?xml version="1.0" encoding="utf-8"?>
 <p:sld xmlns:a="http://schemas.openxmlformats.org/drawingml/2006/main" xmlns:r="http://schemas.openxmlformats.org/officeDocument/2006/relationships" xmlns:p="http://schemas.openxmlformats.org/presentationml/2006/main">
   <p:cSld>
     <p:spTree>
@@ -36372,7 +35277,7 @@
 </p:sld>
 </file>
 
-<file path=ppt/slides/slide54.xml><?xml version="1.0" encoding="utf-8"?>
+<file path=ppt/slides/slide55.xml><?xml version="1.0" encoding="utf-8"?>
 <p:sld xmlns:a="http://schemas.openxmlformats.org/drawingml/2006/main" xmlns:r="http://schemas.openxmlformats.org/officeDocument/2006/relationships" xmlns:p="http://schemas.openxmlformats.org/presentationml/2006/main">
   <p:cSld>
     <p:spTree>
@@ -36600,7 +35505,7 @@
 </p:sld>
 </file>
 
-<file path=ppt/slides/slide55.xml><?xml version="1.0" encoding="utf-8"?>
+<file path=ppt/slides/slide56.xml><?xml version="1.0" encoding="utf-8"?>
 <p:sld xmlns:a="http://schemas.openxmlformats.org/drawingml/2006/main" xmlns:r="http://schemas.openxmlformats.org/officeDocument/2006/relationships" xmlns:p="http://schemas.openxmlformats.org/presentationml/2006/main">
   <p:cSld>
     <p:spTree>
@@ -36720,7 +35625,7 @@
 </p:sld>
 </file>
 
-<file path=ppt/slides/slide56.xml><?xml version="1.0" encoding="utf-8"?>
+<file path=ppt/slides/slide57.xml><?xml version="1.0" encoding="utf-8"?>
 <p:sld xmlns:a="http://schemas.openxmlformats.org/drawingml/2006/main" xmlns:r="http://schemas.openxmlformats.org/officeDocument/2006/relationships" xmlns:p="http://schemas.openxmlformats.org/presentationml/2006/main">
   <p:cSld>
     <p:spTree>
@@ -36844,7 +35749,7 @@
 </p:sld>
 </file>
 
-<file path=ppt/slides/slide57.xml><?xml version="1.0" encoding="utf-8"?>
+<file path=ppt/slides/slide58.xml><?xml version="1.0" encoding="utf-8"?>
 <p:sld xmlns:a="http://schemas.openxmlformats.org/drawingml/2006/main" xmlns:r="http://schemas.openxmlformats.org/officeDocument/2006/relationships" xmlns:p="http://schemas.openxmlformats.org/presentationml/2006/main">
   <p:cSld>
     <p:spTree>
@@ -38958,7 +37863,7 @@
 </p:sld>
 </file>
 
-<file path=ppt/slides/slide58.xml><?xml version="1.0" encoding="utf-8"?>
+<file path=ppt/slides/slide59.xml><?xml version="1.0" encoding="utf-8"?>
 <p:sld xmlns:a="http://schemas.openxmlformats.org/drawingml/2006/main" xmlns:r="http://schemas.openxmlformats.org/officeDocument/2006/relationships" xmlns:p="http://schemas.openxmlformats.org/presentationml/2006/main">
   <p:cSld>
     <p:spTree>
@@ -39594,7 +38499,200 @@
 </p:sld>
 </file>
 
-<file path=ppt/slides/slide59.xml><?xml version="1.0" encoding="utf-8"?>
+<file path=ppt/slides/slide6.xml><?xml version="1.0" encoding="utf-8"?>
+<p:sld xmlns:a="http://schemas.openxmlformats.org/drawingml/2006/main" xmlns:r="http://schemas.openxmlformats.org/officeDocument/2006/relationships" xmlns:p="http://schemas.openxmlformats.org/presentationml/2006/main">
+  <p:cSld>
+    <p:spTree>
+      <p:nvGrpSpPr>
+        <p:cNvPr id="1" name=""/>
+        <p:cNvGrpSpPr/>
+        <p:nvPr/>
+      </p:nvGrpSpPr>
+      <p:grpSpPr>
+        <a:xfrm>
+          <a:off x="0" y="0"/>
+          <a:ext cx="0" cy="0"/>
+          <a:chOff x="0" y="0"/>
+          <a:chExt cx="0" cy="0"/>
+        </a:xfrm>
+      </p:grpSpPr>
+      <p:sp>
+        <p:nvSpPr>
+          <p:cNvPr id="14339" name="Rectangle 2"/>
+          <p:cNvSpPr>
+            <a:spLocks noGrp="1" noChangeArrowheads="1"/>
+          </p:cNvSpPr>
+          <p:nvPr>
+            <p:ph type="title"/>
+          </p:nvPr>
+        </p:nvSpPr>
+        <p:spPr/>
+        <p:txBody>
+          <a:bodyPr/>
+          <a:lstStyle/>
+          <a:p>
+            <a:r>
+              <a:rPr lang="sk-SK" dirty="0"/>
+              <a:t>Techniky prideľovania pamäti</a:t>
+            </a:r>
+            <a:br>
+              <a:rPr lang="sk-SK" dirty="0"/>
+            </a:br>
+            <a:r>
+              <a:rPr lang="sk-SK" sz="3200" dirty="0"/>
+              <a:t>(Historické prístupy)</a:t>
+            </a:r>
+            <a:endParaRPr lang="sk-SK" dirty="0"/>
+          </a:p>
+        </p:txBody>
+      </p:sp>
+      <p:sp>
+        <p:nvSpPr>
+          <p:cNvPr id="14340" name="Rectangle 3"/>
+          <p:cNvSpPr>
+            <a:spLocks noGrp="1" noChangeArrowheads="1"/>
+          </p:cNvSpPr>
+          <p:nvPr>
+            <p:ph idx="1"/>
+          </p:nvPr>
+        </p:nvSpPr>
+        <p:spPr/>
+        <p:txBody>
+          <a:bodyPr>
+            <a:normAutofit lnSpcReduction="10000"/>
+          </a:bodyPr>
+          <a:lstStyle/>
+          <a:p>
+            <a:r>
+              <a:rPr lang="sk-SK" dirty="0"/>
+              <a:t>Identické zobrazenie</a:t>
+            </a:r>
+          </a:p>
+          <a:p>
+            <a:pPr lvl="1"/>
+            <a:r>
+              <a:rPr lang="sk-SK" dirty="0"/>
+              <a:t>zobrazenie Z/a/=b,	a je adresa  z LAP a b je adresa z FAP</a:t>
+            </a:r>
+          </a:p>
+          <a:p>
+            <a:pPr marL="0" indent="0">
+              <a:buNone/>
+            </a:pPr>
+            <a:r>
+              <a:rPr lang="sk-SK" b="1" dirty="0"/>
+              <a:t>techniky prideľovania</a:t>
+            </a:r>
+          </a:p>
+          <a:p>
+            <a:pPr marL="914400" lvl="1" indent="-457200">
+              <a:buFont typeface="+mj-lt"/>
+              <a:buAutoNum type="arabicPeriod"/>
+            </a:pPr>
+            <a:r>
+              <a:rPr lang="sk-SK" dirty="0"/>
+              <a:t>prideľovanie jediného súvislého úseku</a:t>
+            </a:r>
+          </a:p>
+          <a:p>
+            <a:pPr marL="1371600" lvl="2" indent="-457200">
+              <a:buFont typeface="+mj-lt"/>
+              <a:buAutoNum type="arabicPeriod"/>
+            </a:pPr>
+            <a:r>
+              <a:rPr lang="sk-SK" dirty="0"/>
+              <a:t>Výmena obsahu úseku</a:t>
+            </a:r>
+          </a:p>
+          <a:p>
+            <a:pPr marL="1371600" lvl="2" indent="-457200">
+              <a:buFont typeface="+mj-lt"/>
+              <a:buAutoNum type="arabicPeriod"/>
+            </a:pPr>
+            <a:r>
+              <a:rPr lang="sk-SK" dirty="0"/>
+              <a:t>Prekrývanie „segmentov“</a:t>
+            </a:r>
+          </a:p>
+          <a:p>
+            <a:pPr marL="914400" lvl="1" indent="-457200">
+              <a:buFont typeface="+mj-lt"/>
+              <a:buAutoNum type="arabicPeriod"/>
+            </a:pPr>
+            <a:r>
+              <a:rPr lang="sk-SK" dirty="0"/>
+              <a:t>prideľovanie viacerých súvislých úsekov</a:t>
+            </a:r>
+          </a:p>
+          <a:p>
+            <a:pPr marL="1371600" lvl="2" indent="-457200">
+              <a:buFont typeface="+mj-lt"/>
+              <a:buAutoNum type="arabicPeriod"/>
+            </a:pPr>
+            <a:r>
+              <a:rPr lang="sk-SK" dirty="0"/>
+              <a:t>so statickým určením	</a:t>
+            </a:r>
+          </a:p>
+          <a:p>
+            <a:pPr marL="1371600" lvl="2" indent="-457200">
+              <a:buFont typeface="+mj-lt"/>
+              <a:buAutoNum type="arabicPeriod"/>
+            </a:pPr>
+            <a:r>
+              <a:rPr lang="sk-SK" dirty="0"/>
+              <a:t>s dynamickým určením</a:t>
+            </a:r>
+          </a:p>
+          <a:p>
+            <a:pPr marL="914400" lvl="1" indent="-457200">
+              <a:buFont typeface="+mj-lt"/>
+              <a:buAutoNum type="arabicPeriod"/>
+            </a:pPr>
+            <a:r>
+              <a:rPr lang="sk-SK" dirty="0"/>
+              <a:t>Prekrývanie segmentov – </a:t>
+            </a:r>
+            <a:r>
+              <a:rPr lang="sk-SK" sz="2000" dirty="0">
+                <a:solidFill>
+                  <a:srgbClr val="FF0000"/>
+                </a:solidFill>
+              </a:rPr>
+              <a:t>POZOR nie v zmysle segmentácie za pomoci moderných procesorov</a:t>
+            </a:r>
+            <a:endParaRPr lang="sk-SK" dirty="0">
+              <a:solidFill>
+                <a:srgbClr val="FF0000"/>
+              </a:solidFill>
+            </a:endParaRPr>
+          </a:p>
+          <a:p>
+            <a:pPr marL="914400" lvl="1" indent="-457200">
+              <a:buFont typeface="+mj-lt"/>
+              <a:buAutoNum type="arabicPeriod"/>
+            </a:pPr>
+            <a:r>
+              <a:rPr lang="sk-SK" dirty="0"/>
+              <a:t>Jednoduché stránkovanie</a:t>
+            </a:r>
+          </a:p>
+        </p:txBody>
+      </p:sp>
+    </p:spTree>
+    <p:extLst>
+      <p:ext uri="{BB962C8B-B14F-4D97-AF65-F5344CB8AC3E}">
+        <p14:creationId xmlns:p14="http://schemas.microsoft.com/office/powerpoint/2010/main" val="1543713500"/>
+      </p:ext>
+    </p:extLst>
+  </p:cSld>
+  <p:clrMapOvr>
+    <a:masterClrMapping/>
+  </p:clrMapOvr>
+</p:sld>
+</file>
+
+<file path=ppt/slides/slide60.xml><?xml version="1.0" encoding="utf-8"?>
 <p:sld xmlns:a="http://schemas.openxmlformats.org/drawingml/2006/main" xmlns:r="http://schemas.openxmlformats.org/officeDocument/2006/relationships" xmlns:p="http://schemas.openxmlformats.org/presentationml/2006/main">
   <p:cSld>
     <p:spTree>
@@ -40074,200 +39172,7 @@
 </p:sld>
 </file>
 
-<file path=ppt/slides/slide6.xml><?xml version="1.0" encoding="utf-8"?>
-<p:sld xmlns:a="http://schemas.openxmlformats.org/drawingml/2006/main" xmlns:r="http://schemas.openxmlformats.org/officeDocument/2006/relationships" xmlns:p="http://schemas.openxmlformats.org/presentationml/2006/main">
-  <p:cSld>
-    <p:spTree>
-      <p:nvGrpSpPr>
-        <p:cNvPr id="1" name=""/>
-        <p:cNvGrpSpPr/>
-        <p:nvPr/>
-      </p:nvGrpSpPr>
-      <p:grpSpPr>
-        <a:xfrm>
-          <a:off x="0" y="0"/>
-          <a:ext cx="0" cy="0"/>
-          <a:chOff x="0" y="0"/>
-          <a:chExt cx="0" cy="0"/>
-        </a:xfrm>
-      </p:grpSpPr>
-      <p:sp>
-        <p:nvSpPr>
-          <p:cNvPr id="14339" name="Rectangle 2"/>
-          <p:cNvSpPr>
-            <a:spLocks noGrp="1" noChangeArrowheads="1"/>
-          </p:cNvSpPr>
-          <p:nvPr>
-            <p:ph type="title"/>
-          </p:nvPr>
-        </p:nvSpPr>
-        <p:spPr/>
-        <p:txBody>
-          <a:bodyPr/>
-          <a:lstStyle/>
-          <a:p>
-            <a:r>
-              <a:rPr lang="sk-SK" dirty="0"/>
-              <a:t>Techniky prideľovania pamäti</a:t>
-            </a:r>
-            <a:br>
-              <a:rPr lang="sk-SK" dirty="0"/>
-            </a:br>
-            <a:r>
-              <a:rPr lang="sk-SK" sz="3200" dirty="0"/>
-              <a:t>(Historické prístupy)</a:t>
-            </a:r>
-            <a:endParaRPr lang="sk-SK" dirty="0"/>
-          </a:p>
-        </p:txBody>
-      </p:sp>
-      <p:sp>
-        <p:nvSpPr>
-          <p:cNvPr id="14340" name="Rectangle 3"/>
-          <p:cNvSpPr>
-            <a:spLocks noGrp="1" noChangeArrowheads="1"/>
-          </p:cNvSpPr>
-          <p:nvPr>
-            <p:ph idx="1"/>
-          </p:nvPr>
-        </p:nvSpPr>
-        <p:spPr/>
-        <p:txBody>
-          <a:bodyPr>
-            <a:normAutofit lnSpcReduction="10000"/>
-          </a:bodyPr>
-          <a:lstStyle/>
-          <a:p>
-            <a:r>
-              <a:rPr lang="sk-SK" dirty="0"/>
-              <a:t>Identické zobrazenie</a:t>
-            </a:r>
-          </a:p>
-          <a:p>
-            <a:pPr lvl="1"/>
-            <a:r>
-              <a:rPr lang="sk-SK" dirty="0"/>
-              <a:t>zobrazenie Z/a/=b,	a je adresa  z LAP a b je adresa z FAP</a:t>
-            </a:r>
-          </a:p>
-          <a:p>
-            <a:pPr marL="0" indent="0">
-              <a:buNone/>
-            </a:pPr>
-            <a:r>
-              <a:rPr lang="sk-SK" b="1" dirty="0"/>
-              <a:t>techniky prideľovania</a:t>
-            </a:r>
-          </a:p>
-          <a:p>
-            <a:pPr marL="914400" lvl="1" indent="-457200">
-              <a:buFont typeface="+mj-lt"/>
-              <a:buAutoNum type="arabicPeriod"/>
-            </a:pPr>
-            <a:r>
-              <a:rPr lang="sk-SK" dirty="0"/>
-              <a:t>prideľovanie jediného súvislého úseku</a:t>
-            </a:r>
-          </a:p>
-          <a:p>
-            <a:pPr marL="1371600" lvl="2" indent="-457200">
-              <a:buFont typeface="+mj-lt"/>
-              <a:buAutoNum type="arabicPeriod"/>
-            </a:pPr>
-            <a:r>
-              <a:rPr lang="sk-SK" dirty="0"/>
-              <a:t>Výmena obsahu úseku</a:t>
-            </a:r>
-          </a:p>
-          <a:p>
-            <a:pPr marL="1371600" lvl="2" indent="-457200">
-              <a:buFont typeface="+mj-lt"/>
-              <a:buAutoNum type="arabicPeriod"/>
-            </a:pPr>
-            <a:r>
-              <a:rPr lang="sk-SK" dirty="0"/>
-              <a:t>Prekrývanie „segmentov“</a:t>
-            </a:r>
-          </a:p>
-          <a:p>
-            <a:pPr marL="914400" lvl="1" indent="-457200">
-              <a:buFont typeface="+mj-lt"/>
-              <a:buAutoNum type="arabicPeriod"/>
-            </a:pPr>
-            <a:r>
-              <a:rPr lang="sk-SK" dirty="0"/>
-              <a:t>prideľovanie viacerých súvislých úsekov</a:t>
-            </a:r>
-          </a:p>
-          <a:p>
-            <a:pPr marL="1371600" lvl="2" indent="-457200">
-              <a:buFont typeface="+mj-lt"/>
-              <a:buAutoNum type="arabicPeriod"/>
-            </a:pPr>
-            <a:r>
-              <a:rPr lang="sk-SK" dirty="0"/>
-              <a:t>so statickým určením	</a:t>
-            </a:r>
-          </a:p>
-          <a:p>
-            <a:pPr marL="1371600" lvl="2" indent="-457200">
-              <a:buFont typeface="+mj-lt"/>
-              <a:buAutoNum type="arabicPeriod"/>
-            </a:pPr>
-            <a:r>
-              <a:rPr lang="sk-SK" dirty="0"/>
-              <a:t>s dynamickým určením</a:t>
-            </a:r>
-          </a:p>
-          <a:p>
-            <a:pPr marL="914400" lvl="1" indent="-457200">
-              <a:buFont typeface="+mj-lt"/>
-              <a:buAutoNum type="arabicPeriod"/>
-            </a:pPr>
-            <a:r>
-              <a:rPr lang="sk-SK" dirty="0"/>
-              <a:t>Prekrývanie segmentov – </a:t>
-            </a:r>
-            <a:r>
-              <a:rPr lang="sk-SK" sz="2000" dirty="0">
-                <a:solidFill>
-                  <a:srgbClr val="FF0000"/>
-                </a:solidFill>
-              </a:rPr>
-              <a:t>POZOR nie v zmysle segmentácie za pomoci moderných procesorov</a:t>
-            </a:r>
-            <a:endParaRPr lang="sk-SK" dirty="0">
-              <a:solidFill>
-                <a:srgbClr val="FF0000"/>
-              </a:solidFill>
-            </a:endParaRPr>
-          </a:p>
-          <a:p>
-            <a:pPr marL="914400" lvl="1" indent="-457200">
-              <a:buFont typeface="+mj-lt"/>
-              <a:buAutoNum type="arabicPeriod"/>
-            </a:pPr>
-            <a:r>
-              <a:rPr lang="sk-SK" dirty="0"/>
-              <a:t>Jednoduché stránkovanie</a:t>
-            </a:r>
-          </a:p>
-        </p:txBody>
-      </p:sp>
-    </p:spTree>
-    <p:extLst>
-      <p:ext uri="{BB962C8B-B14F-4D97-AF65-F5344CB8AC3E}">
-        <p14:creationId xmlns:p14="http://schemas.microsoft.com/office/powerpoint/2010/main" val="1543713500"/>
-      </p:ext>
-    </p:extLst>
-  </p:cSld>
-  <p:clrMapOvr>
-    <a:masterClrMapping/>
-  </p:clrMapOvr>
-</p:sld>
-</file>
-
-<file path=ppt/slides/slide60.xml><?xml version="1.0" encoding="utf-8"?>
+<file path=ppt/slides/slide61.xml><?xml version="1.0" encoding="utf-8"?>
 <p:sld xmlns:a="http://schemas.openxmlformats.org/drawingml/2006/main" xmlns:r="http://schemas.openxmlformats.org/officeDocument/2006/relationships" xmlns:p="http://schemas.openxmlformats.org/presentationml/2006/main">
   <p:cSld>
     <p:spTree>
@@ -40477,7 +39382,7 @@
 </p:sld>
 </file>
 
-<file path=ppt/slides/slide61.xml><?xml version="1.0" encoding="utf-8"?>
+<file path=ppt/slides/slide62.xml><?xml version="1.0" encoding="utf-8"?>
 <p:sld xmlns:a="http://schemas.openxmlformats.org/drawingml/2006/main" xmlns:r="http://schemas.openxmlformats.org/officeDocument/2006/relationships" xmlns:p="http://schemas.openxmlformats.org/presentationml/2006/main">
   <p:cSld>
     <p:spTree>
@@ -42874,7 +41779,7 @@
 </p:sld>
 </file>
 
-<file path=ppt/slides/slide62.xml><?xml version="1.0" encoding="utf-8"?>
+<file path=ppt/slides/slide63.xml><?xml version="1.0" encoding="utf-8"?>
 <p:sld xmlns:a="http://schemas.openxmlformats.org/drawingml/2006/main" xmlns:r="http://schemas.openxmlformats.org/officeDocument/2006/relationships" xmlns:p="http://schemas.openxmlformats.org/presentationml/2006/main">
   <p:cSld>
     <p:spTree>
@@ -45617,7 +44522,7 @@
 </p:sld>
 </file>
 
-<file path=ppt/slides/slide63.xml><?xml version="1.0" encoding="utf-8"?>
+<file path=ppt/slides/slide64.xml><?xml version="1.0" encoding="utf-8"?>
 <p:sld xmlns:a="http://schemas.openxmlformats.org/drawingml/2006/main" xmlns:r="http://schemas.openxmlformats.org/officeDocument/2006/relationships" xmlns:p="http://schemas.openxmlformats.org/presentationml/2006/main">
   <p:cSld>
     <p:spTree>
@@ -45750,7 +44655,7 @@
 </p:sld>
 </file>
 
-<file path=ppt/slides/slide64.xml><?xml version="1.0" encoding="utf-8"?>
+<file path=ppt/slides/slide65.xml><?xml version="1.0" encoding="utf-8"?>
 <p:sld xmlns:a="http://schemas.openxmlformats.org/drawingml/2006/main" xmlns:r="http://schemas.openxmlformats.org/officeDocument/2006/relationships" xmlns:p="http://schemas.openxmlformats.org/presentationml/2006/main">
   <p:cSld>
     <p:spTree>
@@ -45960,7 +44865,7 @@
 </p:sld>
 </file>
 
-<file path=ppt/slides/slide65.xml><?xml version="1.0" encoding="utf-8"?>
+<file path=ppt/slides/slide66.xml><?xml version="1.0" encoding="utf-8"?>
 <p:sld xmlns:a="http://schemas.openxmlformats.org/drawingml/2006/main" xmlns:r="http://schemas.openxmlformats.org/officeDocument/2006/relationships" xmlns:p="http://schemas.openxmlformats.org/presentationml/2006/main">
   <p:cSld>
     <p:spTree>
@@ -46240,7 +45145,7 @@
 </p:sld>
 </file>
 
-<file path=ppt/slides/slide66.xml><?xml version="1.0" encoding="utf-8"?>
+<file path=ppt/slides/slide67.xml><?xml version="1.0" encoding="utf-8"?>
 <p:sld xmlns:a="http://schemas.openxmlformats.org/drawingml/2006/main" xmlns:r="http://schemas.openxmlformats.org/officeDocument/2006/relationships" xmlns:p="http://schemas.openxmlformats.org/presentationml/2006/main">
   <p:cSld>
     <p:spTree>
@@ -46442,7 +45347,7 @@
 </p:sld>
 </file>
 
-<file path=ppt/slides/slide67.xml><?xml version="1.0" encoding="utf-8"?>
+<file path=ppt/slides/slide68.xml><?xml version="1.0" encoding="utf-8"?>
 <p:sld xmlns:a="http://schemas.openxmlformats.org/drawingml/2006/main" xmlns:r="http://schemas.openxmlformats.org/officeDocument/2006/relationships" xmlns:p="http://schemas.openxmlformats.org/presentationml/2006/main">
   <p:cSld>
     <p:spTree>
@@ -46605,7 +45510,7 @@
 </p:sld>
 </file>
 
-<file path=ppt/slides/slide68.xml><?xml version="1.0" encoding="utf-8"?>
+<file path=ppt/slides/slide69.xml><?xml version="1.0" encoding="utf-8"?>
 <p:sld xmlns:a="http://schemas.openxmlformats.org/drawingml/2006/main" xmlns:r="http://schemas.openxmlformats.org/officeDocument/2006/relationships" xmlns:p="http://schemas.openxmlformats.org/presentationml/2006/main">
   <p:cSld>
     <p:spTree>
@@ -47063,7 +45968,85 @@
 </p:sld>
 </file>
 
-<file path=ppt/slides/slide69.xml><?xml version="1.0" encoding="utf-8"?>
+<file path=ppt/slides/slide7.xml><?xml version="1.0" encoding="utf-8"?>
+<p:sld xmlns:a="http://schemas.openxmlformats.org/drawingml/2006/main" xmlns:r="http://schemas.openxmlformats.org/officeDocument/2006/relationships" xmlns:p="http://schemas.openxmlformats.org/presentationml/2006/main">
+  <p:cSld>
+    <p:spTree>
+      <p:nvGrpSpPr>
+        <p:cNvPr id="1" name=""/>
+        <p:cNvGrpSpPr/>
+        <p:nvPr/>
+      </p:nvGrpSpPr>
+      <p:grpSpPr>
+        <a:xfrm>
+          <a:off x="0" y="0"/>
+          <a:ext cx="0" cy="0"/>
+          <a:chOff x="0" y="0"/>
+          <a:chExt cx="0" cy="0"/>
+        </a:xfrm>
+      </p:grpSpPr>
+      <p:sp>
+        <p:nvSpPr>
+          <p:cNvPr id="4" name="Title 3"/>
+          <p:cNvSpPr>
+            <a:spLocks noGrp="1"/>
+          </p:cNvSpPr>
+          <p:nvPr>
+            <p:ph type="title"/>
+          </p:nvPr>
+        </p:nvSpPr>
+        <p:spPr/>
+        <p:txBody>
+          <a:bodyPr/>
+          <a:lstStyle/>
+          <a:p>
+            <a:r>
+              <a:rPr lang="sk-SK" dirty="0"/>
+              <a:t>Prideľovanie súvislého úseku</a:t>
+            </a:r>
+          </a:p>
+        </p:txBody>
+      </p:sp>
+      <p:sp>
+        <p:nvSpPr>
+          <p:cNvPr id="5" name="Text Placeholder 4"/>
+          <p:cNvSpPr>
+            <a:spLocks noGrp="1"/>
+          </p:cNvSpPr>
+          <p:nvPr>
+            <p:ph type="body" idx="1"/>
+          </p:nvPr>
+        </p:nvSpPr>
+        <p:spPr/>
+        <p:txBody>
+          <a:bodyPr/>
+          <a:lstStyle/>
+          <a:p>
+            <a:r>
+              <a:rPr lang="sk-SK" dirty="0" err="1"/>
+              <a:t>Jednoúlohové</a:t>
+            </a:r>
+            <a:r>
+              <a:rPr lang="sk-SK" dirty="0"/>
+              <a:t> OS</a:t>
+            </a:r>
+          </a:p>
+        </p:txBody>
+      </p:sp>
+    </p:spTree>
+    <p:extLst>
+      <p:ext uri="{BB962C8B-B14F-4D97-AF65-F5344CB8AC3E}">
+        <p14:creationId xmlns:p14="http://schemas.microsoft.com/office/powerpoint/2010/main" val="1428878316"/>
+      </p:ext>
+    </p:extLst>
+  </p:cSld>
+  <p:clrMapOvr>
+    <a:masterClrMapping/>
+  </p:clrMapOvr>
+</p:sld>
+</file>
+
+<file path=ppt/slides/slide70.xml><?xml version="1.0" encoding="utf-8"?>
 <p:sld xmlns:a="http://schemas.openxmlformats.org/drawingml/2006/main" xmlns:r="http://schemas.openxmlformats.org/officeDocument/2006/relationships" xmlns:p="http://schemas.openxmlformats.org/presentationml/2006/main">
   <p:cSld>
     <p:spTree>
@@ -47531,85 +46514,7 @@
 </p:sld>
 </file>
 
-<file path=ppt/slides/slide7.xml><?xml version="1.0" encoding="utf-8"?>
-<p:sld xmlns:a="http://schemas.openxmlformats.org/drawingml/2006/main" xmlns:r="http://schemas.openxmlformats.org/officeDocument/2006/relationships" xmlns:p="http://schemas.openxmlformats.org/presentationml/2006/main">
-  <p:cSld>
-    <p:spTree>
-      <p:nvGrpSpPr>
-        <p:cNvPr id="1" name=""/>
-        <p:cNvGrpSpPr/>
-        <p:nvPr/>
-      </p:nvGrpSpPr>
-      <p:grpSpPr>
-        <a:xfrm>
-          <a:off x="0" y="0"/>
-          <a:ext cx="0" cy="0"/>
-          <a:chOff x="0" y="0"/>
-          <a:chExt cx="0" cy="0"/>
-        </a:xfrm>
-      </p:grpSpPr>
-      <p:sp>
-        <p:nvSpPr>
-          <p:cNvPr id="4" name="Title 3"/>
-          <p:cNvSpPr>
-            <a:spLocks noGrp="1"/>
-          </p:cNvSpPr>
-          <p:nvPr>
-            <p:ph type="title"/>
-          </p:nvPr>
-        </p:nvSpPr>
-        <p:spPr/>
-        <p:txBody>
-          <a:bodyPr/>
-          <a:lstStyle/>
-          <a:p>
-            <a:r>
-              <a:rPr lang="sk-SK" dirty="0"/>
-              <a:t>Prideľovanie súvislého úseku</a:t>
-            </a:r>
-          </a:p>
-        </p:txBody>
-      </p:sp>
-      <p:sp>
-        <p:nvSpPr>
-          <p:cNvPr id="5" name="Text Placeholder 4"/>
-          <p:cNvSpPr>
-            <a:spLocks noGrp="1"/>
-          </p:cNvSpPr>
-          <p:nvPr>
-            <p:ph type="body" idx="1"/>
-          </p:nvPr>
-        </p:nvSpPr>
-        <p:spPr/>
-        <p:txBody>
-          <a:bodyPr/>
-          <a:lstStyle/>
-          <a:p>
-            <a:r>
-              <a:rPr lang="sk-SK" dirty="0" err="1"/>
-              <a:t>Jednoúlohové</a:t>
-            </a:r>
-            <a:r>
-              <a:rPr lang="sk-SK" dirty="0"/>
-              <a:t> OS</a:t>
-            </a:r>
-          </a:p>
-        </p:txBody>
-      </p:sp>
-    </p:spTree>
-    <p:extLst>
-      <p:ext uri="{BB962C8B-B14F-4D97-AF65-F5344CB8AC3E}">
-        <p14:creationId xmlns:p14="http://schemas.microsoft.com/office/powerpoint/2010/main" val="1428878316"/>
-      </p:ext>
-    </p:extLst>
-  </p:cSld>
-  <p:clrMapOvr>
-    <a:masterClrMapping/>
-  </p:clrMapOvr>
-</p:sld>
-</file>
-
-<file path=ppt/slides/slide70.xml><?xml version="1.0" encoding="utf-8"?>
+<file path=ppt/slides/slide71.xml><?xml version="1.0" encoding="utf-8"?>
 <p:sld xmlns:a="http://schemas.openxmlformats.org/drawingml/2006/main" xmlns:r="http://schemas.openxmlformats.org/officeDocument/2006/relationships" xmlns:p="http://schemas.openxmlformats.org/presentationml/2006/main">
   <p:cSld>
     <p:spTree>
@@ -48096,7 +47001,7 @@
 </p:sld>
 </file>
 
-<file path=ppt/slides/slide71.xml><?xml version="1.0" encoding="utf-8"?>
+<file path=ppt/slides/slide72.xml><?xml version="1.0" encoding="utf-8"?>
 <p:sld xmlns:a="http://schemas.openxmlformats.org/drawingml/2006/main" xmlns:r="http://schemas.openxmlformats.org/officeDocument/2006/relationships" xmlns:p="http://schemas.openxmlformats.org/presentationml/2006/main">
   <p:cSld>
     <p:spTree>
@@ -48765,10 +47670,10 @@
           <p:nvPr/>
         </p:nvPicPr>
         <p:blipFill>
-          <a:blip r:embed="rId2">
+          <a:blip>
             <a:extLst>
               <a:ext uri="{96DAC541-7B7A-43D3-8B79-37D633B846F1}">
-                <asvg:svgBlip xmlns:asvg="http://schemas.microsoft.com/office/drawing/2016/SVG/main" r:embed="rId3"/>
+                <asvg:svgBlip xmlns:asvg="http://schemas.microsoft.com/office/drawing/2016/SVG/main" r:embed="rId2"/>
               </a:ext>
             </a:extLst>
           </a:blip>
@@ -48778,8 +47683,39 @@
         </p:blipFill>
         <p:spPr>
           <a:xfrm>
-            <a:off x="3111500" y="1837692"/>
-            <a:ext cx="5257800" cy="4371654"/>
+            <a:off x="652507" y="1837692"/>
+            <a:ext cx="3555978" cy="2956656"/>
+          </a:xfrm>
+          <a:prstGeom prst="rect">
+            <a:avLst/>
+          </a:prstGeom>
+        </p:spPr>
+      </p:pic>
+      <p:pic>
+        <p:nvPicPr>
+          <p:cNvPr id="2" name="Obrázok 1">
+            <a:extLst>
+              <a:ext uri="{FF2B5EF4-FFF2-40B4-BE49-F238E27FC236}">
+                <a16:creationId xmlns:a16="http://schemas.microsoft.com/office/drawing/2014/main" id="{6235608E-51D7-A40F-9070-CCCB3893292E}"/>
+              </a:ext>
+            </a:extLst>
+          </p:cNvPr>
+          <p:cNvPicPr>
+            <a:picLocks noChangeAspect="1"/>
+          </p:cNvPicPr>
+          <p:nvPr/>
+        </p:nvPicPr>
+        <p:blipFill>
+          <a:blip r:embed="rId3"/>
+          <a:srcRect t="23559"/>
+          <a:stretch>
+            <a:fillRect/>
+          </a:stretch>
+        </p:blipFill>
+        <p:spPr>
+          <a:xfrm>
+            <a:off x="4307338" y="2150075"/>
+            <a:ext cx="7664642" cy="2117490"/>
           </a:xfrm>
           <a:prstGeom prst="rect">
             <a:avLst/>
